--- a/Hagn_Daniel_Mastervortrag.pptx
+++ b/Hagn_Daniel_Mastervortrag.pptx
@@ -5,22 +5,29 @@
     <p:sldMasterId id="2147483648" r:id="rId1"/>
   </p:sldMasterIdLst>
   <p:notesMasterIdLst>
-    <p:notesMasterId r:id="rId12"/>
+    <p:notesMasterId r:id="rId19"/>
   </p:notesMasterIdLst>
   <p:handoutMasterIdLst>
-    <p:handoutMasterId r:id="rId13"/>
+    <p:handoutMasterId r:id="rId20"/>
   </p:handoutMasterIdLst>
   <p:sldIdLst>
     <p:sldId id="256" r:id="rId2"/>
     <p:sldId id="292" r:id="rId3"/>
-    <p:sldId id="269" r:id="rId4"/>
-    <p:sldId id="288" r:id="rId5"/>
-    <p:sldId id="290" r:id="rId6"/>
-    <p:sldId id="306" r:id="rId7"/>
-    <p:sldId id="268" r:id="rId8"/>
-    <p:sldId id="280" r:id="rId9"/>
-    <p:sldId id="295" r:id="rId10"/>
-    <p:sldId id="278" r:id="rId11"/>
+    <p:sldId id="307" r:id="rId4"/>
+    <p:sldId id="313" r:id="rId5"/>
+    <p:sldId id="312" r:id="rId6"/>
+    <p:sldId id="308" r:id="rId7"/>
+    <p:sldId id="311" r:id="rId8"/>
+    <p:sldId id="309" r:id="rId9"/>
+    <p:sldId id="310" r:id="rId10"/>
+    <p:sldId id="288" r:id="rId11"/>
+    <p:sldId id="290" r:id="rId12"/>
+    <p:sldId id="306" r:id="rId13"/>
+    <p:sldId id="268" r:id="rId14"/>
+    <p:sldId id="280" r:id="rId15"/>
+    <p:sldId id="269" r:id="rId16"/>
+    <p:sldId id="295" r:id="rId17"/>
+    <p:sldId id="278" r:id="rId18"/>
   </p:sldIdLst>
   <p:sldSz cx="9144000" cy="5143500" type="screen16x9"/>
   <p:notesSz cx="6858000" cy="9144000"/>
@@ -2481,8 +2488,20 @@
           <a:lstStyle/>
           <a:p>
             <a:r>
+              <a:rPr lang="de-DE" dirty="0"/>
+              <a:t>Vorher Präparation nennen, </a:t>
+            </a:r>
+            <a:r>
               <a:rPr lang="de-DE" dirty="0" err="1"/>
-              <a:t>What</a:t>
+              <a:t>evtl</a:t>
+            </a:r>
+            <a:r>
+              <a:rPr lang="de-DE" dirty="0"/>
+              <a:t> Pumpschema </a:t>
+            </a:r>
+            <a:r>
+              <a:rPr lang="de-DE" dirty="0" err="1"/>
+              <a:t>bild</a:t>
             </a:r>
             <a:r>
               <a:rPr lang="de-DE" dirty="0"/>
@@ -2490,7 +2509,18 @@
             </a:r>
             <a:r>
               <a:rPr lang="de-DE" dirty="0" err="1"/>
-              <a:t>else</a:t>
+              <a:t>dazuu</a:t>
+            </a:r>
+            <a:endParaRPr lang="de-DE" dirty="0"/>
+          </a:p>
+          <a:p>
+            <a:r>
+              <a:rPr lang="de-DE" dirty="0"/>
+              <a:t>First global </a:t>
+            </a:r>
+            <a:r>
+              <a:rPr lang="de-DE" dirty="0" err="1"/>
+              <a:t>Rabii</a:t>
             </a:r>
             <a:r>
               <a:rPr lang="de-DE" dirty="0"/>
@@ -2498,7 +2528,7 @@
             </a:r>
             <a:r>
               <a:rPr lang="de-DE" dirty="0" err="1"/>
-              <a:t>can</a:t>
+              <a:t>oscillations</a:t>
             </a:r>
             <a:r>
               <a:rPr lang="de-DE" dirty="0"/>
@@ -2506,7 +2536,7 @@
             </a:r>
             <a:r>
               <a:rPr lang="de-DE" dirty="0" err="1"/>
-              <a:t>be</a:t>
+              <a:t>for</a:t>
             </a:r>
             <a:r>
               <a:rPr lang="de-DE" dirty="0"/>
@@ -2514,23 +2544,49 @@
             </a:r>
             <a:r>
               <a:rPr lang="de-DE" dirty="0" err="1"/>
-              <a:t>done</a:t>
+              <a:t>determining</a:t>
+            </a:r>
+            <a:r>
+              <a:rPr lang="de-DE" dirty="0"/>
+              <a:t> Rabi </a:t>
+            </a:r>
+            <a:r>
+              <a:rPr lang="de-DE" dirty="0" err="1"/>
+              <a:t>frequency</a:t>
+            </a:r>
+            <a:r>
+              <a:rPr lang="de-DE" dirty="0"/>
+              <a:t>-&gt; </a:t>
+            </a:r>
+            <a:r>
+              <a:rPr lang="de-DE" dirty="0" err="1"/>
+              <a:t>Intensity</a:t>
+            </a:r>
+            <a:r>
+              <a:rPr lang="de-DE" dirty="0"/>
+              <a:t> and pulse </a:t>
+            </a:r>
+            <a:r>
+              <a:rPr lang="de-DE" dirty="0" err="1"/>
+              <a:t>length</a:t>
             </a:r>
             <a:r>
               <a:rPr lang="de-DE" dirty="0"/>
               <a:t> </a:t>
             </a:r>
+          </a:p>
+          <a:p>
             <a:r>
               <a:rPr lang="de-DE" dirty="0" err="1"/>
-              <a:t>with</a:t>
-            </a:r>
-            <a:r>
-              <a:rPr lang="de-DE" dirty="0"/>
-              <a:t> a </a:t>
+              <a:t>Then</a:t>
+            </a:r>
+            <a:r>
+              <a:rPr lang="de-DE" dirty="0"/>
+              <a:t> global </a:t>
             </a:r>
             <a:r>
               <a:rPr lang="de-DE" dirty="0" err="1"/>
-              <a:t>raman</a:t>
+              <a:t>gate</a:t>
             </a:r>
             <a:r>
               <a:rPr lang="de-DE" dirty="0"/>
@@ -2538,77 +2594,9 @@
             </a:r>
             <a:r>
               <a:rPr lang="de-DE" dirty="0" err="1"/>
-              <a:t>laser</a:t>
-            </a:r>
-            <a:r>
-              <a:rPr lang="de-DE" dirty="0"/>
-              <a:t> </a:t>
-            </a:r>
-            <a:r>
-              <a:rPr lang="de-DE" dirty="0" err="1"/>
-              <a:t>system</a:t>
-            </a:r>
-            <a:r>
-              <a:rPr lang="de-DE" dirty="0"/>
-              <a:t>?</a:t>
-            </a:r>
-          </a:p>
-          <a:p>
+              <a:t>operations</a:t>
+            </a:r>
             <a:endParaRPr lang="de-DE" dirty="0"/>
-          </a:p>
-          <a:p>
-            <a:r>
-              <a:rPr lang="de-DE" dirty="0"/>
-              <a:t>Werte weg</a:t>
-            </a:r>
-          </a:p>
-          <a:p>
-            <a:r>
-              <a:rPr lang="de-DE" dirty="0"/>
-              <a:t>Nacheinander jeden mf gepumpt</a:t>
-            </a:r>
-          </a:p>
-          <a:p>
-            <a:r>
-              <a:rPr lang="de-DE" dirty="0"/>
-              <a:t>Nacheinander schritt für schritt die Frequenz moduliert</a:t>
-            </a:r>
-          </a:p>
-          <a:p>
-            <a:endParaRPr lang="de-DE" dirty="0"/>
-          </a:p>
-          <a:p>
-            <a:r>
-              <a:rPr lang="de-DE" dirty="0"/>
-              <a:t>Altes Pumpschema als Vergleich nennen</a:t>
-            </a:r>
-          </a:p>
-          <a:p>
-            <a:r>
-              <a:rPr lang="de-DE" dirty="0"/>
-              <a:t>Vergleich Pump-effizienzen</a:t>
-            </a:r>
-          </a:p>
-          <a:p>
-            <a:endParaRPr lang="de-DE" dirty="0"/>
-          </a:p>
-          <a:p>
-            <a:r>
-              <a:rPr lang="de-DE" dirty="0" err="1"/>
-              <a:t>Cavity</a:t>
-            </a:r>
-            <a:r>
-              <a:rPr lang="de-DE" dirty="0"/>
-              <a:t> bei EOM </a:t>
-            </a:r>
-            <a:r>
-              <a:rPr lang="de-DE" dirty="0" err="1"/>
-              <a:t>schift</a:t>
-            </a:r>
-            <a:r>
-              <a:rPr lang="de-DE" dirty="0"/>
-              <a:t> neu locken doof</a:t>
-            </a:r>
           </a:p>
         </p:txBody>
       </p:sp>
@@ -2688,7 +2676,7 @@
             <a:fld id="{E526A819-9FA5-480B-AA80-B0EE2CE4290D}" type="slidenum">
               <a:rPr lang="de-DE" altLang="de-DE" smtClean="0"/>
               <a:pPr/>
-              <a:t>3</a:t>
+              <a:t>10</a:t>
             </a:fld>
             <a:endParaRPr lang="de-DE" altLang="de-DE"/>
           </a:p>
@@ -2697,7 +2685,7 @@
     </p:spTree>
     <p:extLst>
       <p:ext uri="{BB962C8B-B14F-4D97-AF65-F5344CB8AC3E}">
-        <p14:creationId xmlns:p14="http://schemas.microsoft.com/office/powerpoint/2010/main" val="3658338182"/>
+        <p14:creationId xmlns:p14="http://schemas.microsoft.com/office/powerpoint/2010/main" val="3986607535"/>
       </p:ext>
     </p:extLst>
   </p:cSld>
@@ -2753,19 +2741,19 @@
           <a:p>
             <a:r>
               <a:rPr lang="de-DE" dirty="0"/>
-              <a:t>Vorher Präparation nennen, </a:t>
+              <a:t>Building al </a:t>
             </a:r>
             <a:r>
               <a:rPr lang="de-DE" dirty="0" err="1"/>
-              <a:t>evtl</a:t>
-            </a:r>
-            <a:r>
-              <a:rPr lang="de-DE" dirty="0"/>
-              <a:t> Pumpschema </a:t>
+              <a:t>local</a:t>
+            </a:r>
+            <a:r>
+              <a:rPr lang="de-DE" dirty="0"/>
+              <a:t> Raman </a:t>
             </a:r>
             <a:r>
               <a:rPr lang="de-DE" dirty="0" err="1"/>
-              <a:t>bild</a:t>
+              <a:t>laser</a:t>
             </a:r>
             <a:r>
               <a:rPr lang="de-DE" dirty="0"/>
@@ -2773,26 +2761,15 @@
             </a:r>
             <a:r>
               <a:rPr lang="de-DE" dirty="0" err="1"/>
-              <a:t>dazuu</a:t>
-            </a:r>
-            <a:endParaRPr lang="de-DE" dirty="0"/>
-          </a:p>
-          <a:p>
-            <a:r>
-              <a:rPr lang="de-DE" dirty="0"/>
-              <a:t>First global </a:t>
+              <a:t>system</a:t>
+            </a:r>
+            <a:r>
+              <a:rPr lang="de-DE" dirty="0"/>
+              <a:t> </a:t>
             </a:r>
             <a:r>
               <a:rPr lang="de-DE" dirty="0" err="1"/>
-              <a:t>Rabii</a:t>
-            </a:r>
-            <a:r>
-              <a:rPr lang="de-DE" dirty="0"/>
-              <a:t> </a:t>
-            </a:r>
-            <a:r>
-              <a:rPr lang="de-DE" dirty="0" err="1"/>
-              <a:t>oscillations</a:t>
+              <a:t>board</a:t>
             </a:r>
             <a:r>
               <a:rPr lang="de-DE" dirty="0"/>
@@ -2808,59 +2785,53 @@
             </a:r>
             <a:r>
               <a:rPr lang="de-DE" dirty="0" err="1"/>
-              <a:t>determining</a:t>
-            </a:r>
-            <a:r>
-              <a:rPr lang="de-DE" dirty="0"/>
-              <a:t> Rabi </a:t>
+              <a:t>addressing</a:t>
+            </a:r>
+            <a:r>
+              <a:rPr lang="de-DE" dirty="0"/>
+              <a:t> </a:t>
             </a:r>
             <a:r>
               <a:rPr lang="de-DE" dirty="0" err="1"/>
-              <a:t>frequency</a:t>
-            </a:r>
-            <a:r>
-              <a:rPr lang="de-DE" dirty="0"/>
-              <a:t>-&gt; </a:t>
+              <a:t>the</a:t>
+            </a:r>
+            <a:r>
+              <a:rPr lang="de-DE" dirty="0"/>
+              <a:t> </a:t>
             </a:r>
             <a:r>
               <a:rPr lang="de-DE" dirty="0" err="1"/>
-              <a:t>Intensity</a:t>
-            </a:r>
-            <a:r>
-              <a:rPr lang="de-DE" dirty="0"/>
-              <a:t> and pulse </a:t>
+              <a:t>atoms</a:t>
+            </a:r>
+            <a:r>
+              <a:rPr lang="de-DE" dirty="0"/>
+              <a:t> </a:t>
             </a:r>
             <a:r>
               <a:rPr lang="de-DE" dirty="0" err="1"/>
-              <a:t>length</a:t>
-            </a:r>
-            <a:r>
-              <a:rPr lang="de-DE" dirty="0"/>
-              <a:t> </a:t>
-            </a:r>
-          </a:p>
-          <a:p>
+              <a:t>with</a:t>
+            </a:r>
+            <a:r>
+              <a:rPr lang="de-DE" dirty="0"/>
+              <a:t> multitone AODs</a:t>
+            </a:r>
+          </a:p>
+          <a:p>
+            <a:endParaRPr lang="de-DE" dirty="0"/>
+          </a:p>
+          <a:p>
+            <a:r>
+              <a:rPr lang="de-DE" dirty="0"/>
+              <a:t>Moritz </a:t>
+            </a:r>
             <a:r>
               <a:rPr lang="de-DE" dirty="0" err="1"/>
-              <a:t>Then</a:t>
-            </a:r>
-            <a:r>
-              <a:rPr lang="de-DE" dirty="0"/>
-              <a:t> global </a:t>
-            </a:r>
-            <a:r>
-              <a:rPr lang="de-DE" dirty="0" err="1"/>
-              <a:t>gate</a:t>
-            </a:r>
-            <a:r>
-              <a:rPr lang="de-DE" dirty="0"/>
-              <a:t> </a:t>
-            </a:r>
-            <a:r>
-              <a:rPr lang="de-DE" dirty="0" err="1"/>
-              <a:t>operations</a:t>
-            </a:r>
-            <a:endParaRPr lang="de-DE" dirty="0"/>
+              <a:t>Domack</a:t>
+            </a:r>
+            <a:r>
+              <a:rPr lang="de-DE" dirty="0"/>
+              <a:t> hat neuere Version</a:t>
+            </a:r>
           </a:p>
         </p:txBody>
       </p:sp>
@@ -2940,7 +2911,7 @@
             <a:fld id="{E526A819-9FA5-480B-AA80-B0EE2CE4290D}" type="slidenum">
               <a:rPr lang="de-DE" altLang="de-DE" smtClean="0"/>
               <a:pPr/>
-              <a:t>4</a:t>
+              <a:t>11</a:t>
             </a:fld>
             <a:endParaRPr lang="de-DE" altLang="de-DE"/>
           </a:p>
@@ -2949,7 +2920,7 @@
     </p:spTree>
     <p:extLst>
       <p:ext uri="{BB962C8B-B14F-4D97-AF65-F5344CB8AC3E}">
-        <p14:creationId xmlns:p14="http://schemas.microsoft.com/office/powerpoint/2010/main" val="3986607535"/>
+        <p14:creationId xmlns:p14="http://schemas.microsoft.com/office/powerpoint/2010/main" val="4167532845"/>
       </p:ext>
     </p:extLst>
   </p:cSld>
@@ -3003,99 +2974,7 @@
           <a:bodyPr/>
           <a:lstStyle/>
           <a:p>
-            <a:r>
-              <a:rPr lang="de-DE" dirty="0"/>
-              <a:t>Building al </a:t>
-            </a:r>
-            <a:r>
-              <a:rPr lang="de-DE" dirty="0" err="1"/>
-              <a:t>local</a:t>
-            </a:r>
-            <a:r>
-              <a:rPr lang="de-DE" dirty="0"/>
-              <a:t> Raman </a:t>
-            </a:r>
-            <a:r>
-              <a:rPr lang="de-DE" dirty="0" err="1"/>
-              <a:t>laser</a:t>
-            </a:r>
-            <a:r>
-              <a:rPr lang="de-DE" dirty="0"/>
-              <a:t> </a:t>
-            </a:r>
-            <a:r>
-              <a:rPr lang="de-DE" dirty="0" err="1"/>
-              <a:t>system</a:t>
-            </a:r>
-            <a:r>
-              <a:rPr lang="de-DE" dirty="0"/>
-              <a:t> </a:t>
-            </a:r>
-            <a:r>
-              <a:rPr lang="de-DE" dirty="0" err="1"/>
-              <a:t>board</a:t>
-            </a:r>
-            <a:r>
-              <a:rPr lang="de-DE" dirty="0"/>
-              <a:t> </a:t>
-            </a:r>
-            <a:r>
-              <a:rPr lang="de-DE" dirty="0" err="1"/>
-              <a:t>for</a:t>
-            </a:r>
-            <a:r>
-              <a:rPr lang="de-DE" dirty="0"/>
-              <a:t> </a:t>
-            </a:r>
-            <a:r>
-              <a:rPr lang="de-DE" dirty="0" err="1"/>
-              <a:t>addressing</a:t>
-            </a:r>
-            <a:r>
-              <a:rPr lang="de-DE" dirty="0"/>
-              <a:t> </a:t>
-            </a:r>
-            <a:r>
-              <a:rPr lang="de-DE" dirty="0" err="1"/>
-              <a:t>the</a:t>
-            </a:r>
-            <a:r>
-              <a:rPr lang="de-DE" dirty="0"/>
-              <a:t> </a:t>
-            </a:r>
-            <a:r>
-              <a:rPr lang="de-DE" dirty="0" err="1"/>
-              <a:t>atoms</a:t>
-            </a:r>
-            <a:r>
-              <a:rPr lang="de-DE" dirty="0"/>
-              <a:t> </a:t>
-            </a:r>
-            <a:r>
-              <a:rPr lang="de-DE" dirty="0" err="1"/>
-              <a:t>with</a:t>
-            </a:r>
-            <a:r>
-              <a:rPr lang="de-DE" dirty="0"/>
-              <a:t> multitone AODs</a:t>
-            </a:r>
-          </a:p>
-          <a:p>
             <a:endParaRPr lang="de-DE" dirty="0"/>
-          </a:p>
-          <a:p>
-            <a:r>
-              <a:rPr lang="de-DE" dirty="0"/>
-              <a:t>Moritz </a:t>
-            </a:r>
-            <a:r>
-              <a:rPr lang="de-DE" dirty="0" err="1"/>
-              <a:t>Domack</a:t>
-            </a:r>
-            <a:r>
-              <a:rPr lang="de-DE" dirty="0"/>
-              <a:t> hat neuere Version</a:t>
-            </a:r>
           </a:p>
         </p:txBody>
       </p:sp>
@@ -3175,7 +3054,7 @@
             <a:fld id="{E526A819-9FA5-480B-AA80-B0EE2CE4290D}" type="slidenum">
               <a:rPr lang="de-DE" altLang="de-DE" smtClean="0"/>
               <a:pPr/>
-              <a:t>5</a:t>
+              <a:t>14</a:t>
             </a:fld>
             <a:endParaRPr lang="de-DE" altLang="de-DE"/>
           </a:p>
@@ -3184,7 +3063,7 @@
     </p:spTree>
     <p:extLst>
       <p:ext uri="{BB962C8B-B14F-4D97-AF65-F5344CB8AC3E}">
-        <p14:creationId xmlns:p14="http://schemas.microsoft.com/office/powerpoint/2010/main" val="4167532845"/>
+        <p14:creationId xmlns:p14="http://schemas.microsoft.com/office/powerpoint/2010/main" val="2910314792"/>
       </p:ext>
     </p:extLst>
   </p:cSld>
@@ -3238,7 +3117,135 @@
           <a:bodyPr/>
           <a:lstStyle/>
           <a:p>
+            <a:r>
+              <a:rPr lang="de-DE" dirty="0" err="1"/>
+              <a:t>What</a:t>
+            </a:r>
+            <a:r>
+              <a:rPr lang="de-DE" dirty="0"/>
+              <a:t> </a:t>
+            </a:r>
+            <a:r>
+              <a:rPr lang="de-DE" dirty="0" err="1"/>
+              <a:t>else</a:t>
+            </a:r>
+            <a:r>
+              <a:rPr lang="de-DE" dirty="0"/>
+              <a:t> </a:t>
+            </a:r>
+            <a:r>
+              <a:rPr lang="de-DE" dirty="0" err="1"/>
+              <a:t>can</a:t>
+            </a:r>
+            <a:r>
+              <a:rPr lang="de-DE" dirty="0"/>
+              <a:t> </a:t>
+            </a:r>
+            <a:r>
+              <a:rPr lang="de-DE" dirty="0" err="1"/>
+              <a:t>be</a:t>
+            </a:r>
+            <a:r>
+              <a:rPr lang="de-DE" dirty="0"/>
+              <a:t> </a:t>
+            </a:r>
+            <a:r>
+              <a:rPr lang="de-DE" dirty="0" err="1"/>
+              <a:t>done</a:t>
+            </a:r>
+            <a:r>
+              <a:rPr lang="de-DE" dirty="0"/>
+              <a:t> </a:t>
+            </a:r>
+            <a:r>
+              <a:rPr lang="de-DE" dirty="0" err="1"/>
+              <a:t>with</a:t>
+            </a:r>
+            <a:r>
+              <a:rPr lang="de-DE" dirty="0"/>
+              <a:t> a </a:t>
+            </a:r>
+            <a:r>
+              <a:rPr lang="de-DE" dirty="0" err="1"/>
+              <a:t>raman</a:t>
+            </a:r>
+            <a:r>
+              <a:rPr lang="de-DE" dirty="0"/>
+              <a:t> </a:t>
+            </a:r>
+            <a:r>
+              <a:rPr lang="de-DE" dirty="0" err="1"/>
+              <a:t>laser</a:t>
+            </a:r>
+            <a:r>
+              <a:rPr lang="de-DE" dirty="0"/>
+              <a:t> </a:t>
+            </a:r>
+            <a:r>
+              <a:rPr lang="de-DE" dirty="0" err="1"/>
+              <a:t>system</a:t>
+            </a:r>
+            <a:r>
+              <a:rPr lang="de-DE" dirty="0"/>
+              <a:t>?</a:t>
+            </a:r>
+          </a:p>
+          <a:p>
             <a:endParaRPr lang="de-DE" dirty="0"/>
+          </a:p>
+          <a:p>
+            <a:r>
+              <a:rPr lang="de-DE" dirty="0"/>
+              <a:t>Werte weg</a:t>
+            </a:r>
+          </a:p>
+          <a:p>
+            <a:r>
+              <a:rPr lang="de-DE" dirty="0"/>
+              <a:t>Nacheinander jeden mf gepumpt</a:t>
+            </a:r>
+          </a:p>
+          <a:p>
+            <a:r>
+              <a:rPr lang="de-DE" dirty="0"/>
+              <a:t>Nacheinander schritt für schritt die Frequenz moduliert</a:t>
+            </a:r>
+          </a:p>
+          <a:p>
+            <a:endParaRPr lang="de-DE" dirty="0"/>
+          </a:p>
+          <a:p>
+            <a:r>
+              <a:rPr lang="de-DE" dirty="0"/>
+              <a:t>Altes Pumpschema als Vergleich nennen</a:t>
+            </a:r>
+          </a:p>
+          <a:p>
+            <a:r>
+              <a:rPr lang="de-DE" dirty="0"/>
+              <a:t>Vergleich Pump-effizienzen</a:t>
+            </a:r>
+          </a:p>
+          <a:p>
+            <a:endParaRPr lang="de-DE" dirty="0"/>
+          </a:p>
+          <a:p>
+            <a:r>
+              <a:rPr lang="de-DE" dirty="0" err="1"/>
+              <a:t>Cavity</a:t>
+            </a:r>
+            <a:r>
+              <a:rPr lang="de-DE" dirty="0"/>
+              <a:t> bei EOM </a:t>
+            </a:r>
+            <a:r>
+              <a:rPr lang="de-DE" dirty="0" err="1"/>
+              <a:t>schift</a:t>
+            </a:r>
+            <a:r>
+              <a:rPr lang="de-DE" dirty="0"/>
+              <a:t> neu locken doof</a:t>
+            </a:r>
           </a:p>
         </p:txBody>
       </p:sp>
@@ -3318,7 +3325,7 @@
             <a:fld id="{E526A819-9FA5-480B-AA80-B0EE2CE4290D}" type="slidenum">
               <a:rPr lang="de-DE" altLang="de-DE" smtClean="0"/>
               <a:pPr/>
-              <a:t>8</a:t>
+              <a:t>15</a:t>
             </a:fld>
             <a:endParaRPr lang="de-DE" altLang="de-DE"/>
           </a:p>
@@ -3327,7 +3334,7 @@
     </p:spTree>
     <p:extLst>
       <p:ext uri="{BB962C8B-B14F-4D97-AF65-F5344CB8AC3E}">
-        <p14:creationId xmlns:p14="http://schemas.microsoft.com/office/powerpoint/2010/main" val="2910314792"/>
+        <p14:creationId xmlns:p14="http://schemas.microsoft.com/office/powerpoint/2010/main" val="3658338182"/>
       </p:ext>
     </p:extLst>
   </p:cSld>
@@ -7174,6 +7181,2191 @@
   <p:cSld>
     <p:spTree>
       <p:nvGrpSpPr>
+        <p:cNvPr id="1" name="">
+          <a:extLst>
+            <a:ext uri="{FF2B5EF4-FFF2-40B4-BE49-F238E27FC236}">
+              <a16:creationId xmlns:a16="http://schemas.microsoft.com/office/drawing/2014/main" id="{9765CFBB-BD42-7221-DBFE-1EB6F3AA719A}"/>
+            </a:ext>
+          </a:extLst>
+        </p:cNvPr>
+        <p:cNvGrpSpPr/>
+        <p:nvPr/>
+      </p:nvGrpSpPr>
+      <p:grpSpPr>
+        <a:xfrm>
+          <a:off x="0" y="0"/>
+          <a:ext cx="0" cy="0"/>
+          <a:chOff x="0" y="0"/>
+          <a:chExt cx="0" cy="0"/>
+        </a:xfrm>
+      </p:grpSpPr>
+      <p:sp>
+        <p:nvSpPr>
+          <p:cNvPr id="2" name="Titel 1">
+            <a:extLst>
+              <a:ext uri="{FF2B5EF4-FFF2-40B4-BE49-F238E27FC236}">
+                <a16:creationId xmlns:a16="http://schemas.microsoft.com/office/drawing/2014/main" id="{D8CDCF15-F814-4D3C-493B-7A6FFB9F9B2C}"/>
+              </a:ext>
+            </a:extLst>
+          </p:cNvPr>
+          <p:cNvSpPr>
+            <a:spLocks noGrp="1"/>
+          </p:cNvSpPr>
+          <p:nvPr>
+            <p:ph type="title"/>
+          </p:nvPr>
+        </p:nvSpPr>
+        <p:spPr/>
+        <p:txBody>
+          <a:bodyPr/>
+          <a:lstStyle/>
+          <a:p>
+            <a:r>
+              <a:rPr lang="de-DE" dirty="0"/>
+              <a:t>Outlook</a:t>
+            </a:r>
+          </a:p>
+        </p:txBody>
+      </p:sp>
+      <p:pic>
+        <p:nvPicPr>
+          <p:cNvPr id="3" name="Grafik 2" descr="Ein Bild, das Text, Schrift, Diagramm, parallel enthält.&#10;&#10;KI-generierte Inhalte können fehlerhaft sein.">
+            <a:extLst>
+              <a:ext uri="{FF2B5EF4-FFF2-40B4-BE49-F238E27FC236}">
+                <a16:creationId xmlns:a16="http://schemas.microsoft.com/office/drawing/2014/main" id="{4FDAA927-3DEA-09C7-BABC-4A57B067A1F3}"/>
+              </a:ext>
+            </a:extLst>
+          </p:cNvPr>
+          <p:cNvPicPr>
+            <a:picLocks noChangeAspect="1"/>
+          </p:cNvPicPr>
+          <p:nvPr/>
+        </p:nvPicPr>
+        <p:blipFill>
+          <a:blip r:embed="rId3"/>
+          <a:stretch>
+            <a:fillRect/>
+          </a:stretch>
+        </p:blipFill>
+        <p:spPr>
+          <a:xfrm>
+            <a:off x="4788024" y="1134454"/>
+            <a:ext cx="3777171" cy="3615913"/>
+          </a:xfrm>
+          <a:prstGeom prst="rect">
+            <a:avLst/>
+          </a:prstGeom>
+        </p:spPr>
+      </p:pic>
+      <p:sp>
+        <p:nvSpPr>
+          <p:cNvPr id="4" name="Textfeld 3">
+            <a:extLst>
+              <a:ext uri="{FF2B5EF4-FFF2-40B4-BE49-F238E27FC236}">
+                <a16:creationId xmlns:a16="http://schemas.microsoft.com/office/drawing/2014/main" id="{06B16CF8-BF46-B20E-346A-850853161209}"/>
+              </a:ext>
+            </a:extLst>
+          </p:cNvPr>
+          <p:cNvSpPr txBox="1"/>
+          <p:nvPr/>
+        </p:nvSpPr>
+        <p:spPr>
+          <a:xfrm>
+            <a:off x="7524328" y="4628624"/>
+            <a:ext cx="1411857" cy="184666"/>
+          </a:xfrm>
+          <a:prstGeom prst="rect">
+            <a:avLst/>
+          </a:prstGeom>
+          <a:noFill/>
+        </p:spPr>
+        <p:txBody>
+          <a:bodyPr wrap="square" rtlCol="0">
+            <a:spAutoFit/>
+          </a:bodyPr>
+          <a:lstStyle/>
+          <a:p>
+            <a:r>
+              <a:rPr lang="de-DE" sz="600" dirty="0">
+                <a:solidFill>
+                  <a:schemeClr val="bg2"/>
+                </a:solidFill>
+              </a:rPr>
+              <a:t>Dissertation Tobias S.</a:t>
+            </a:r>
+          </a:p>
+        </p:txBody>
+      </p:sp>
+      <p:pic>
+        <p:nvPicPr>
+          <p:cNvPr id="5" name="Grafik 4" descr="Ein Bild, das Kreis, Diagramm, Reihe enthält.&#10;&#10;KI-generierte Inhalte können fehlerhaft sein.">
+            <a:extLst>
+              <a:ext uri="{FF2B5EF4-FFF2-40B4-BE49-F238E27FC236}">
+                <a16:creationId xmlns:a16="http://schemas.microsoft.com/office/drawing/2014/main" id="{195D6952-0B9C-F14D-95F8-AA07425C6399}"/>
+              </a:ext>
+            </a:extLst>
+          </p:cNvPr>
+          <p:cNvPicPr>
+            <a:picLocks noChangeAspect="1"/>
+          </p:cNvPicPr>
+          <p:nvPr/>
+        </p:nvPicPr>
+        <p:blipFill>
+          <a:blip r:embed="rId4"/>
+          <a:stretch>
+            <a:fillRect/>
+          </a:stretch>
+        </p:blipFill>
+        <p:spPr>
+          <a:xfrm>
+            <a:off x="658308" y="1672003"/>
+            <a:ext cx="2880321" cy="3092109"/>
+          </a:xfrm>
+          <a:prstGeom prst="rect">
+            <a:avLst/>
+          </a:prstGeom>
+        </p:spPr>
+      </p:pic>
+      <p:sp>
+        <p:nvSpPr>
+          <p:cNvPr id="6" name="Textfeld 5">
+            <a:extLst>
+              <a:ext uri="{FF2B5EF4-FFF2-40B4-BE49-F238E27FC236}">
+                <a16:creationId xmlns:a16="http://schemas.microsoft.com/office/drawing/2014/main" id="{B618D201-44C1-4E91-8EF9-52A048B091C3}"/>
+              </a:ext>
+            </a:extLst>
+          </p:cNvPr>
+          <p:cNvSpPr txBox="1"/>
+          <p:nvPr/>
+        </p:nvSpPr>
+        <p:spPr>
+          <a:xfrm>
+            <a:off x="2530636" y="4443958"/>
+            <a:ext cx="1411857" cy="184666"/>
+          </a:xfrm>
+          <a:prstGeom prst="rect">
+            <a:avLst/>
+          </a:prstGeom>
+          <a:noFill/>
+        </p:spPr>
+        <p:txBody>
+          <a:bodyPr wrap="square" rtlCol="0">
+            <a:spAutoFit/>
+          </a:bodyPr>
+          <a:lstStyle/>
+          <a:p>
+            <a:r>
+              <a:rPr lang="de-DE" sz="600" dirty="0">
+                <a:solidFill>
+                  <a:schemeClr val="bg2"/>
+                </a:solidFill>
+              </a:rPr>
+              <a:t>Master-Thesis Moritz D.</a:t>
+            </a:r>
+          </a:p>
+        </p:txBody>
+      </p:sp>
+      <p:pic>
+        <p:nvPicPr>
+          <p:cNvPr id="7" name="Grafik 6">
+            <a:extLst>
+              <a:ext uri="{FF2B5EF4-FFF2-40B4-BE49-F238E27FC236}">
+                <a16:creationId xmlns:a16="http://schemas.microsoft.com/office/drawing/2014/main" id="{F0B8F66A-E4FE-E297-1C79-6CA383287A77}"/>
+              </a:ext>
+            </a:extLst>
+          </p:cNvPr>
+          <p:cNvPicPr>
+            <a:picLocks noChangeAspect="1"/>
+          </p:cNvPicPr>
+          <p:nvPr/>
+        </p:nvPicPr>
+        <p:blipFill>
+          <a:blip r:embed="rId5"/>
+          <a:stretch>
+            <a:fillRect/>
+          </a:stretch>
+        </p:blipFill>
+        <p:spPr>
+          <a:xfrm>
+            <a:off x="251520" y="1193656"/>
+            <a:ext cx="3923928" cy="434137"/>
+          </a:xfrm>
+          <a:prstGeom prst="rect">
+            <a:avLst/>
+          </a:prstGeom>
+        </p:spPr>
+      </p:pic>
+    </p:spTree>
+    <p:extLst>
+      <p:ext uri="{BB962C8B-B14F-4D97-AF65-F5344CB8AC3E}">
+        <p14:creationId xmlns:p14="http://schemas.microsoft.com/office/powerpoint/2010/main" val="4235925907"/>
+      </p:ext>
+    </p:extLst>
+  </p:cSld>
+  <p:clrMapOvr>
+    <a:masterClrMapping/>
+  </p:clrMapOvr>
+</p:sld>
+</file>
+
+<file path=ppt/slides/slide11.xml><?xml version="1.0" encoding="utf-8"?>
+<p:sld xmlns:a="http://schemas.openxmlformats.org/drawingml/2006/main" xmlns:r="http://schemas.openxmlformats.org/officeDocument/2006/relationships" xmlns:p="http://schemas.openxmlformats.org/presentationml/2006/main">
+  <p:cSld>
+    <p:spTree>
+      <p:nvGrpSpPr>
+        <p:cNvPr id="1" name="">
+          <a:extLst>
+            <a:ext uri="{FF2B5EF4-FFF2-40B4-BE49-F238E27FC236}">
+              <a16:creationId xmlns:a16="http://schemas.microsoft.com/office/drawing/2014/main" id="{AB5A2CF6-5EE4-0939-C24C-3DF9F4263163}"/>
+            </a:ext>
+          </a:extLst>
+        </p:cNvPr>
+        <p:cNvGrpSpPr/>
+        <p:nvPr/>
+      </p:nvGrpSpPr>
+      <p:grpSpPr>
+        <a:xfrm>
+          <a:off x="0" y="0"/>
+          <a:ext cx="0" cy="0"/>
+          <a:chOff x="0" y="0"/>
+          <a:chExt cx="0" cy="0"/>
+        </a:xfrm>
+      </p:grpSpPr>
+      <p:sp>
+        <p:nvSpPr>
+          <p:cNvPr id="2" name="Titel 1">
+            <a:extLst>
+              <a:ext uri="{FF2B5EF4-FFF2-40B4-BE49-F238E27FC236}">
+                <a16:creationId xmlns:a16="http://schemas.microsoft.com/office/drawing/2014/main" id="{1CF6B73A-A5D9-F8D3-7A91-AE6C7D81E4ED}"/>
+              </a:ext>
+            </a:extLst>
+          </p:cNvPr>
+          <p:cNvSpPr>
+            <a:spLocks noGrp="1"/>
+          </p:cNvSpPr>
+          <p:nvPr>
+            <p:ph type="title"/>
+          </p:nvPr>
+        </p:nvSpPr>
+        <p:spPr/>
+        <p:txBody>
+          <a:bodyPr/>
+          <a:lstStyle/>
+          <a:p>
+            <a:r>
+              <a:rPr lang="de-DE" dirty="0"/>
+              <a:t>Outlook</a:t>
+            </a:r>
+          </a:p>
+        </p:txBody>
+      </p:sp>
+      <p:pic>
+        <p:nvPicPr>
+          <p:cNvPr id="3" name="Grafik 2" descr="Ein Bild, das Maschine, Bautechnik, Elektrische Leitungen, Elektronik enthält.&#10;&#10;KI-generierte Inhalte können fehlerhaft sein.">
+            <a:extLst>
+              <a:ext uri="{FF2B5EF4-FFF2-40B4-BE49-F238E27FC236}">
+                <a16:creationId xmlns:a16="http://schemas.microsoft.com/office/drawing/2014/main" id="{57E1498C-23BB-DBD6-7449-CADA99545C95}"/>
+              </a:ext>
+            </a:extLst>
+          </p:cNvPr>
+          <p:cNvPicPr>
+            <a:picLocks noChangeAspect="1"/>
+          </p:cNvPicPr>
+          <p:nvPr/>
+        </p:nvPicPr>
+        <p:blipFill>
+          <a:blip r:embed="rId3"/>
+          <a:stretch>
+            <a:fillRect/>
+          </a:stretch>
+        </p:blipFill>
+        <p:spPr>
+          <a:xfrm>
+            <a:off x="1403648" y="1102661"/>
+            <a:ext cx="5904656" cy="3674127"/>
+          </a:xfrm>
+          <a:prstGeom prst="rect">
+            <a:avLst/>
+          </a:prstGeom>
+        </p:spPr>
+      </p:pic>
+      <p:sp>
+        <p:nvSpPr>
+          <p:cNvPr id="4" name="Textfeld 3">
+            <a:extLst>
+              <a:ext uri="{FF2B5EF4-FFF2-40B4-BE49-F238E27FC236}">
+                <a16:creationId xmlns:a16="http://schemas.microsoft.com/office/drawing/2014/main" id="{81CDCE8F-E09F-371D-7C50-6DD6A497EC03}"/>
+              </a:ext>
+            </a:extLst>
+          </p:cNvPr>
+          <p:cNvSpPr txBox="1"/>
+          <p:nvPr/>
+        </p:nvSpPr>
+        <p:spPr>
+          <a:xfrm>
+            <a:off x="7291488" y="4592122"/>
+            <a:ext cx="1008111" cy="184666"/>
+          </a:xfrm>
+          <a:prstGeom prst="rect">
+            <a:avLst/>
+          </a:prstGeom>
+          <a:noFill/>
+        </p:spPr>
+        <p:txBody>
+          <a:bodyPr wrap="square" rtlCol="0">
+            <a:spAutoFit/>
+          </a:bodyPr>
+          <a:lstStyle/>
+          <a:p>
+            <a:r>
+              <a:rPr lang="de-DE" sz="600" dirty="0">
+                <a:solidFill>
+                  <a:schemeClr val="bg2"/>
+                </a:solidFill>
+              </a:rPr>
+              <a:t>Master-Thesis, Jan L.</a:t>
+            </a:r>
+          </a:p>
+        </p:txBody>
+      </p:sp>
+    </p:spTree>
+    <p:extLst>
+      <p:ext uri="{BB962C8B-B14F-4D97-AF65-F5344CB8AC3E}">
+        <p14:creationId xmlns:p14="http://schemas.microsoft.com/office/powerpoint/2010/main" val="907500687"/>
+      </p:ext>
+    </p:extLst>
+  </p:cSld>
+  <p:clrMapOvr>
+    <a:masterClrMapping/>
+  </p:clrMapOvr>
+</p:sld>
+</file>
+
+<file path=ppt/slides/slide12.xml><?xml version="1.0" encoding="utf-8"?>
+<p:sld xmlns:a="http://schemas.openxmlformats.org/drawingml/2006/main" xmlns:r="http://schemas.openxmlformats.org/officeDocument/2006/relationships" xmlns:p="http://schemas.openxmlformats.org/presentationml/2006/main">
+  <p:cSld>
+    <p:spTree>
+      <p:nvGrpSpPr>
+        <p:cNvPr id="1" name="">
+          <a:extLst>
+            <a:ext uri="{FF2B5EF4-FFF2-40B4-BE49-F238E27FC236}">
+              <a16:creationId xmlns:a16="http://schemas.microsoft.com/office/drawing/2014/main" id="{882FA524-57A0-493C-907A-E5CF3C675FB5}"/>
+            </a:ext>
+          </a:extLst>
+        </p:cNvPr>
+        <p:cNvGrpSpPr/>
+        <p:nvPr/>
+      </p:nvGrpSpPr>
+      <p:grpSpPr>
+        <a:xfrm>
+          <a:off x="0" y="0"/>
+          <a:ext cx="0" cy="0"/>
+          <a:chOff x="0" y="0"/>
+          <a:chExt cx="0" cy="0"/>
+        </a:xfrm>
+      </p:grpSpPr>
+      <p:sp>
+        <p:nvSpPr>
+          <p:cNvPr id="2" name="Titel 1">
+            <a:extLst>
+              <a:ext uri="{FF2B5EF4-FFF2-40B4-BE49-F238E27FC236}">
+                <a16:creationId xmlns:a16="http://schemas.microsoft.com/office/drawing/2014/main" id="{106E4DFD-CBD2-0890-A3B8-9511EA683D55}"/>
+              </a:ext>
+            </a:extLst>
+          </p:cNvPr>
+          <p:cNvSpPr>
+            <a:spLocks noGrp="1"/>
+          </p:cNvSpPr>
+          <p:nvPr>
+            <p:ph type="title"/>
+          </p:nvPr>
+        </p:nvSpPr>
+        <p:spPr/>
+        <p:txBody>
+          <a:bodyPr/>
+          <a:lstStyle/>
+          <a:p>
+            <a:r>
+              <a:rPr lang="de-DE" dirty="0"/>
+              <a:t>Outlook</a:t>
+            </a:r>
+          </a:p>
+        </p:txBody>
+      </p:sp>
+      <p:sp>
+        <p:nvSpPr>
+          <p:cNvPr id="18" name="Textfeld 17">
+            <a:extLst>
+              <a:ext uri="{FF2B5EF4-FFF2-40B4-BE49-F238E27FC236}">
+                <a16:creationId xmlns:a16="http://schemas.microsoft.com/office/drawing/2014/main" id="{3809F755-CAFA-816F-F4A1-D6689AD29AF8}"/>
+              </a:ext>
+            </a:extLst>
+          </p:cNvPr>
+          <p:cNvSpPr txBox="1"/>
+          <p:nvPr/>
+        </p:nvSpPr>
+        <p:spPr>
+          <a:xfrm>
+            <a:off x="971600" y="4633049"/>
+            <a:ext cx="1411857" cy="184666"/>
+          </a:xfrm>
+          <a:prstGeom prst="rect">
+            <a:avLst/>
+          </a:prstGeom>
+          <a:noFill/>
+        </p:spPr>
+        <p:txBody>
+          <a:bodyPr wrap="square" rtlCol="0">
+            <a:spAutoFit/>
+          </a:bodyPr>
+          <a:lstStyle/>
+          <a:p>
+            <a:r>
+              <a:rPr lang="de-DE" sz="600" dirty="0">
+                <a:solidFill>
+                  <a:schemeClr val="bg2"/>
+                </a:solidFill>
+              </a:rPr>
+              <a:t>Bachelor-Thesis Carlo B.</a:t>
+            </a:r>
+          </a:p>
+        </p:txBody>
+      </p:sp>
+      <p:pic>
+        <p:nvPicPr>
+          <p:cNvPr id="6" name="Grafik 5" descr="Ein Bild, das Text, Schrift, Diagramm, parallel enthält.&#10;&#10;KI-generierte Inhalte können fehlerhaft sein.">
+            <a:extLst>
+              <a:ext uri="{FF2B5EF4-FFF2-40B4-BE49-F238E27FC236}">
+                <a16:creationId xmlns:a16="http://schemas.microsoft.com/office/drawing/2014/main" id="{F8C225FD-C44A-0114-53DC-8E44BAE7F307}"/>
+              </a:ext>
+            </a:extLst>
+          </p:cNvPr>
+          <p:cNvPicPr>
+            <a:picLocks noChangeAspect="1"/>
+          </p:cNvPicPr>
+          <p:nvPr/>
+        </p:nvPicPr>
+        <p:blipFill>
+          <a:blip r:embed="rId2"/>
+          <a:stretch>
+            <a:fillRect/>
+          </a:stretch>
+        </p:blipFill>
+        <p:spPr>
+          <a:xfrm>
+            <a:off x="3059832" y="1529459"/>
+            <a:ext cx="2779302" cy="2660645"/>
+          </a:xfrm>
+          <a:prstGeom prst="rect">
+            <a:avLst/>
+          </a:prstGeom>
+        </p:spPr>
+      </p:pic>
+      <p:sp>
+        <p:nvSpPr>
+          <p:cNvPr id="7" name="Textfeld 6">
+            <a:extLst>
+              <a:ext uri="{FF2B5EF4-FFF2-40B4-BE49-F238E27FC236}">
+                <a16:creationId xmlns:a16="http://schemas.microsoft.com/office/drawing/2014/main" id="{69B94676-7ADD-8AAF-C2FA-0A781C850048}"/>
+              </a:ext>
+            </a:extLst>
+          </p:cNvPr>
+          <p:cNvSpPr txBox="1"/>
+          <p:nvPr/>
+        </p:nvSpPr>
+        <p:spPr>
+          <a:xfrm>
+            <a:off x="4043199" y="4218510"/>
+            <a:ext cx="1411857" cy="184666"/>
+          </a:xfrm>
+          <a:prstGeom prst="rect">
+            <a:avLst/>
+          </a:prstGeom>
+          <a:noFill/>
+        </p:spPr>
+        <p:txBody>
+          <a:bodyPr wrap="square" rtlCol="0">
+            <a:spAutoFit/>
+          </a:bodyPr>
+          <a:lstStyle/>
+          <a:p>
+            <a:r>
+              <a:rPr lang="de-DE" sz="600" dirty="0">
+                <a:solidFill>
+                  <a:schemeClr val="bg2"/>
+                </a:solidFill>
+              </a:rPr>
+              <a:t>Dissertation Tobias S.</a:t>
+            </a:r>
+          </a:p>
+        </p:txBody>
+      </p:sp>
+      <p:pic>
+        <p:nvPicPr>
+          <p:cNvPr id="5" name="Grafik 4" descr="Ein Bild, das Maschine, Bautechnik, Elektrische Leitungen, Elektronik enthält.&#10;&#10;KI-generierte Inhalte können fehlerhaft sein.">
+            <a:extLst>
+              <a:ext uri="{FF2B5EF4-FFF2-40B4-BE49-F238E27FC236}">
+                <a16:creationId xmlns:a16="http://schemas.microsoft.com/office/drawing/2014/main" id="{F4AA8398-06DE-09FE-1E64-F2334B4E5D25}"/>
+              </a:ext>
+            </a:extLst>
+          </p:cNvPr>
+          <p:cNvPicPr>
+            <a:picLocks noChangeAspect="1"/>
+          </p:cNvPicPr>
+          <p:nvPr/>
+        </p:nvPicPr>
+        <p:blipFill>
+          <a:blip r:embed="rId3"/>
+          <a:stretch>
+            <a:fillRect/>
+          </a:stretch>
+        </p:blipFill>
+        <p:spPr>
+          <a:xfrm>
+            <a:off x="6063225" y="2866205"/>
+            <a:ext cx="2905773" cy="1808095"/>
+          </a:xfrm>
+          <a:prstGeom prst="rect">
+            <a:avLst/>
+          </a:prstGeom>
+        </p:spPr>
+      </p:pic>
+      <p:sp>
+        <p:nvSpPr>
+          <p:cNvPr id="8" name="Textfeld 7">
+            <a:extLst>
+              <a:ext uri="{FF2B5EF4-FFF2-40B4-BE49-F238E27FC236}">
+                <a16:creationId xmlns:a16="http://schemas.microsoft.com/office/drawing/2014/main" id="{7130519F-0B6D-6F84-ACB2-429417E79C4C}"/>
+              </a:ext>
+            </a:extLst>
+          </p:cNvPr>
+          <p:cNvSpPr txBox="1"/>
+          <p:nvPr/>
+        </p:nvSpPr>
+        <p:spPr>
+          <a:xfrm>
+            <a:off x="7291488" y="4633049"/>
+            <a:ext cx="1008111" cy="184666"/>
+          </a:xfrm>
+          <a:prstGeom prst="rect">
+            <a:avLst/>
+          </a:prstGeom>
+          <a:noFill/>
+        </p:spPr>
+        <p:txBody>
+          <a:bodyPr wrap="square" rtlCol="0">
+            <a:spAutoFit/>
+          </a:bodyPr>
+          <a:lstStyle/>
+          <a:p>
+            <a:r>
+              <a:rPr lang="de-DE" sz="600" dirty="0">
+                <a:solidFill>
+                  <a:schemeClr val="bg2"/>
+                </a:solidFill>
+              </a:rPr>
+              <a:t>Master </a:t>
+            </a:r>
+            <a:r>
+              <a:rPr lang="de-DE" sz="600" dirty="0" err="1">
+                <a:solidFill>
+                  <a:schemeClr val="bg2"/>
+                </a:solidFill>
+              </a:rPr>
+              <a:t>thesis</a:t>
+            </a:r>
+            <a:r>
+              <a:rPr lang="de-DE" sz="600" dirty="0">
+                <a:solidFill>
+                  <a:schemeClr val="bg2"/>
+                </a:solidFill>
+              </a:rPr>
+              <a:t>, Jan L.</a:t>
+            </a:r>
+          </a:p>
+        </p:txBody>
+      </p:sp>
+    </p:spTree>
+    <p:extLst>
+      <p:ext uri="{BB962C8B-B14F-4D97-AF65-F5344CB8AC3E}">
+        <p14:creationId xmlns:p14="http://schemas.microsoft.com/office/powerpoint/2010/main" val="2131358240"/>
+      </p:ext>
+    </p:extLst>
+  </p:cSld>
+  <p:clrMapOvr>
+    <a:masterClrMapping/>
+  </p:clrMapOvr>
+</p:sld>
+</file>
+
+<file path=ppt/slides/slide13.xml><?xml version="1.0" encoding="utf-8"?>
+<p:sld xmlns:a="http://schemas.openxmlformats.org/drawingml/2006/main" xmlns:r="http://schemas.openxmlformats.org/officeDocument/2006/relationships" xmlns:p="http://schemas.openxmlformats.org/presentationml/2006/main">
+  <p:cSld>
+    <p:spTree>
+      <p:nvGrpSpPr>
+        <p:cNvPr id="1" name=""/>
+        <p:cNvGrpSpPr/>
+        <p:nvPr/>
+      </p:nvGrpSpPr>
+      <p:grpSpPr>
+        <a:xfrm>
+          <a:off x="0" y="0"/>
+          <a:ext cx="0" cy="0"/>
+          <a:chOff x="0" y="0"/>
+          <a:chExt cx="0" cy="0"/>
+        </a:xfrm>
+      </p:grpSpPr>
+      <p:sp>
+        <p:nvSpPr>
+          <p:cNvPr id="2" name="Titel 1">
+            <a:extLst>
+              <a:ext uri="{FF2B5EF4-FFF2-40B4-BE49-F238E27FC236}">
+                <a16:creationId xmlns:a16="http://schemas.microsoft.com/office/drawing/2014/main" id="{684F1B5D-894B-32E9-8089-C6582EA204F1}"/>
+              </a:ext>
+            </a:extLst>
+          </p:cNvPr>
+          <p:cNvSpPr>
+            <a:spLocks noGrp="1"/>
+          </p:cNvSpPr>
+          <p:nvPr>
+            <p:ph type="title"/>
+          </p:nvPr>
+        </p:nvSpPr>
+        <p:spPr/>
+        <p:txBody>
+          <a:bodyPr/>
+          <a:lstStyle/>
+          <a:p>
+            <a:r>
+              <a:rPr lang="de-DE" dirty="0" err="1"/>
+              <a:t>Thank</a:t>
+            </a:r>
+            <a:r>
+              <a:rPr lang="de-DE" dirty="0"/>
+              <a:t> </a:t>
+            </a:r>
+            <a:r>
+              <a:rPr lang="de-DE" dirty="0" err="1"/>
+              <a:t>you</a:t>
+            </a:r>
+            <a:r>
+              <a:rPr lang="de-DE" dirty="0"/>
+              <a:t> </a:t>
+            </a:r>
+            <a:r>
+              <a:rPr lang="de-DE" dirty="0" err="1"/>
+              <a:t>for</a:t>
+            </a:r>
+            <a:r>
+              <a:rPr lang="de-DE" dirty="0"/>
+              <a:t> </a:t>
+            </a:r>
+            <a:r>
+              <a:rPr lang="de-DE" dirty="0" err="1"/>
+              <a:t>your</a:t>
+            </a:r>
+            <a:r>
+              <a:rPr lang="de-DE" dirty="0"/>
+              <a:t> </a:t>
+            </a:r>
+            <a:r>
+              <a:rPr lang="de-DE" dirty="0" err="1"/>
+              <a:t>attention</a:t>
+            </a:r>
+            <a:endParaRPr lang="de-DE" dirty="0"/>
+          </a:p>
+        </p:txBody>
+      </p:sp>
+      <p:pic>
+        <p:nvPicPr>
+          <p:cNvPr id="6" name="Grafik 5" descr="Ein Bild, das Kleidung, Person, draußen, Mann enthält.&#10;&#10;KI-generierte Inhalte können fehlerhaft sein.">
+            <a:extLst>
+              <a:ext uri="{FF2B5EF4-FFF2-40B4-BE49-F238E27FC236}">
+                <a16:creationId xmlns:a16="http://schemas.microsoft.com/office/drawing/2014/main" id="{8280EF74-6EEF-FEC5-2AFC-9D4C71506BC9}"/>
+              </a:ext>
+            </a:extLst>
+          </p:cNvPr>
+          <p:cNvPicPr>
+            <a:picLocks noChangeAspect="1"/>
+          </p:cNvPicPr>
+          <p:nvPr/>
+        </p:nvPicPr>
+        <p:blipFill>
+          <a:blip r:embed="rId2"/>
+          <a:stretch>
+            <a:fillRect/>
+          </a:stretch>
+        </p:blipFill>
+        <p:spPr>
+          <a:xfrm>
+            <a:off x="179514" y="1106289"/>
+            <a:ext cx="8764793" cy="3670499"/>
+          </a:xfrm>
+          <a:prstGeom prst="rect">
+            <a:avLst/>
+          </a:prstGeom>
+        </p:spPr>
+      </p:pic>
+    </p:spTree>
+    <p:extLst>
+      <p:ext uri="{BB962C8B-B14F-4D97-AF65-F5344CB8AC3E}">
+        <p14:creationId xmlns:p14="http://schemas.microsoft.com/office/powerpoint/2010/main" val="1083693964"/>
+      </p:ext>
+    </p:extLst>
+  </p:cSld>
+  <p:clrMapOvr>
+    <a:masterClrMapping/>
+  </p:clrMapOvr>
+</p:sld>
+</file>
+
+<file path=ppt/slides/slide14.xml><?xml version="1.0" encoding="utf-8"?>
+<p:sld xmlns:a="http://schemas.openxmlformats.org/drawingml/2006/main" xmlns:r="http://schemas.openxmlformats.org/officeDocument/2006/relationships" xmlns:p="http://schemas.openxmlformats.org/presentationml/2006/main">
+  <p:cSld>
+    <p:spTree>
+      <p:nvGrpSpPr>
+        <p:cNvPr id="1" name="">
+          <a:extLst>
+            <a:ext uri="{FF2B5EF4-FFF2-40B4-BE49-F238E27FC236}">
+              <a16:creationId xmlns:a16="http://schemas.microsoft.com/office/drawing/2014/main" id="{1083097F-06D1-AC32-AFCC-E1D29F9D5E0C}"/>
+            </a:ext>
+          </a:extLst>
+        </p:cNvPr>
+        <p:cNvGrpSpPr/>
+        <p:nvPr/>
+      </p:nvGrpSpPr>
+      <p:grpSpPr>
+        <a:xfrm>
+          <a:off x="0" y="0"/>
+          <a:ext cx="0" cy="0"/>
+          <a:chOff x="0" y="0"/>
+          <a:chExt cx="0" cy="0"/>
+        </a:xfrm>
+      </p:grpSpPr>
+      <p:sp>
+        <p:nvSpPr>
+          <p:cNvPr id="2" name="Titel 1">
+            <a:extLst>
+              <a:ext uri="{FF2B5EF4-FFF2-40B4-BE49-F238E27FC236}">
+                <a16:creationId xmlns:a16="http://schemas.microsoft.com/office/drawing/2014/main" id="{136AEB95-6BD7-857F-38CE-E88C4314FA29}"/>
+              </a:ext>
+            </a:extLst>
+          </p:cNvPr>
+          <p:cNvSpPr>
+            <a:spLocks noGrp="1"/>
+          </p:cNvSpPr>
+          <p:nvPr>
+            <p:ph type="title"/>
+          </p:nvPr>
+        </p:nvSpPr>
+        <p:spPr/>
+        <p:txBody>
+          <a:bodyPr/>
+          <a:lstStyle/>
+          <a:p>
+            <a:r>
+              <a:rPr lang="de-DE" dirty="0" err="1"/>
+              <a:t>Thank</a:t>
+            </a:r>
+            <a:r>
+              <a:rPr lang="de-DE" dirty="0"/>
+              <a:t> </a:t>
+            </a:r>
+            <a:r>
+              <a:rPr lang="de-DE" dirty="0" err="1"/>
+              <a:t>you</a:t>
+            </a:r>
+            <a:r>
+              <a:rPr lang="de-DE" dirty="0"/>
+              <a:t> </a:t>
+            </a:r>
+            <a:r>
+              <a:rPr lang="de-DE" dirty="0" err="1"/>
+              <a:t>for</a:t>
+            </a:r>
+            <a:r>
+              <a:rPr lang="de-DE" dirty="0"/>
+              <a:t> </a:t>
+            </a:r>
+            <a:r>
+              <a:rPr lang="de-DE" dirty="0" err="1"/>
+              <a:t>your</a:t>
+            </a:r>
+            <a:r>
+              <a:rPr lang="de-DE" dirty="0"/>
+              <a:t> </a:t>
+            </a:r>
+            <a:r>
+              <a:rPr lang="de-DE" dirty="0" err="1"/>
+              <a:t>attention</a:t>
+            </a:r>
+            <a:endParaRPr lang="de-DE" dirty="0"/>
+          </a:p>
+        </p:txBody>
+      </p:sp>
+      <p:pic>
+        <p:nvPicPr>
+          <p:cNvPr id="6" name="Grafik 5" descr="Ein Bild, das Kleidung, Person, draußen, Mann enthält.&#10;&#10;KI-generierte Inhalte können fehlerhaft sein.">
+            <a:extLst>
+              <a:ext uri="{FF2B5EF4-FFF2-40B4-BE49-F238E27FC236}">
+                <a16:creationId xmlns:a16="http://schemas.microsoft.com/office/drawing/2014/main" id="{35482C1F-16C0-81B6-A8A3-A0C72D4A14F7}"/>
+              </a:ext>
+            </a:extLst>
+          </p:cNvPr>
+          <p:cNvPicPr>
+            <a:picLocks noChangeAspect="1"/>
+          </p:cNvPicPr>
+          <p:nvPr/>
+        </p:nvPicPr>
+        <p:blipFill>
+          <a:blip r:embed="rId3"/>
+          <a:stretch>
+            <a:fillRect/>
+          </a:stretch>
+        </p:blipFill>
+        <p:spPr>
+          <a:xfrm>
+            <a:off x="179514" y="1106289"/>
+            <a:ext cx="8764793" cy="3670499"/>
+          </a:xfrm>
+          <a:prstGeom prst="rect">
+            <a:avLst/>
+          </a:prstGeom>
+        </p:spPr>
+      </p:pic>
+      <p:pic>
+        <p:nvPicPr>
+          <p:cNvPr id="1026" name="Picture 2" descr="img.chefkoch-cdn.de/rezepte/1001811205419556/bilde...">
+            <a:extLst>
+              <a:ext uri="{FF2B5EF4-FFF2-40B4-BE49-F238E27FC236}">
+                <a16:creationId xmlns:a16="http://schemas.microsoft.com/office/drawing/2014/main" id="{FC1AAEDF-4157-E103-9679-101F6C36825D}"/>
+              </a:ext>
+            </a:extLst>
+          </p:cNvPr>
+          <p:cNvPicPr>
+            <a:picLocks noChangeAspect="1" noChangeArrowheads="1"/>
+          </p:cNvPicPr>
+          <p:nvPr/>
+        </p:nvPicPr>
+        <p:blipFill>
+          <a:blip r:embed="rId4">
+            <a:extLst>
+              <a:ext uri="{28A0092B-C50C-407E-A947-70E740481C1C}">
+                <a14:useLocalDpi xmlns:a14="http://schemas.microsoft.com/office/drawing/2010/main" val="0"/>
+              </a:ext>
+            </a:extLst>
+          </a:blip>
+          <a:srcRect/>
+          <a:stretch>
+            <a:fillRect/>
+          </a:stretch>
+        </p:blipFill>
+        <p:spPr bwMode="auto">
+          <a:xfrm rot="172076">
+            <a:off x="1574819" y="1254139"/>
+            <a:ext cx="5994361" cy="3371827"/>
+          </a:xfrm>
+          <a:prstGeom prst="rect">
+            <a:avLst/>
+          </a:prstGeom>
+          <a:noFill/>
+          <a:extLst>
+            <a:ext uri="{909E8E84-426E-40DD-AFC4-6F175D3DCCD1}">
+              <a14:hiddenFill xmlns:a14="http://schemas.microsoft.com/office/drawing/2010/main">
+                <a:solidFill>
+                  <a:srgbClr val="FFFFFF"/>
+                </a:solidFill>
+              </a14:hiddenFill>
+            </a:ext>
+          </a:extLst>
+        </p:spPr>
+      </p:pic>
+    </p:spTree>
+    <p:extLst>
+      <p:ext uri="{BB962C8B-B14F-4D97-AF65-F5344CB8AC3E}">
+        <p14:creationId xmlns:p14="http://schemas.microsoft.com/office/powerpoint/2010/main" val="1663129495"/>
+      </p:ext>
+    </p:extLst>
+  </p:cSld>
+  <p:clrMapOvr>
+    <a:masterClrMapping/>
+  </p:clrMapOvr>
+</p:sld>
+</file>
+
+<file path=ppt/slides/slide15.xml><?xml version="1.0" encoding="utf-8"?>
+<p:sld xmlns:a="http://schemas.openxmlformats.org/drawingml/2006/main" xmlns:r="http://schemas.openxmlformats.org/officeDocument/2006/relationships" xmlns:p="http://schemas.openxmlformats.org/presentationml/2006/main">
+  <p:cSld>
+    <p:spTree>
+      <p:nvGrpSpPr>
+        <p:cNvPr id="1" name=""/>
+        <p:cNvGrpSpPr/>
+        <p:nvPr/>
+      </p:nvGrpSpPr>
+      <p:grpSpPr>
+        <a:xfrm>
+          <a:off x="0" y="0"/>
+          <a:ext cx="0" cy="0"/>
+          <a:chOff x="0" y="0"/>
+          <a:chExt cx="0" cy="0"/>
+        </a:xfrm>
+      </p:grpSpPr>
+      <p:sp>
+        <p:nvSpPr>
+          <p:cNvPr id="2" name="Titel 1">
+            <a:extLst>
+              <a:ext uri="{FF2B5EF4-FFF2-40B4-BE49-F238E27FC236}">
+                <a16:creationId xmlns:a16="http://schemas.microsoft.com/office/drawing/2014/main" id="{658A5885-A388-3269-83EE-F27AA77E1E3E}"/>
+              </a:ext>
+            </a:extLst>
+          </p:cNvPr>
+          <p:cNvSpPr>
+            <a:spLocks noGrp="1"/>
+          </p:cNvSpPr>
+          <p:nvPr>
+            <p:ph type="title"/>
+          </p:nvPr>
+        </p:nvSpPr>
+        <p:spPr/>
+        <p:txBody>
+          <a:bodyPr/>
+          <a:lstStyle/>
+          <a:p>
+            <a:r>
+              <a:rPr lang="de-DE" dirty="0"/>
+              <a:t>Raman-</a:t>
+            </a:r>
+            <a:r>
+              <a:rPr lang="de-DE" dirty="0" err="1"/>
+              <a:t>Assisted</a:t>
+            </a:r>
+            <a:r>
+              <a:rPr lang="de-DE" dirty="0"/>
+              <a:t> </a:t>
+            </a:r>
+            <a:r>
+              <a:rPr lang="de-DE" dirty="0" err="1"/>
+              <a:t>pumping</a:t>
+            </a:r>
+            <a:endParaRPr lang="de-DE" dirty="0"/>
+          </a:p>
+        </p:txBody>
+      </p:sp>
+      <p:sp>
+        <p:nvSpPr>
+          <p:cNvPr id="3" name="Inhaltsplatzhalter 2">
+            <a:extLst>
+              <a:ext uri="{FF2B5EF4-FFF2-40B4-BE49-F238E27FC236}">
+                <a16:creationId xmlns:a16="http://schemas.microsoft.com/office/drawing/2014/main" id="{2A41920D-328D-FBED-7509-AA2F6F81A091}"/>
+              </a:ext>
+            </a:extLst>
+          </p:cNvPr>
+          <p:cNvSpPr>
+            <a:spLocks noGrp="1"/>
+          </p:cNvSpPr>
+          <p:nvPr>
+            <p:ph idx="11"/>
+          </p:nvPr>
+        </p:nvSpPr>
+        <p:spPr>
+          <a:xfrm>
+            <a:off x="152553" y="1228017"/>
+            <a:ext cx="8783998" cy="3359957"/>
+          </a:xfrm>
+        </p:spPr>
+        <p:txBody>
+          <a:bodyPr/>
+          <a:lstStyle/>
+          <a:p>
+            <a:pPr marL="342900" indent="-342900">
+              <a:buFont typeface="Arial" panose="020B0604020202020204" pitchFamily="34" charset="0"/>
+              <a:buChar char="•"/>
+            </a:pPr>
+            <a:r>
+              <a:rPr lang="de-DE" dirty="0" err="1"/>
+              <a:t>Coarse</a:t>
+            </a:r>
+            <a:r>
+              <a:rPr lang="de-DE" dirty="0"/>
+              <a:t> pump</a:t>
+            </a:r>
+          </a:p>
+          <a:p>
+            <a:pPr marL="342900" indent="-342900">
+              <a:buFont typeface="Arial" panose="020B0604020202020204" pitchFamily="34" charset="0"/>
+              <a:buChar char="•"/>
+            </a:pPr>
+            <a:r>
+              <a:rPr lang="de-DE" dirty="0"/>
+              <a:t>Dissipative </a:t>
+            </a:r>
+            <a:r>
+              <a:rPr lang="de-DE" dirty="0" err="1"/>
+              <a:t>decay</a:t>
+            </a:r>
+            <a:endParaRPr lang="de-DE" dirty="0"/>
+          </a:p>
+          <a:p>
+            <a:pPr marL="342900" indent="-342900">
+              <a:buFont typeface="Arial" panose="020B0604020202020204" pitchFamily="34" charset="0"/>
+              <a:buChar char="•"/>
+            </a:pPr>
+            <a:r>
+              <a:rPr lang="de-DE" dirty="0"/>
+              <a:t>2 Photon </a:t>
+            </a:r>
+            <a:r>
+              <a:rPr lang="de-DE" dirty="0" err="1"/>
+              <a:t>raman</a:t>
+            </a:r>
+            <a:r>
+              <a:rPr lang="de-DE" dirty="0"/>
+              <a:t> pulse</a:t>
+            </a:r>
+          </a:p>
+          <a:p>
+            <a:pPr marL="342900" indent="-342900">
+              <a:buFont typeface="Arial" panose="020B0604020202020204" pitchFamily="34" charset="0"/>
+              <a:buChar char="•"/>
+            </a:pPr>
+            <a:endParaRPr lang="de-DE" dirty="0"/>
+          </a:p>
+          <a:p>
+            <a:pPr marL="342900" indent="-342900">
+              <a:buFont typeface="Arial" panose="020B0604020202020204" pitchFamily="34" charset="0"/>
+              <a:buChar char="•"/>
+            </a:pPr>
+            <a:r>
+              <a:rPr lang="de-DE" dirty="0" err="1"/>
+              <a:t>Preparation</a:t>
+            </a:r>
+            <a:r>
+              <a:rPr lang="de-DE" dirty="0"/>
+              <a:t> in</a:t>
+            </a:r>
+          </a:p>
+          <a:p>
+            <a:pPr marL="342900" indent="-342900">
+              <a:buFont typeface="Arial" panose="020B0604020202020204" pitchFamily="34" charset="0"/>
+              <a:buChar char="•"/>
+            </a:pPr>
+            <a:r>
+              <a:rPr lang="de-DE" dirty="0"/>
+              <a:t>EOM/AOM not </a:t>
+            </a:r>
+            <a:r>
+              <a:rPr lang="de-DE" dirty="0" err="1"/>
+              <a:t>usable</a:t>
+            </a:r>
+            <a:r>
+              <a:rPr lang="de-DE" dirty="0"/>
+              <a:t> </a:t>
+            </a:r>
+          </a:p>
+        </p:txBody>
+      </p:sp>
+      <p:sp>
+        <p:nvSpPr>
+          <p:cNvPr id="8" name="Textfeld 7">
+            <a:extLst>
+              <a:ext uri="{FF2B5EF4-FFF2-40B4-BE49-F238E27FC236}">
+                <a16:creationId xmlns:a16="http://schemas.microsoft.com/office/drawing/2014/main" id="{FFEAD2F9-E13E-4BCC-8488-DE8A8B4A5D82}"/>
+              </a:ext>
+            </a:extLst>
+          </p:cNvPr>
+          <p:cNvSpPr txBox="1"/>
+          <p:nvPr/>
+        </p:nvSpPr>
+        <p:spPr>
+          <a:xfrm>
+            <a:off x="6296954" y="3808782"/>
+            <a:ext cx="1411857" cy="184666"/>
+          </a:xfrm>
+          <a:prstGeom prst="rect">
+            <a:avLst/>
+          </a:prstGeom>
+          <a:noFill/>
+        </p:spPr>
+        <p:txBody>
+          <a:bodyPr wrap="square" rtlCol="0">
+            <a:spAutoFit/>
+          </a:bodyPr>
+          <a:lstStyle/>
+          <a:p>
+            <a:r>
+              <a:rPr lang="de-DE" sz="600" dirty="0">
+                <a:solidFill>
+                  <a:schemeClr val="bg2"/>
+                </a:solidFill>
+              </a:rPr>
+              <a:t>Master </a:t>
+            </a:r>
+            <a:r>
+              <a:rPr lang="de-DE" sz="600" dirty="0" err="1">
+                <a:solidFill>
+                  <a:schemeClr val="bg2"/>
+                </a:solidFill>
+              </a:rPr>
+              <a:t>thesis</a:t>
+            </a:r>
+            <a:r>
+              <a:rPr lang="de-DE" sz="600" dirty="0">
+                <a:solidFill>
+                  <a:schemeClr val="bg2"/>
+                </a:solidFill>
+              </a:rPr>
+              <a:t>, </a:t>
+            </a:r>
+            <a:r>
+              <a:rPr lang="de-DE" sz="600" dirty="0" err="1">
+                <a:solidFill>
+                  <a:schemeClr val="bg2"/>
+                </a:solidFill>
+              </a:rPr>
+              <a:t>Timon</a:t>
+            </a:r>
+            <a:r>
+              <a:rPr lang="de-DE" sz="600" dirty="0">
+                <a:solidFill>
+                  <a:schemeClr val="bg2"/>
+                </a:solidFill>
+              </a:rPr>
+              <a:t> S..</a:t>
+            </a:r>
+          </a:p>
+        </p:txBody>
+      </p:sp>
+      <p:cxnSp>
+        <p:nvCxnSpPr>
+          <p:cNvPr id="14" name="Gerade Verbindung mit Pfeil 13">
+            <a:extLst>
+              <a:ext uri="{FF2B5EF4-FFF2-40B4-BE49-F238E27FC236}">
+                <a16:creationId xmlns:a16="http://schemas.microsoft.com/office/drawing/2014/main" id="{B0F0F9B9-12F2-AE5A-D30E-EF5F85497045}"/>
+              </a:ext>
+            </a:extLst>
+          </p:cNvPr>
+          <p:cNvCxnSpPr/>
+          <p:nvPr/>
+        </p:nvCxnSpPr>
+        <p:spPr>
+          <a:xfrm flipV="1">
+            <a:off x="395536" y="1238006"/>
+            <a:ext cx="0" cy="398911"/>
+          </a:xfrm>
+          <a:prstGeom prst="straightConnector1">
+            <a:avLst/>
+          </a:prstGeom>
+          <a:ln w="19050" cap="flat" cmpd="sng" algn="ctr">
+            <a:solidFill>
+              <a:srgbClr val="D40000"/>
+            </a:solidFill>
+            <a:prstDash val="solid"/>
+            <a:round/>
+            <a:headEnd type="none" w="med" len="med"/>
+            <a:tailEnd type="stealth" w="lg" len="lg"/>
+          </a:ln>
+        </p:spPr>
+        <p:style>
+          <a:lnRef idx="0">
+            <a:scrgbClr r="0" g="0" b="0"/>
+          </a:lnRef>
+          <a:fillRef idx="0">
+            <a:scrgbClr r="0" g="0" b="0"/>
+          </a:fillRef>
+          <a:effectRef idx="0">
+            <a:scrgbClr r="0" g="0" b="0"/>
+          </a:effectRef>
+          <a:fontRef idx="minor">
+            <a:schemeClr val="tx1"/>
+          </a:fontRef>
+        </p:style>
+      </p:cxnSp>
+      <p:cxnSp>
+        <p:nvCxnSpPr>
+          <p:cNvPr id="16" name="Verbinder: gekrümmt 15">
+            <a:extLst>
+              <a:ext uri="{FF2B5EF4-FFF2-40B4-BE49-F238E27FC236}">
+                <a16:creationId xmlns:a16="http://schemas.microsoft.com/office/drawing/2014/main" id="{CB053DB3-D9AC-B45E-0D5C-925EA4DB5F2E}"/>
+              </a:ext>
+            </a:extLst>
+          </p:cNvPr>
+          <p:cNvCxnSpPr>
+            <a:cxnSpLocks/>
+          </p:cNvCxnSpPr>
+          <p:nvPr/>
+        </p:nvCxnSpPr>
+        <p:spPr>
+          <a:xfrm rot="16200000" flipH="1">
+            <a:off x="215516" y="1843355"/>
+            <a:ext cx="288032" cy="216024"/>
+          </a:xfrm>
+          <a:prstGeom prst="curvedConnector3">
+            <a:avLst>
+              <a:gd name="adj1" fmla="val 42945"/>
+            </a:avLst>
+          </a:prstGeom>
+          <a:ln>
+            <a:solidFill>
+              <a:srgbClr val="7B0000"/>
+            </a:solidFill>
+            <a:tailEnd type="stealth" w="lg" len="lg"/>
+          </a:ln>
+        </p:spPr>
+        <p:style>
+          <a:lnRef idx="1">
+            <a:schemeClr val="accent1"/>
+          </a:lnRef>
+          <a:fillRef idx="0">
+            <a:schemeClr val="accent1"/>
+          </a:fillRef>
+          <a:effectRef idx="0">
+            <a:schemeClr val="accent1"/>
+          </a:effectRef>
+          <a:fontRef idx="minor">
+            <a:schemeClr val="tx1"/>
+          </a:fontRef>
+        </p:style>
+      </p:cxnSp>
+      <p:cxnSp>
+        <p:nvCxnSpPr>
+          <p:cNvPr id="24" name="Gerade Verbindung mit Pfeil 23">
+            <a:extLst>
+              <a:ext uri="{FF2B5EF4-FFF2-40B4-BE49-F238E27FC236}">
+                <a16:creationId xmlns:a16="http://schemas.microsoft.com/office/drawing/2014/main" id="{F290D347-D385-BA10-92BD-C70897E0749E}"/>
+              </a:ext>
+            </a:extLst>
+          </p:cNvPr>
+          <p:cNvCxnSpPr/>
+          <p:nvPr/>
+        </p:nvCxnSpPr>
+        <p:spPr>
+          <a:xfrm flipV="1">
+            <a:off x="3131840" y="2157110"/>
+            <a:ext cx="0" cy="360040"/>
+          </a:xfrm>
+          <a:prstGeom prst="straightConnector1">
+            <a:avLst/>
+          </a:prstGeom>
+          <a:ln w="19050" cap="flat" cmpd="sng" algn="ctr">
+            <a:solidFill>
+              <a:srgbClr val="00CC00"/>
+            </a:solidFill>
+            <a:prstDash val="dashDot"/>
+            <a:round/>
+            <a:headEnd type="none" w="med" len="med"/>
+            <a:tailEnd type="arrow" w="med" len="med"/>
+          </a:ln>
+        </p:spPr>
+        <p:style>
+          <a:lnRef idx="0">
+            <a:scrgbClr r="0" g="0" b="0"/>
+          </a:lnRef>
+          <a:fillRef idx="0">
+            <a:scrgbClr r="0" g="0" b="0"/>
+          </a:fillRef>
+          <a:effectRef idx="0">
+            <a:scrgbClr r="0" g="0" b="0"/>
+          </a:effectRef>
+          <a:fontRef idx="minor">
+            <a:schemeClr val="tx1"/>
+          </a:fontRef>
+        </p:style>
+      </p:cxnSp>
+      <p:cxnSp>
+        <p:nvCxnSpPr>
+          <p:cNvPr id="25" name="Gerade Verbindung mit Pfeil 24">
+            <a:extLst>
+              <a:ext uri="{FF2B5EF4-FFF2-40B4-BE49-F238E27FC236}">
+                <a16:creationId xmlns:a16="http://schemas.microsoft.com/office/drawing/2014/main" id="{6F7D11C0-E5D6-29BF-2D7C-497D4F2A16B3}"/>
+              </a:ext>
+            </a:extLst>
+          </p:cNvPr>
+          <p:cNvCxnSpPr/>
+          <p:nvPr/>
+        </p:nvCxnSpPr>
+        <p:spPr>
+          <a:xfrm flipV="1">
+            <a:off x="2123728" y="1238006"/>
+            <a:ext cx="0" cy="398911"/>
+          </a:xfrm>
+          <a:prstGeom prst="straightConnector1">
+            <a:avLst/>
+          </a:prstGeom>
+          <a:ln w="19050" cap="flat" cmpd="sng" algn="ctr">
+            <a:solidFill>
+              <a:srgbClr val="D40000"/>
+            </a:solidFill>
+            <a:prstDash val="solid"/>
+            <a:round/>
+            <a:headEnd type="none" w="med" len="med"/>
+            <a:tailEnd type="stealth" w="lg" len="lg"/>
+          </a:ln>
+        </p:spPr>
+        <p:style>
+          <a:lnRef idx="0">
+            <a:scrgbClr r="0" g="0" b="0"/>
+          </a:lnRef>
+          <a:fillRef idx="0">
+            <a:scrgbClr r="0" g="0" b="0"/>
+          </a:fillRef>
+          <a:effectRef idx="0">
+            <a:scrgbClr r="0" g="0" b="0"/>
+          </a:effectRef>
+          <a:fontRef idx="minor">
+            <a:schemeClr val="tx1"/>
+          </a:fontRef>
+        </p:style>
+      </p:cxnSp>
+      <p:cxnSp>
+        <p:nvCxnSpPr>
+          <p:cNvPr id="30" name="Verbinder: gekrümmt 29">
+            <a:extLst>
+              <a:ext uri="{FF2B5EF4-FFF2-40B4-BE49-F238E27FC236}">
+                <a16:creationId xmlns:a16="http://schemas.microsoft.com/office/drawing/2014/main" id="{3B3560D0-9E18-B52B-29CB-968CBBFF0156}"/>
+              </a:ext>
+            </a:extLst>
+          </p:cNvPr>
+          <p:cNvCxnSpPr>
+            <a:cxnSpLocks/>
+          </p:cNvCxnSpPr>
+          <p:nvPr/>
+        </p:nvCxnSpPr>
+        <p:spPr>
+          <a:xfrm rot="5400000">
+            <a:off x="2530095" y="1819107"/>
+            <a:ext cx="288032" cy="209142"/>
+          </a:xfrm>
+          <a:prstGeom prst="curvedConnector3">
+            <a:avLst>
+              <a:gd name="adj1" fmla="val 50000"/>
+            </a:avLst>
+          </a:prstGeom>
+          <a:ln>
+            <a:solidFill>
+              <a:srgbClr val="7B0000"/>
+            </a:solidFill>
+            <a:tailEnd type="stealth" w="lg" len="lg"/>
+          </a:ln>
+        </p:spPr>
+        <p:style>
+          <a:lnRef idx="1">
+            <a:schemeClr val="accent1"/>
+          </a:lnRef>
+          <a:fillRef idx="0">
+            <a:schemeClr val="accent1"/>
+          </a:fillRef>
+          <a:effectRef idx="0">
+            <a:schemeClr val="accent1"/>
+          </a:effectRef>
+          <a:fontRef idx="minor">
+            <a:schemeClr val="tx1"/>
+          </a:fontRef>
+        </p:style>
+      </p:cxnSp>
+      <p:cxnSp>
+        <p:nvCxnSpPr>
+          <p:cNvPr id="32" name="Gerade Verbindung mit Pfeil 31">
+            <a:extLst>
+              <a:ext uri="{FF2B5EF4-FFF2-40B4-BE49-F238E27FC236}">
+                <a16:creationId xmlns:a16="http://schemas.microsoft.com/office/drawing/2014/main" id="{5CFBC051-6238-C395-ED80-050546D43191}"/>
+              </a:ext>
+            </a:extLst>
+          </p:cNvPr>
+          <p:cNvCxnSpPr/>
+          <p:nvPr/>
+        </p:nvCxnSpPr>
+        <p:spPr>
+          <a:xfrm flipV="1">
+            <a:off x="359532" y="2157110"/>
+            <a:ext cx="0" cy="360040"/>
+          </a:xfrm>
+          <a:prstGeom prst="straightConnector1">
+            <a:avLst/>
+          </a:prstGeom>
+          <a:ln w="19050" cap="flat" cmpd="sng" algn="ctr">
+            <a:solidFill>
+              <a:srgbClr val="00CC00"/>
+            </a:solidFill>
+            <a:prstDash val="dashDot"/>
+            <a:round/>
+            <a:headEnd type="none" w="med" len="med"/>
+            <a:tailEnd type="arrow" w="med" len="med"/>
+          </a:ln>
+        </p:spPr>
+        <p:style>
+          <a:lnRef idx="0">
+            <a:scrgbClr r="0" g="0" b="0"/>
+          </a:lnRef>
+          <a:fillRef idx="0">
+            <a:scrgbClr r="0" g="0" b="0"/>
+          </a:fillRef>
+          <a:effectRef idx="0">
+            <a:scrgbClr r="0" g="0" b="0"/>
+          </a:effectRef>
+          <a:fontRef idx="minor">
+            <a:schemeClr val="tx1"/>
+          </a:fontRef>
+        </p:style>
+      </p:cxnSp>
+      <p:pic>
+        <p:nvPicPr>
+          <p:cNvPr id="9" name="Grafik 8" descr="Ein Bild, das Schrift, weiß, Typografie, Text enthält.&#10;&#10;KI-generierte Inhalte können fehlerhaft sein.">
+            <a:extLst>
+              <a:ext uri="{FF2B5EF4-FFF2-40B4-BE49-F238E27FC236}">
+                <a16:creationId xmlns:a16="http://schemas.microsoft.com/office/drawing/2014/main" id="{A344DA27-09DE-99C4-6D37-0A6612DD823C}"/>
+              </a:ext>
+            </a:extLst>
+          </p:cNvPr>
+          <p:cNvPicPr>
+            <a:picLocks noChangeAspect="1"/>
+          </p:cNvPicPr>
+          <p:nvPr/>
+        </p:nvPicPr>
+        <p:blipFill>
+          <a:blip r:embed="rId3"/>
+          <a:stretch>
+            <a:fillRect/>
+          </a:stretch>
+        </p:blipFill>
+        <p:spPr>
+          <a:xfrm>
+            <a:off x="432810" y="2636172"/>
+            <a:ext cx="2410997" cy="374550"/>
+          </a:xfrm>
+          <a:prstGeom prst="rect">
+            <a:avLst/>
+          </a:prstGeom>
+        </p:spPr>
+      </p:pic>
+      <p:pic>
+        <p:nvPicPr>
+          <p:cNvPr id="10" name="Grafik 9" descr="Ein Bild, das Schrift, weiß, Symbol, Text enthält.&#10;&#10;KI-generierte Inhalte können fehlerhaft sein.">
+            <a:extLst>
+              <a:ext uri="{FF2B5EF4-FFF2-40B4-BE49-F238E27FC236}">
+                <a16:creationId xmlns:a16="http://schemas.microsoft.com/office/drawing/2014/main" id="{764C13D1-E17D-F9B7-A520-23653D9D2FFC}"/>
+              </a:ext>
+            </a:extLst>
+          </p:cNvPr>
+          <p:cNvPicPr>
+            <a:picLocks noChangeAspect="1"/>
+          </p:cNvPicPr>
+          <p:nvPr/>
+        </p:nvPicPr>
+        <p:blipFill>
+          <a:blip r:embed="rId4"/>
+          <a:stretch>
+            <a:fillRect/>
+          </a:stretch>
+        </p:blipFill>
+        <p:spPr>
+          <a:xfrm>
+            <a:off x="2123728" y="3119157"/>
+            <a:ext cx="1490937" cy="289972"/>
+          </a:xfrm>
+          <a:prstGeom prst="rect">
+            <a:avLst/>
+          </a:prstGeom>
+        </p:spPr>
+      </p:pic>
+      <p:pic>
+        <p:nvPicPr>
+          <p:cNvPr id="11" name="Grafik 10" descr="Ein Bild, das Text, Diagramm, Reihe, Screenshot enthält.&#10;&#10;KI-generierte Inhalte können fehlerhaft sein.">
+            <a:extLst>
+              <a:ext uri="{FF2B5EF4-FFF2-40B4-BE49-F238E27FC236}">
+                <a16:creationId xmlns:a16="http://schemas.microsoft.com/office/drawing/2014/main" id="{E85C694E-1C42-83C6-B3E7-F3ABA92F618E}"/>
+              </a:ext>
+            </a:extLst>
+          </p:cNvPr>
+          <p:cNvPicPr>
+            <a:picLocks noChangeAspect="1"/>
+          </p:cNvPicPr>
+          <p:nvPr/>
+        </p:nvPicPr>
+        <p:blipFill>
+          <a:blip r:embed="rId5"/>
+          <a:stretch>
+            <a:fillRect/>
+          </a:stretch>
+        </p:blipFill>
+        <p:spPr>
+          <a:xfrm>
+            <a:off x="3614665" y="1422017"/>
+            <a:ext cx="5357430" cy="2270438"/>
+          </a:xfrm>
+          <a:prstGeom prst="rect">
+            <a:avLst/>
+          </a:prstGeom>
+        </p:spPr>
+      </p:pic>
+    </p:spTree>
+    <p:extLst>
+      <p:ext uri="{BB962C8B-B14F-4D97-AF65-F5344CB8AC3E}">
+        <p14:creationId xmlns:p14="http://schemas.microsoft.com/office/powerpoint/2010/main" val="78560346"/>
+      </p:ext>
+    </p:extLst>
+  </p:cSld>
+  <p:clrMapOvr>
+    <a:masterClrMapping/>
+  </p:clrMapOvr>
+</p:sld>
+</file>
+
+<file path=ppt/slides/slide16.xml><?xml version="1.0" encoding="utf-8"?>
+<p:sld xmlns:a="http://schemas.openxmlformats.org/drawingml/2006/main" xmlns:r="http://schemas.openxmlformats.org/officeDocument/2006/relationships" xmlns:p="http://schemas.openxmlformats.org/presentationml/2006/main">
+  <p:cSld>
+    <p:spTree>
+      <p:nvGrpSpPr>
+        <p:cNvPr id="1" name=""/>
+        <p:cNvGrpSpPr/>
+        <p:nvPr/>
+      </p:nvGrpSpPr>
+      <p:grpSpPr>
+        <a:xfrm>
+          <a:off x="0" y="0"/>
+          <a:ext cx="0" cy="0"/>
+          <a:chOff x="0" y="0"/>
+          <a:chExt cx="0" cy="0"/>
+        </a:xfrm>
+      </p:grpSpPr>
+      <p:pic>
+        <p:nvPicPr>
+          <p:cNvPr id="8" name="Grafik 7" descr="Ein Bild, das Schrift, Typografie, Text, weiß enthält.&#10;&#10;KI-generierte Inhalte können fehlerhaft sein.">
+            <a:extLst>
+              <a:ext uri="{FF2B5EF4-FFF2-40B4-BE49-F238E27FC236}">
+                <a16:creationId xmlns:a16="http://schemas.microsoft.com/office/drawing/2014/main" id="{50DE3A93-BA00-9A5E-D2AF-481B4D881646}"/>
+              </a:ext>
+            </a:extLst>
+          </p:cNvPr>
+          <p:cNvPicPr>
+            <a:picLocks noChangeAspect="1"/>
+          </p:cNvPicPr>
+          <p:nvPr/>
+        </p:nvPicPr>
+        <p:blipFill>
+          <a:blip r:embed="rId2"/>
+          <a:stretch>
+            <a:fillRect/>
+          </a:stretch>
+        </p:blipFill>
+        <p:spPr>
+          <a:xfrm>
+            <a:off x="3943029" y="1303950"/>
+            <a:ext cx="1584176" cy="298538"/>
+          </a:xfrm>
+          <a:prstGeom prst="rect">
+            <a:avLst/>
+          </a:prstGeom>
+        </p:spPr>
+      </p:pic>
+      <p:sp>
+        <p:nvSpPr>
+          <p:cNvPr id="21" name="Ellipse 20">
+            <a:extLst>
+              <a:ext uri="{FF2B5EF4-FFF2-40B4-BE49-F238E27FC236}">
+                <a16:creationId xmlns:a16="http://schemas.microsoft.com/office/drawing/2014/main" id="{926F23C7-19DD-F5B8-0A92-24D67519E3E7}"/>
+              </a:ext>
+            </a:extLst>
+          </p:cNvPr>
+          <p:cNvSpPr/>
+          <p:nvPr/>
+        </p:nvSpPr>
+        <p:spPr>
+          <a:xfrm>
+            <a:off x="3873463" y="1239436"/>
+            <a:ext cx="1758955" cy="414439"/>
+          </a:xfrm>
+          <a:prstGeom prst="ellipse">
+            <a:avLst/>
+          </a:prstGeom>
+          <a:noFill/>
+          <a:ln>
+            <a:solidFill>
+              <a:srgbClr val="FF0000"/>
+            </a:solidFill>
+          </a:ln>
+        </p:spPr>
+        <p:style>
+          <a:lnRef idx="2">
+            <a:schemeClr val="accent1">
+              <a:shade val="15000"/>
+            </a:schemeClr>
+          </a:lnRef>
+          <a:fillRef idx="1">
+            <a:schemeClr val="accent1"/>
+          </a:fillRef>
+          <a:effectRef idx="0">
+            <a:schemeClr val="accent1"/>
+          </a:effectRef>
+          <a:fontRef idx="minor">
+            <a:schemeClr val="lt1"/>
+          </a:fontRef>
+        </p:style>
+        <p:txBody>
+          <a:bodyPr rtlCol="0" anchor="ctr"/>
+          <a:lstStyle/>
+          <a:p>
+            <a:pPr algn="ctr"/>
+            <a:endParaRPr lang="de-DE"/>
+          </a:p>
+        </p:txBody>
+      </p:sp>
+      <p:sp>
+        <p:nvSpPr>
+          <p:cNvPr id="2" name="Titel 1">
+            <a:extLst>
+              <a:ext uri="{FF2B5EF4-FFF2-40B4-BE49-F238E27FC236}">
+                <a16:creationId xmlns:a16="http://schemas.microsoft.com/office/drawing/2014/main" id="{D502FA88-CBFA-8450-7DF2-BB036807CD7C}"/>
+              </a:ext>
+            </a:extLst>
+          </p:cNvPr>
+          <p:cNvSpPr>
+            <a:spLocks noGrp="1"/>
+          </p:cNvSpPr>
+          <p:nvPr>
+            <p:ph type="title"/>
+          </p:nvPr>
+        </p:nvSpPr>
+        <p:spPr/>
+        <p:txBody>
+          <a:bodyPr/>
+          <a:lstStyle/>
+          <a:p>
+            <a:r>
+              <a:rPr lang="de-DE" dirty="0" err="1"/>
+              <a:t>Initialization</a:t>
+            </a:r>
+            <a:r>
+              <a:rPr lang="de-DE" dirty="0"/>
+              <a:t> in a </a:t>
+            </a:r>
+            <a:r>
+              <a:rPr lang="de-DE" dirty="0" err="1"/>
+              <a:t>known</a:t>
+            </a:r>
+            <a:r>
+              <a:rPr lang="de-DE" dirty="0"/>
+              <a:t> </a:t>
+            </a:r>
+            <a:r>
+              <a:rPr lang="de-DE" dirty="0" err="1"/>
+              <a:t>state</a:t>
+            </a:r>
+            <a:endParaRPr lang="de-DE" dirty="0"/>
+          </a:p>
+        </p:txBody>
+      </p:sp>
+      <p:sp>
+        <p:nvSpPr>
+          <p:cNvPr id="3" name="Inhaltsplatzhalter 2">
+            <a:extLst>
+              <a:ext uri="{FF2B5EF4-FFF2-40B4-BE49-F238E27FC236}">
+                <a16:creationId xmlns:a16="http://schemas.microsoft.com/office/drawing/2014/main" id="{6A35E7DA-7712-854C-8B9A-833721D607B3}"/>
+              </a:ext>
+            </a:extLst>
+          </p:cNvPr>
+          <p:cNvSpPr>
+            <a:spLocks noGrp="1"/>
+          </p:cNvSpPr>
+          <p:nvPr>
+            <p:ph idx="11"/>
+          </p:nvPr>
+        </p:nvSpPr>
+        <p:spPr/>
+        <p:txBody>
+          <a:bodyPr/>
+          <a:lstStyle/>
+          <a:p>
+            <a:pPr marL="342900" indent="-342900">
+              <a:buFont typeface="Arial" panose="020B0604020202020204" pitchFamily="34" charset="0"/>
+              <a:buChar char="•"/>
+            </a:pPr>
+            <a:r>
+              <a:rPr lang="de-DE" dirty="0" err="1"/>
+              <a:t>Preparation</a:t>
+            </a:r>
+            <a:r>
+              <a:rPr lang="de-DE" dirty="0"/>
+              <a:t> in </a:t>
+            </a:r>
+            <a:r>
+              <a:rPr lang="de-DE" dirty="0" err="1"/>
+              <a:t>the</a:t>
+            </a:r>
+            <a:r>
+              <a:rPr lang="de-DE" dirty="0"/>
+              <a:t> </a:t>
+            </a:r>
+            <a:r>
+              <a:rPr lang="de-DE" dirty="0" err="1"/>
+              <a:t>dark</a:t>
+            </a:r>
+            <a:r>
+              <a:rPr lang="de-DE" dirty="0"/>
+              <a:t> </a:t>
+            </a:r>
+            <a:r>
+              <a:rPr lang="de-DE" dirty="0" err="1"/>
+              <a:t>state</a:t>
+            </a:r>
+            <a:endParaRPr lang="de-DE" dirty="0"/>
+          </a:p>
+          <a:p>
+            <a:pPr marL="342900" indent="-342900">
+              <a:buFont typeface="Arial" panose="020B0604020202020204" pitchFamily="34" charset="0"/>
+              <a:buChar char="•"/>
+            </a:pPr>
+            <a:r>
+              <a:rPr lang="de-DE" dirty="0" err="1"/>
+              <a:t>Pumping</a:t>
+            </a:r>
+            <a:r>
+              <a:rPr lang="de-DE" dirty="0"/>
+              <a:t> </a:t>
+            </a:r>
+            <a:r>
+              <a:rPr lang="de-DE" dirty="0" err="1"/>
+              <a:t>with</a:t>
+            </a:r>
+            <a:r>
+              <a:rPr lang="de-DE" dirty="0"/>
+              <a:t> a </a:t>
+            </a:r>
+            <a:r>
+              <a:rPr lang="de-DE" dirty="0" err="1"/>
+              <a:t>coarse</a:t>
+            </a:r>
+            <a:r>
+              <a:rPr lang="de-DE" dirty="0"/>
+              <a:t> pump </a:t>
+            </a:r>
+          </a:p>
+          <a:p>
+            <a:pPr marL="342900" indent="-342900">
+              <a:buFont typeface="Arial" panose="020B0604020202020204" pitchFamily="34" charset="0"/>
+              <a:buChar char="•"/>
+            </a:pPr>
+            <a:r>
+              <a:rPr lang="de-DE" dirty="0"/>
+              <a:t>Dissipative </a:t>
+            </a:r>
+            <a:r>
+              <a:rPr lang="de-DE" dirty="0" err="1"/>
+              <a:t>decay</a:t>
+            </a:r>
+            <a:endParaRPr lang="de-DE" dirty="0"/>
+          </a:p>
+          <a:p>
+            <a:pPr marL="342900" indent="-342900">
+              <a:buFont typeface="Arial" panose="020B0604020202020204" pitchFamily="34" charset="0"/>
+              <a:buChar char="•"/>
+            </a:pPr>
+            <a:r>
+              <a:rPr lang="de-DE" dirty="0"/>
+              <a:t>Decay in </a:t>
+            </a:r>
+          </a:p>
+          <a:p>
+            <a:pPr marL="701675" lvl="2" indent="-342900">
+              <a:buFont typeface="Arial" panose="020B0604020202020204" pitchFamily="34" charset="0"/>
+              <a:buChar char="•"/>
+            </a:pPr>
+            <a:r>
+              <a:rPr lang="de-DE" dirty="0" err="1"/>
+              <a:t>Repump</a:t>
+            </a:r>
+            <a:r>
+              <a:rPr lang="de-DE" dirty="0"/>
+              <a:t> </a:t>
+            </a:r>
+            <a:r>
+              <a:rPr lang="de-DE" dirty="0" err="1"/>
+              <a:t>laser</a:t>
+            </a:r>
+            <a:endParaRPr lang="de-DE" dirty="0"/>
+          </a:p>
+        </p:txBody>
+      </p:sp>
+      <p:pic>
+        <p:nvPicPr>
+          <p:cNvPr id="5" name="Grafik 4" descr="Ein Bild, das Diagramm, Reihe enthält.&#10;&#10;KI-generierte Inhalte können fehlerhaft sein.">
+            <a:extLst>
+              <a:ext uri="{FF2B5EF4-FFF2-40B4-BE49-F238E27FC236}">
+                <a16:creationId xmlns:a16="http://schemas.microsoft.com/office/drawing/2014/main" id="{AFD665DF-C6DA-EC23-3333-556212254777}"/>
+              </a:ext>
+            </a:extLst>
+          </p:cNvPr>
+          <p:cNvPicPr>
+            <a:picLocks noChangeAspect="1"/>
+          </p:cNvPicPr>
+          <p:nvPr/>
+        </p:nvPicPr>
+        <p:blipFill>
+          <a:blip r:embed="rId3"/>
+          <a:stretch>
+            <a:fillRect/>
+          </a:stretch>
+        </p:blipFill>
+        <p:spPr>
+          <a:xfrm>
+            <a:off x="2454171" y="2755383"/>
+            <a:ext cx="6694756" cy="2014520"/>
+          </a:xfrm>
+          <a:prstGeom prst="rect">
+            <a:avLst/>
+          </a:prstGeom>
+        </p:spPr>
+      </p:pic>
+      <p:sp>
+        <p:nvSpPr>
+          <p:cNvPr id="6" name="Textfeld 5">
+            <a:extLst>
+              <a:ext uri="{FF2B5EF4-FFF2-40B4-BE49-F238E27FC236}">
+                <a16:creationId xmlns:a16="http://schemas.microsoft.com/office/drawing/2014/main" id="{3AC85801-1DDA-4B8E-0897-3F0FC2703161}"/>
+              </a:ext>
+            </a:extLst>
+          </p:cNvPr>
+          <p:cNvSpPr txBox="1"/>
+          <p:nvPr/>
+        </p:nvSpPr>
+        <p:spPr>
+          <a:xfrm>
+            <a:off x="7736005" y="4545431"/>
+            <a:ext cx="1411857" cy="184666"/>
+          </a:xfrm>
+          <a:prstGeom prst="rect">
+            <a:avLst/>
+          </a:prstGeom>
+          <a:noFill/>
+        </p:spPr>
+        <p:txBody>
+          <a:bodyPr wrap="square" rtlCol="0">
+            <a:spAutoFit/>
+          </a:bodyPr>
+          <a:lstStyle/>
+          <a:p>
+            <a:r>
+              <a:rPr lang="de-DE" sz="600" dirty="0">
+                <a:solidFill>
+                  <a:schemeClr val="bg2"/>
+                </a:solidFill>
+              </a:rPr>
+              <a:t>Bachelor-Thesis Carlo B.</a:t>
+            </a:r>
+          </a:p>
+        </p:txBody>
+      </p:sp>
+      <p:pic>
+        <p:nvPicPr>
+          <p:cNvPr id="13" name="Grafik 12" descr="Ein Bild, das Schrift, weiß, Grafiken, Logo enthält.&#10;&#10;KI-generierte Inhalte können fehlerhaft sein.">
+            <a:extLst>
+              <a:ext uri="{FF2B5EF4-FFF2-40B4-BE49-F238E27FC236}">
+                <a16:creationId xmlns:a16="http://schemas.microsoft.com/office/drawing/2014/main" id="{72D0ECA0-4B51-8EA4-E306-704DAAD649E9}"/>
+              </a:ext>
+            </a:extLst>
+          </p:cNvPr>
+          <p:cNvPicPr>
+            <a:picLocks noChangeAspect="1"/>
+          </p:cNvPicPr>
+          <p:nvPr/>
+        </p:nvPicPr>
+        <p:blipFill>
+          <a:blip r:embed="rId4"/>
+          <a:stretch>
+            <a:fillRect/>
+          </a:stretch>
+        </p:blipFill>
+        <p:spPr>
+          <a:xfrm>
+            <a:off x="3985457" y="1714113"/>
+            <a:ext cx="1334345" cy="350548"/>
+          </a:xfrm>
+          <a:prstGeom prst="rect">
+            <a:avLst/>
+          </a:prstGeom>
+        </p:spPr>
+      </p:pic>
+      <p:cxnSp>
+        <p:nvCxnSpPr>
+          <p:cNvPr id="14" name="Gerade Verbindung mit Pfeil 13">
+            <a:extLst>
+              <a:ext uri="{FF2B5EF4-FFF2-40B4-BE49-F238E27FC236}">
+                <a16:creationId xmlns:a16="http://schemas.microsoft.com/office/drawing/2014/main" id="{2EDADFBF-47A6-0F41-0E28-A51A6402AAA4}"/>
+              </a:ext>
+            </a:extLst>
+          </p:cNvPr>
+          <p:cNvCxnSpPr/>
+          <p:nvPr/>
+        </p:nvCxnSpPr>
+        <p:spPr>
+          <a:xfrm flipV="1">
+            <a:off x="3873463" y="1697959"/>
+            <a:ext cx="0" cy="398911"/>
+          </a:xfrm>
+          <a:prstGeom prst="straightConnector1">
+            <a:avLst/>
+          </a:prstGeom>
+          <a:ln w="19050" cap="flat" cmpd="sng" algn="ctr">
+            <a:solidFill>
+              <a:srgbClr val="D40000"/>
+            </a:solidFill>
+            <a:prstDash val="solid"/>
+            <a:round/>
+            <a:headEnd type="none" w="med" len="med"/>
+            <a:tailEnd type="stealth" w="lg" len="lg"/>
+          </a:ln>
+        </p:spPr>
+        <p:style>
+          <a:lnRef idx="0">
+            <a:scrgbClr r="0" g="0" b="0"/>
+          </a:lnRef>
+          <a:fillRef idx="0">
+            <a:scrgbClr r="0" g="0" b="0"/>
+          </a:fillRef>
+          <a:effectRef idx="0">
+            <a:scrgbClr r="0" g="0" b="0"/>
+          </a:effectRef>
+          <a:fontRef idx="minor">
+            <a:schemeClr val="tx1"/>
+          </a:fontRef>
+        </p:style>
+      </p:cxnSp>
+      <p:cxnSp>
+        <p:nvCxnSpPr>
+          <p:cNvPr id="15" name="Gerade Verbindung mit Pfeil 14">
+            <a:extLst>
+              <a:ext uri="{FF2B5EF4-FFF2-40B4-BE49-F238E27FC236}">
+                <a16:creationId xmlns:a16="http://schemas.microsoft.com/office/drawing/2014/main" id="{ADD2401B-6010-BAED-D612-715FAEAE7797}"/>
+              </a:ext>
+            </a:extLst>
+          </p:cNvPr>
+          <p:cNvCxnSpPr/>
+          <p:nvPr/>
+        </p:nvCxnSpPr>
+        <p:spPr>
+          <a:xfrm flipV="1">
+            <a:off x="395536" y="1674103"/>
+            <a:ext cx="0" cy="398911"/>
+          </a:xfrm>
+          <a:prstGeom prst="straightConnector1">
+            <a:avLst/>
+          </a:prstGeom>
+          <a:ln w="19050" cap="flat" cmpd="sng" algn="ctr">
+            <a:solidFill>
+              <a:srgbClr val="D40000"/>
+            </a:solidFill>
+            <a:prstDash val="solid"/>
+            <a:round/>
+            <a:headEnd type="none" w="med" len="med"/>
+            <a:tailEnd type="stealth" w="lg" len="lg"/>
+          </a:ln>
+        </p:spPr>
+        <p:style>
+          <a:lnRef idx="0">
+            <a:scrgbClr r="0" g="0" b="0"/>
+          </a:lnRef>
+          <a:fillRef idx="0">
+            <a:scrgbClr r="0" g="0" b="0"/>
+          </a:fillRef>
+          <a:effectRef idx="0">
+            <a:scrgbClr r="0" g="0" b="0"/>
+          </a:effectRef>
+          <a:fontRef idx="minor">
+            <a:schemeClr val="tx1"/>
+          </a:fontRef>
+        </p:style>
+      </p:cxnSp>
+      <p:cxnSp>
+        <p:nvCxnSpPr>
+          <p:cNvPr id="16" name="Verbinder: gekrümmt 15">
+            <a:extLst>
+              <a:ext uri="{FF2B5EF4-FFF2-40B4-BE49-F238E27FC236}">
+                <a16:creationId xmlns:a16="http://schemas.microsoft.com/office/drawing/2014/main" id="{3A858295-00FB-6350-EBF6-DC8A1ECF8811}"/>
+              </a:ext>
+            </a:extLst>
+          </p:cNvPr>
+          <p:cNvCxnSpPr>
+            <a:cxnSpLocks/>
+          </p:cNvCxnSpPr>
+          <p:nvPr/>
+        </p:nvCxnSpPr>
+        <p:spPr>
+          <a:xfrm rot="5400000">
+            <a:off x="2589023" y="2230513"/>
+            <a:ext cx="288032" cy="209142"/>
+          </a:xfrm>
+          <a:prstGeom prst="curvedConnector3">
+            <a:avLst>
+              <a:gd name="adj1" fmla="val 50000"/>
+            </a:avLst>
+          </a:prstGeom>
+          <a:ln>
+            <a:solidFill>
+              <a:srgbClr val="2E2EFB"/>
+            </a:solidFill>
+            <a:tailEnd type="stealth" w="lg" len="lg"/>
+          </a:ln>
+        </p:spPr>
+        <p:style>
+          <a:lnRef idx="1">
+            <a:schemeClr val="accent1"/>
+          </a:lnRef>
+          <a:fillRef idx="0">
+            <a:schemeClr val="accent1"/>
+          </a:fillRef>
+          <a:effectRef idx="0">
+            <a:schemeClr val="accent1"/>
+          </a:effectRef>
+          <a:fontRef idx="minor">
+            <a:schemeClr val="tx1"/>
+          </a:fontRef>
+        </p:style>
+      </p:cxnSp>
+      <p:cxnSp>
+        <p:nvCxnSpPr>
+          <p:cNvPr id="17" name="Verbinder: gekrümmt 16">
+            <a:extLst>
+              <a:ext uri="{FF2B5EF4-FFF2-40B4-BE49-F238E27FC236}">
+                <a16:creationId xmlns:a16="http://schemas.microsoft.com/office/drawing/2014/main" id="{053D1860-1E1A-1CC6-F8A1-C953B9DC41B6}"/>
+              </a:ext>
+            </a:extLst>
+          </p:cNvPr>
+          <p:cNvCxnSpPr>
+            <a:cxnSpLocks/>
+          </p:cNvCxnSpPr>
+          <p:nvPr/>
+        </p:nvCxnSpPr>
+        <p:spPr>
+          <a:xfrm rot="16200000" flipH="1">
+            <a:off x="251519" y="2228899"/>
+            <a:ext cx="288032" cy="240203"/>
+          </a:xfrm>
+          <a:prstGeom prst="curvedConnector3">
+            <a:avLst>
+              <a:gd name="adj1" fmla="val 50000"/>
+            </a:avLst>
+          </a:prstGeom>
+          <a:ln>
+            <a:solidFill>
+              <a:srgbClr val="2E2EFB"/>
+            </a:solidFill>
+            <a:tailEnd type="stealth" w="lg" len="lg"/>
+          </a:ln>
+        </p:spPr>
+        <p:style>
+          <a:lnRef idx="1">
+            <a:schemeClr val="accent1"/>
+          </a:lnRef>
+          <a:fillRef idx="0">
+            <a:schemeClr val="accent1"/>
+          </a:fillRef>
+          <a:effectRef idx="0">
+            <a:schemeClr val="accent1"/>
+          </a:effectRef>
+          <a:fontRef idx="minor">
+            <a:schemeClr val="tx1"/>
+          </a:fontRef>
+        </p:style>
+      </p:cxnSp>
+      <p:pic>
+        <p:nvPicPr>
+          <p:cNvPr id="20" name="Grafik 19" descr="Ein Bild, das Schrift, weiß, Grafiken, Symbol enthält.&#10;&#10;KI-generierte Inhalte können fehlerhaft sein.">
+            <a:extLst>
+              <a:ext uri="{FF2B5EF4-FFF2-40B4-BE49-F238E27FC236}">
+                <a16:creationId xmlns:a16="http://schemas.microsoft.com/office/drawing/2014/main" id="{17594A4B-16E5-75C9-C18A-DB1B3D7F1632}"/>
+              </a:ext>
+            </a:extLst>
+          </p:cNvPr>
+          <p:cNvPicPr>
+            <a:picLocks noChangeAspect="1"/>
+          </p:cNvPicPr>
+          <p:nvPr/>
+        </p:nvPicPr>
+        <p:blipFill>
+          <a:blip r:embed="rId5"/>
+          <a:stretch>
+            <a:fillRect/>
+          </a:stretch>
+        </p:blipFill>
+        <p:spPr>
+          <a:xfrm>
+            <a:off x="1619672" y="2643758"/>
+            <a:ext cx="834499" cy="328044"/>
+          </a:xfrm>
+          <a:prstGeom prst="rect">
+            <a:avLst/>
+          </a:prstGeom>
+        </p:spPr>
+      </p:pic>
+      <p:sp>
+        <p:nvSpPr>
+          <p:cNvPr id="22" name="Ellipse 21">
+            <a:extLst>
+              <a:ext uri="{FF2B5EF4-FFF2-40B4-BE49-F238E27FC236}">
+                <a16:creationId xmlns:a16="http://schemas.microsoft.com/office/drawing/2014/main" id="{1E82427F-2FFD-E5BC-79B1-4114AB58EC6A}"/>
+              </a:ext>
+            </a:extLst>
+          </p:cNvPr>
+          <p:cNvSpPr/>
+          <p:nvPr/>
+        </p:nvSpPr>
+        <p:spPr>
+          <a:xfrm>
+            <a:off x="3639153" y="4109040"/>
+            <a:ext cx="234310" cy="216024"/>
+          </a:xfrm>
+          <a:prstGeom prst="ellipse">
+            <a:avLst/>
+          </a:prstGeom>
+          <a:noFill/>
+          <a:ln>
+            <a:solidFill>
+              <a:srgbClr val="FF0000"/>
+            </a:solidFill>
+          </a:ln>
+        </p:spPr>
+        <p:style>
+          <a:lnRef idx="2">
+            <a:schemeClr val="accent1">
+              <a:shade val="15000"/>
+            </a:schemeClr>
+          </a:lnRef>
+          <a:fillRef idx="1">
+            <a:schemeClr val="accent1"/>
+          </a:fillRef>
+          <a:effectRef idx="0">
+            <a:schemeClr val="accent1"/>
+          </a:effectRef>
+          <a:fontRef idx="minor">
+            <a:schemeClr val="lt1"/>
+          </a:fontRef>
+        </p:style>
+        <p:txBody>
+          <a:bodyPr rtlCol="0" anchor="ctr"/>
+          <a:lstStyle/>
+          <a:p>
+            <a:pPr algn="ctr"/>
+            <a:endParaRPr lang="de-DE"/>
+          </a:p>
+        </p:txBody>
+      </p:sp>
+    </p:spTree>
+    <p:extLst>
+      <p:ext uri="{BB962C8B-B14F-4D97-AF65-F5344CB8AC3E}">
+        <p14:creationId xmlns:p14="http://schemas.microsoft.com/office/powerpoint/2010/main" val="3511859392"/>
+      </p:ext>
+    </p:extLst>
+  </p:cSld>
+  <p:clrMapOvr>
+    <a:masterClrMapping/>
+  </p:clrMapOvr>
+</p:sld>
+</file>
+
+<file path=ppt/slides/slide17.xml><?xml version="1.0" encoding="utf-8"?>
+<p:sld xmlns:a="http://schemas.openxmlformats.org/drawingml/2006/main" xmlns:r="http://schemas.openxmlformats.org/officeDocument/2006/relationships" xmlns:p="http://schemas.openxmlformats.org/presentationml/2006/main">
+  <p:cSld>
+    <p:spTree>
+      <p:nvGrpSpPr>
         <p:cNvPr id="1" name=""/>
         <p:cNvGrpSpPr/>
         <p:nvPr/>
@@ -7991,7 +10183,7 @@
           <p:cNvPr id="2" name="Titel 1">
             <a:extLst>
               <a:ext uri="{FF2B5EF4-FFF2-40B4-BE49-F238E27FC236}">
-                <a16:creationId xmlns:a16="http://schemas.microsoft.com/office/drawing/2014/main" id="{658A5885-A388-3269-83EE-F27AA77E1E3E}"/>
+                <a16:creationId xmlns:a16="http://schemas.microsoft.com/office/drawing/2014/main" id="{53C1AC24-8CEE-0C69-65AB-31997304E9C4}"/>
               </a:ext>
             </a:extLst>
           </p:cNvPr>
@@ -8009,21 +10201,8 @@
           <a:p>
             <a:r>
               <a:rPr lang="de-DE" dirty="0"/>
-              <a:t>Raman-</a:t>
-            </a:r>
-            <a:r>
-              <a:rPr lang="de-DE" dirty="0" err="1"/>
-              <a:t>Assisted</a:t>
-            </a:r>
-            <a:r>
-              <a:rPr lang="de-DE" dirty="0"/>
-              <a:t> </a:t>
-            </a:r>
-            <a:r>
-              <a:rPr lang="de-DE" dirty="0" err="1"/>
-              <a:t>pumping</a:t>
-            </a:r>
-            <a:endParaRPr lang="de-DE" dirty="0"/>
+              <a:t>Beam Shaper</a:t>
+            </a:r>
           </a:p>
         </p:txBody>
       </p:sp>
@@ -8032,7 +10211,7 @@
           <p:cNvPr id="3" name="Inhaltsplatzhalter 2">
             <a:extLst>
               <a:ext uri="{FF2B5EF4-FFF2-40B4-BE49-F238E27FC236}">
-                <a16:creationId xmlns:a16="http://schemas.microsoft.com/office/drawing/2014/main" id="{2A41920D-328D-FBED-7509-AA2F6F81A091}"/>
+                <a16:creationId xmlns:a16="http://schemas.microsoft.com/office/drawing/2014/main" id="{440ACD6D-0746-72BB-414A-BAA27F935256}"/>
               </a:ext>
             </a:extLst>
           </p:cNvPr>
@@ -8043,452 +10222,21 @@
             <p:ph idx="11"/>
           </p:nvPr>
         </p:nvSpPr>
-        <p:spPr>
-          <a:xfrm>
-            <a:off x="152553" y="1228017"/>
-            <a:ext cx="8783998" cy="3359957"/>
-          </a:xfrm>
-        </p:spPr>
+        <p:spPr/>
         <p:txBody>
           <a:bodyPr/>
           <a:lstStyle/>
           <a:p>
-            <a:pPr marL="342900" indent="-342900">
-              <a:buFont typeface="Arial" panose="020B0604020202020204" pitchFamily="34" charset="0"/>
-              <a:buChar char="•"/>
-            </a:pPr>
-            <a:r>
-              <a:rPr lang="de-DE" dirty="0" err="1"/>
-              <a:t>Coarse</a:t>
-            </a:r>
-            <a:r>
-              <a:rPr lang="de-DE" dirty="0"/>
-              <a:t> pump</a:t>
-            </a:r>
-          </a:p>
-          <a:p>
-            <a:pPr marL="342900" indent="-342900">
-              <a:buFont typeface="Arial" panose="020B0604020202020204" pitchFamily="34" charset="0"/>
-              <a:buChar char="•"/>
-            </a:pPr>
-            <a:r>
-              <a:rPr lang="de-DE" dirty="0"/>
-              <a:t>Dissipative </a:t>
-            </a:r>
-            <a:r>
-              <a:rPr lang="de-DE" dirty="0" err="1"/>
-              <a:t>decay</a:t>
-            </a:r>
-            <a:endParaRPr lang="de-DE" dirty="0"/>
-          </a:p>
-          <a:p>
-            <a:pPr marL="342900" indent="-342900">
-              <a:buFont typeface="Arial" panose="020B0604020202020204" pitchFamily="34" charset="0"/>
-              <a:buChar char="•"/>
-            </a:pPr>
-            <a:r>
-              <a:rPr lang="de-DE" dirty="0"/>
-              <a:t>2 Photon </a:t>
-            </a:r>
-            <a:r>
-              <a:rPr lang="de-DE" dirty="0" err="1"/>
-              <a:t>raman</a:t>
-            </a:r>
-            <a:r>
-              <a:rPr lang="de-DE" dirty="0"/>
-              <a:t> pulse</a:t>
-            </a:r>
-          </a:p>
-          <a:p>
-            <a:pPr marL="342900" indent="-342900">
-              <a:buFont typeface="Arial" panose="020B0604020202020204" pitchFamily="34" charset="0"/>
-              <a:buChar char="•"/>
-            </a:pPr>
-            <a:endParaRPr lang="de-DE" dirty="0"/>
-          </a:p>
-          <a:p>
-            <a:pPr marL="342900" indent="-342900">
-              <a:buFont typeface="Arial" panose="020B0604020202020204" pitchFamily="34" charset="0"/>
-              <a:buChar char="•"/>
-            </a:pPr>
-            <a:r>
-              <a:rPr lang="de-DE" dirty="0" err="1"/>
-              <a:t>Preparation</a:t>
-            </a:r>
-            <a:r>
-              <a:rPr lang="de-DE" dirty="0"/>
-              <a:t> in</a:t>
-            </a:r>
-          </a:p>
-          <a:p>
-            <a:pPr marL="342900" indent="-342900">
-              <a:buFont typeface="Arial" panose="020B0604020202020204" pitchFamily="34" charset="0"/>
-              <a:buChar char="•"/>
-            </a:pPr>
-            <a:r>
-              <a:rPr lang="de-DE" dirty="0"/>
-              <a:t>EOM/AOM not </a:t>
-            </a:r>
-            <a:r>
-              <a:rPr lang="de-DE" dirty="0" err="1"/>
-              <a:t>usable</a:t>
-            </a:r>
-            <a:r>
-              <a:rPr lang="de-DE" dirty="0"/>
-              <a:t> </a:t>
-            </a:r>
+            <a:endParaRPr lang="de-DE"/>
           </a:p>
         </p:txBody>
       </p:sp>
-      <p:sp>
-        <p:nvSpPr>
-          <p:cNvPr id="8" name="Textfeld 7">
-            <a:extLst>
-              <a:ext uri="{FF2B5EF4-FFF2-40B4-BE49-F238E27FC236}">
-                <a16:creationId xmlns:a16="http://schemas.microsoft.com/office/drawing/2014/main" id="{FFEAD2F9-E13E-4BCC-8488-DE8A8B4A5D82}"/>
-              </a:ext>
-            </a:extLst>
-          </p:cNvPr>
-          <p:cNvSpPr txBox="1"/>
-          <p:nvPr/>
-        </p:nvSpPr>
-        <p:spPr>
-          <a:xfrm>
-            <a:off x="6296954" y="3808782"/>
-            <a:ext cx="1411857" cy="184666"/>
-          </a:xfrm>
-          <a:prstGeom prst="rect">
-            <a:avLst/>
-          </a:prstGeom>
-          <a:noFill/>
-        </p:spPr>
-        <p:txBody>
-          <a:bodyPr wrap="square" rtlCol="0">
-            <a:spAutoFit/>
-          </a:bodyPr>
-          <a:lstStyle/>
-          <a:p>
-            <a:r>
-              <a:rPr lang="de-DE" sz="600" dirty="0">
-                <a:solidFill>
-                  <a:schemeClr val="bg2"/>
-                </a:solidFill>
-              </a:rPr>
-              <a:t>Master </a:t>
-            </a:r>
-            <a:r>
-              <a:rPr lang="de-DE" sz="600" dirty="0" err="1">
-                <a:solidFill>
-                  <a:schemeClr val="bg2"/>
-                </a:solidFill>
-              </a:rPr>
-              <a:t>thesis</a:t>
-            </a:r>
-            <a:r>
-              <a:rPr lang="de-DE" sz="600" dirty="0">
-                <a:solidFill>
-                  <a:schemeClr val="bg2"/>
-                </a:solidFill>
-              </a:rPr>
-              <a:t>, </a:t>
-            </a:r>
-            <a:r>
-              <a:rPr lang="de-DE" sz="600" dirty="0" err="1">
-                <a:solidFill>
-                  <a:schemeClr val="bg2"/>
-                </a:solidFill>
-              </a:rPr>
-              <a:t>Timon</a:t>
-            </a:r>
-            <a:r>
-              <a:rPr lang="de-DE" sz="600" dirty="0">
-                <a:solidFill>
-                  <a:schemeClr val="bg2"/>
-                </a:solidFill>
-              </a:rPr>
-              <a:t> S..</a:t>
-            </a:r>
-          </a:p>
-        </p:txBody>
-      </p:sp>
-      <p:cxnSp>
-        <p:nvCxnSpPr>
-          <p:cNvPr id="14" name="Gerade Verbindung mit Pfeil 13">
-            <a:extLst>
-              <a:ext uri="{FF2B5EF4-FFF2-40B4-BE49-F238E27FC236}">
-                <a16:creationId xmlns:a16="http://schemas.microsoft.com/office/drawing/2014/main" id="{B0F0F9B9-12F2-AE5A-D30E-EF5F85497045}"/>
-              </a:ext>
-            </a:extLst>
-          </p:cNvPr>
-          <p:cNvCxnSpPr/>
-          <p:nvPr/>
-        </p:nvCxnSpPr>
-        <p:spPr>
-          <a:xfrm flipV="1">
-            <a:off x="395536" y="1238006"/>
-            <a:ext cx="0" cy="398911"/>
-          </a:xfrm>
-          <a:prstGeom prst="straightConnector1">
-            <a:avLst/>
-          </a:prstGeom>
-          <a:ln w="19050" cap="flat" cmpd="sng" algn="ctr">
-            <a:solidFill>
-              <a:srgbClr val="D40000"/>
-            </a:solidFill>
-            <a:prstDash val="solid"/>
-            <a:round/>
-            <a:headEnd type="none" w="med" len="med"/>
-            <a:tailEnd type="stealth" w="lg" len="lg"/>
-          </a:ln>
-        </p:spPr>
-        <p:style>
-          <a:lnRef idx="0">
-            <a:scrgbClr r="0" g="0" b="0"/>
-          </a:lnRef>
-          <a:fillRef idx="0">
-            <a:scrgbClr r="0" g="0" b="0"/>
-          </a:fillRef>
-          <a:effectRef idx="0">
-            <a:scrgbClr r="0" g="0" b="0"/>
-          </a:effectRef>
-          <a:fontRef idx="minor">
-            <a:schemeClr val="tx1"/>
-          </a:fontRef>
-        </p:style>
-      </p:cxnSp>
-      <p:cxnSp>
-        <p:nvCxnSpPr>
-          <p:cNvPr id="16" name="Verbinder: gekrümmt 15">
-            <a:extLst>
-              <a:ext uri="{FF2B5EF4-FFF2-40B4-BE49-F238E27FC236}">
-                <a16:creationId xmlns:a16="http://schemas.microsoft.com/office/drawing/2014/main" id="{CB053DB3-D9AC-B45E-0D5C-925EA4DB5F2E}"/>
-              </a:ext>
-            </a:extLst>
-          </p:cNvPr>
-          <p:cNvCxnSpPr>
-            <a:cxnSpLocks/>
-          </p:cNvCxnSpPr>
-          <p:nvPr/>
-        </p:nvCxnSpPr>
-        <p:spPr>
-          <a:xfrm rot="16200000" flipH="1">
-            <a:off x="215516" y="1843355"/>
-            <a:ext cx="288032" cy="216024"/>
-          </a:xfrm>
-          <a:prstGeom prst="curvedConnector3">
-            <a:avLst>
-              <a:gd name="adj1" fmla="val 42945"/>
-            </a:avLst>
-          </a:prstGeom>
-          <a:ln>
-            <a:solidFill>
-              <a:srgbClr val="7B0000"/>
-            </a:solidFill>
-            <a:tailEnd type="stealth" w="lg" len="lg"/>
-          </a:ln>
-        </p:spPr>
-        <p:style>
-          <a:lnRef idx="1">
-            <a:schemeClr val="accent1"/>
-          </a:lnRef>
-          <a:fillRef idx="0">
-            <a:schemeClr val="accent1"/>
-          </a:fillRef>
-          <a:effectRef idx="0">
-            <a:schemeClr val="accent1"/>
-          </a:effectRef>
-          <a:fontRef idx="minor">
-            <a:schemeClr val="tx1"/>
-          </a:fontRef>
-        </p:style>
-      </p:cxnSp>
-      <p:cxnSp>
-        <p:nvCxnSpPr>
-          <p:cNvPr id="24" name="Gerade Verbindung mit Pfeil 23">
-            <a:extLst>
-              <a:ext uri="{FF2B5EF4-FFF2-40B4-BE49-F238E27FC236}">
-                <a16:creationId xmlns:a16="http://schemas.microsoft.com/office/drawing/2014/main" id="{F290D347-D385-BA10-92BD-C70897E0749E}"/>
-              </a:ext>
-            </a:extLst>
-          </p:cNvPr>
-          <p:cNvCxnSpPr/>
-          <p:nvPr/>
-        </p:nvCxnSpPr>
-        <p:spPr>
-          <a:xfrm flipV="1">
-            <a:off x="3131840" y="2157110"/>
-            <a:ext cx="0" cy="360040"/>
-          </a:xfrm>
-          <a:prstGeom prst="straightConnector1">
-            <a:avLst/>
-          </a:prstGeom>
-          <a:ln w="19050" cap="flat" cmpd="sng" algn="ctr">
-            <a:solidFill>
-              <a:srgbClr val="00CC00"/>
-            </a:solidFill>
-            <a:prstDash val="dashDot"/>
-            <a:round/>
-            <a:headEnd type="none" w="med" len="med"/>
-            <a:tailEnd type="arrow" w="med" len="med"/>
-          </a:ln>
-        </p:spPr>
-        <p:style>
-          <a:lnRef idx="0">
-            <a:scrgbClr r="0" g="0" b="0"/>
-          </a:lnRef>
-          <a:fillRef idx="0">
-            <a:scrgbClr r="0" g="0" b="0"/>
-          </a:fillRef>
-          <a:effectRef idx="0">
-            <a:scrgbClr r="0" g="0" b="0"/>
-          </a:effectRef>
-          <a:fontRef idx="minor">
-            <a:schemeClr val="tx1"/>
-          </a:fontRef>
-        </p:style>
-      </p:cxnSp>
-      <p:cxnSp>
-        <p:nvCxnSpPr>
-          <p:cNvPr id="25" name="Gerade Verbindung mit Pfeil 24">
-            <a:extLst>
-              <a:ext uri="{FF2B5EF4-FFF2-40B4-BE49-F238E27FC236}">
-                <a16:creationId xmlns:a16="http://schemas.microsoft.com/office/drawing/2014/main" id="{6F7D11C0-E5D6-29BF-2D7C-497D4F2A16B3}"/>
-              </a:ext>
-            </a:extLst>
-          </p:cNvPr>
-          <p:cNvCxnSpPr/>
-          <p:nvPr/>
-        </p:nvCxnSpPr>
-        <p:spPr>
-          <a:xfrm flipV="1">
-            <a:off x="2123728" y="1238006"/>
-            <a:ext cx="0" cy="398911"/>
-          </a:xfrm>
-          <a:prstGeom prst="straightConnector1">
-            <a:avLst/>
-          </a:prstGeom>
-          <a:ln w="19050" cap="flat" cmpd="sng" algn="ctr">
-            <a:solidFill>
-              <a:srgbClr val="D40000"/>
-            </a:solidFill>
-            <a:prstDash val="solid"/>
-            <a:round/>
-            <a:headEnd type="none" w="med" len="med"/>
-            <a:tailEnd type="stealth" w="lg" len="lg"/>
-          </a:ln>
-        </p:spPr>
-        <p:style>
-          <a:lnRef idx="0">
-            <a:scrgbClr r="0" g="0" b="0"/>
-          </a:lnRef>
-          <a:fillRef idx="0">
-            <a:scrgbClr r="0" g="0" b="0"/>
-          </a:fillRef>
-          <a:effectRef idx="0">
-            <a:scrgbClr r="0" g="0" b="0"/>
-          </a:effectRef>
-          <a:fontRef idx="minor">
-            <a:schemeClr val="tx1"/>
-          </a:fontRef>
-        </p:style>
-      </p:cxnSp>
-      <p:cxnSp>
-        <p:nvCxnSpPr>
-          <p:cNvPr id="30" name="Verbinder: gekrümmt 29">
-            <a:extLst>
-              <a:ext uri="{FF2B5EF4-FFF2-40B4-BE49-F238E27FC236}">
-                <a16:creationId xmlns:a16="http://schemas.microsoft.com/office/drawing/2014/main" id="{3B3560D0-9E18-B52B-29CB-968CBBFF0156}"/>
-              </a:ext>
-            </a:extLst>
-          </p:cNvPr>
-          <p:cNvCxnSpPr>
-            <a:cxnSpLocks/>
-          </p:cNvCxnSpPr>
-          <p:nvPr/>
-        </p:nvCxnSpPr>
-        <p:spPr>
-          <a:xfrm rot="5400000">
-            <a:off x="2530095" y="1819107"/>
-            <a:ext cx="288032" cy="209142"/>
-          </a:xfrm>
-          <a:prstGeom prst="curvedConnector3">
-            <a:avLst>
-              <a:gd name="adj1" fmla="val 50000"/>
-            </a:avLst>
-          </a:prstGeom>
-          <a:ln>
-            <a:solidFill>
-              <a:srgbClr val="7B0000"/>
-            </a:solidFill>
-            <a:tailEnd type="stealth" w="lg" len="lg"/>
-          </a:ln>
-        </p:spPr>
-        <p:style>
-          <a:lnRef idx="1">
-            <a:schemeClr val="accent1"/>
-          </a:lnRef>
-          <a:fillRef idx="0">
-            <a:schemeClr val="accent1"/>
-          </a:fillRef>
-          <a:effectRef idx="0">
-            <a:schemeClr val="accent1"/>
-          </a:effectRef>
-          <a:fontRef idx="minor">
-            <a:schemeClr val="tx1"/>
-          </a:fontRef>
-        </p:style>
-      </p:cxnSp>
-      <p:cxnSp>
-        <p:nvCxnSpPr>
-          <p:cNvPr id="32" name="Gerade Verbindung mit Pfeil 31">
-            <a:extLst>
-              <a:ext uri="{FF2B5EF4-FFF2-40B4-BE49-F238E27FC236}">
-                <a16:creationId xmlns:a16="http://schemas.microsoft.com/office/drawing/2014/main" id="{5CFBC051-6238-C395-ED80-050546D43191}"/>
-              </a:ext>
-            </a:extLst>
-          </p:cNvPr>
-          <p:cNvCxnSpPr/>
-          <p:nvPr/>
-        </p:nvCxnSpPr>
-        <p:spPr>
-          <a:xfrm flipV="1">
-            <a:off x="359532" y="2157110"/>
-            <a:ext cx="0" cy="360040"/>
-          </a:xfrm>
-          <a:prstGeom prst="straightConnector1">
-            <a:avLst/>
-          </a:prstGeom>
-          <a:ln w="19050" cap="flat" cmpd="sng" algn="ctr">
-            <a:solidFill>
-              <a:srgbClr val="00CC00"/>
-            </a:solidFill>
-            <a:prstDash val="dashDot"/>
-            <a:round/>
-            <a:headEnd type="none" w="med" len="med"/>
-            <a:tailEnd type="arrow" w="med" len="med"/>
-          </a:ln>
-        </p:spPr>
-        <p:style>
-          <a:lnRef idx="0">
-            <a:scrgbClr r="0" g="0" b="0"/>
-          </a:lnRef>
-          <a:fillRef idx="0">
-            <a:scrgbClr r="0" g="0" b="0"/>
-          </a:fillRef>
-          <a:effectRef idx="0">
-            <a:scrgbClr r="0" g="0" b="0"/>
-          </a:effectRef>
-          <a:fontRef idx="minor">
-            <a:schemeClr val="tx1"/>
-          </a:fontRef>
-        </p:style>
-      </p:cxnSp>
       <p:pic>
         <p:nvPicPr>
-          <p:cNvPr id="9" name="Grafik 8" descr="Ein Bild, das Schrift, weiß, Typografie, Text enthält.&#10;&#10;KI-generierte Inhalte können fehlerhaft sein.">
+          <p:cNvPr id="5" name="Grafik 4">
             <a:extLst>
               <a:ext uri="{FF2B5EF4-FFF2-40B4-BE49-F238E27FC236}">
-                <a16:creationId xmlns:a16="http://schemas.microsoft.com/office/drawing/2014/main" id="{A344DA27-09DE-99C4-6D37-0A6612DD823C}"/>
+                <a16:creationId xmlns:a16="http://schemas.microsoft.com/office/drawing/2014/main" id="{81345D99-0B60-24EB-5EC9-891F3FA417A9}"/>
               </a:ext>
             </a:extLst>
           </p:cNvPr>
@@ -8498,75 +10246,15 @@
           <p:nvPr/>
         </p:nvPicPr>
         <p:blipFill>
-          <a:blip r:embed="rId3"/>
+          <a:blip r:embed="rId2"/>
           <a:stretch>
             <a:fillRect/>
           </a:stretch>
         </p:blipFill>
         <p:spPr>
           <a:xfrm>
-            <a:off x="432810" y="2636172"/>
-            <a:ext cx="2410997" cy="374550"/>
-          </a:xfrm>
-          <a:prstGeom prst="rect">
-            <a:avLst/>
-          </a:prstGeom>
-        </p:spPr>
-      </p:pic>
-      <p:pic>
-        <p:nvPicPr>
-          <p:cNvPr id="10" name="Grafik 9" descr="Ein Bild, das Schrift, weiß, Symbol, Text enthält.&#10;&#10;KI-generierte Inhalte können fehlerhaft sein.">
-            <a:extLst>
-              <a:ext uri="{FF2B5EF4-FFF2-40B4-BE49-F238E27FC236}">
-                <a16:creationId xmlns:a16="http://schemas.microsoft.com/office/drawing/2014/main" id="{764C13D1-E17D-F9B7-A520-23653D9D2FFC}"/>
-              </a:ext>
-            </a:extLst>
-          </p:cNvPr>
-          <p:cNvPicPr>
-            <a:picLocks noChangeAspect="1"/>
-          </p:cNvPicPr>
-          <p:nvPr/>
-        </p:nvPicPr>
-        <p:blipFill>
-          <a:blip r:embed="rId4"/>
-          <a:stretch>
-            <a:fillRect/>
-          </a:stretch>
-        </p:blipFill>
-        <p:spPr>
-          <a:xfrm>
-            <a:off x="2123728" y="3119157"/>
-            <a:ext cx="1490937" cy="289972"/>
-          </a:xfrm>
-          <a:prstGeom prst="rect">
-            <a:avLst/>
-          </a:prstGeom>
-        </p:spPr>
-      </p:pic>
-      <p:pic>
-        <p:nvPicPr>
-          <p:cNvPr id="11" name="Grafik 10" descr="Ein Bild, das Text, Diagramm, Reihe, Screenshot enthält.&#10;&#10;KI-generierte Inhalte können fehlerhaft sein.">
-            <a:extLst>
-              <a:ext uri="{FF2B5EF4-FFF2-40B4-BE49-F238E27FC236}">
-                <a16:creationId xmlns:a16="http://schemas.microsoft.com/office/drawing/2014/main" id="{E85C694E-1C42-83C6-B3E7-F3ABA92F618E}"/>
-              </a:ext>
-            </a:extLst>
-          </p:cNvPr>
-          <p:cNvPicPr>
-            <a:picLocks noChangeAspect="1"/>
-          </p:cNvPicPr>
-          <p:nvPr/>
-        </p:nvPicPr>
-        <p:blipFill>
-          <a:blip r:embed="rId5"/>
-          <a:stretch>
-            <a:fillRect/>
-          </a:stretch>
-        </p:blipFill>
-        <p:spPr>
-          <a:xfrm>
-            <a:off x="3614665" y="1422017"/>
-            <a:ext cx="5357430" cy="2270438"/>
+            <a:off x="3317059" y="1275606"/>
+            <a:ext cx="5646451" cy="1892083"/>
           </a:xfrm>
           <a:prstGeom prst="rect">
             <a:avLst/>
@@ -8576,7 +10264,7 @@
     </p:spTree>
     <p:extLst>
       <p:ext uri="{BB962C8B-B14F-4D97-AF65-F5344CB8AC3E}">
-        <p14:creationId xmlns:p14="http://schemas.microsoft.com/office/powerpoint/2010/main" val="78560346"/>
+        <p14:creationId xmlns:p14="http://schemas.microsoft.com/office/powerpoint/2010/main" val="4281341995"/>
       </p:ext>
     </p:extLst>
   </p:cSld>
@@ -8594,7 +10282,7 @@
         <p:cNvPr id="1" name="">
           <a:extLst>
             <a:ext uri="{FF2B5EF4-FFF2-40B4-BE49-F238E27FC236}">
-              <a16:creationId xmlns:a16="http://schemas.microsoft.com/office/drawing/2014/main" id="{9765CFBB-BD42-7221-DBFE-1EB6F3AA719A}"/>
+              <a16:creationId xmlns:a16="http://schemas.microsoft.com/office/drawing/2014/main" id="{7ECBF4AA-E282-8734-C374-83BDEF1AD5C2}"/>
             </a:ext>
           </a:extLst>
         </p:cNvPr>
@@ -8614,7 +10302,7 @@
           <p:cNvPr id="2" name="Titel 1">
             <a:extLst>
               <a:ext uri="{FF2B5EF4-FFF2-40B4-BE49-F238E27FC236}">
-                <a16:creationId xmlns:a16="http://schemas.microsoft.com/office/drawing/2014/main" id="{D8CDCF15-F814-4D3C-493B-7A6FFB9F9B2C}"/>
+                <a16:creationId xmlns:a16="http://schemas.microsoft.com/office/drawing/2014/main" id="{D8D050F2-601C-E96B-4940-D5C18AEF0F88}"/>
               </a:ext>
             </a:extLst>
           </p:cNvPr>
@@ -8632,17 +10320,42 @@
           <a:p>
             <a:r>
               <a:rPr lang="de-DE" dirty="0"/>
-              <a:t>Outlook</a:t>
-            </a:r>
+              <a:t>Beam Shaper</a:t>
+            </a:r>
+          </a:p>
+        </p:txBody>
+      </p:sp>
+      <p:sp>
+        <p:nvSpPr>
+          <p:cNvPr id="3" name="Inhaltsplatzhalter 2">
+            <a:extLst>
+              <a:ext uri="{FF2B5EF4-FFF2-40B4-BE49-F238E27FC236}">
+                <a16:creationId xmlns:a16="http://schemas.microsoft.com/office/drawing/2014/main" id="{4F967420-96C1-6238-5F56-BAFF824454DA}"/>
+              </a:ext>
+            </a:extLst>
+          </p:cNvPr>
+          <p:cNvSpPr>
+            <a:spLocks noGrp="1"/>
+          </p:cNvSpPr>
+          <p:nvPr>
+            <p:ph idx="11"/>
+          </p:nvPr>
+        </p:nvSpPr>
+        <p:spPr/>
+        <p:txBody>
+          <a:bodyPr/>
+          <a:lstStyle/>
+          <a:p>
+            <a:endParaRPr lang="de-DE"/>
           </a:p>
         </p:txBody>
       </p:sp>
       <p:pic>
         <p:nvPicPr>
-          <p:cNvPr id="3" name="Grafik 2" descr="Ein Bild, das Text, Schrift, Diagramm, parallel enthält.&#10;&#10;KI-generierte Inhalte können fehlerhaft sein.">
+          <p:cNvPr id="6" name="Grafik 5">
             <a:extLst>
               <a:ext uri="{FF2B5EF4-FFF2-40B4-BE49-F238E27FC236}">
-                <a16:creationId xmlns:a16="http://schemas.microsoft.com/office/drawing/2014/main" id="{4FDAA927-3DEA-09C7-BABC-4A57B067A1F3}"/>
+                <a16:creationId xmlns:a16="http://schemas.microsoft.com/office/drawing/2014/main" id="{37244BFC-35A3-FA25-B86C-67C101B8EA88}"/>
               </a:ext>
             </a:extLst>
           </p:cNvPr>
@@ -8652,153 +10365,15 @@
           <p:nvPr/>
         </p:nvPicPr>
         <p:blipFill>
-          <a:blip r:embed="rId3"/>
+          <a:blip r:embed="rId2"/>
           <a:stretch>
             <a:fillRect/>
           </a:stretch>
         </p:blipFill>
         <p:spPr>
           <a:xfrm>
-            <a:off x="4788024" y="1134454"/>
-            <a:ext cx="3777171" cy="3615913"/>
-          </a:xfrm>
-          <a:prstGeom prst="rect">
-            <a:avLst/>
-          </a:prstGeom>
-        </p:spPr>
-      </p:pic>
-      <p:sp>
-        <p:nvSpPr>
-          <p:cNvPr id="4" name="Textfeld 3">
-            <a:extLst>
-              <a:ext uri="{FF2B5EF4-FFF2-40B4-BE49-F238E27FC236}">
-                <a16:creationId xmlns:a16="http://schemas.microsoft.com/office/drawing/2014/main" id="{06B16CF8-BF46-B20E-346A-850853161209}"/>
-              </a:ext>
-            </a:extLst>
-          </p:cNvPr>
-          <p:cNvSpPr txBox="1"/>
-          <p:nvPr/>
-        </p:nvSpPr>
-        <p:spPr>
-          <a:xfrm>
-            <a:off x="7524328" y="4628624"/>
-            <a:ext cx="1411857" cy="184666"/>
-          </a:xfrm>
-          <a:prstGeom prst="rect">
-            <a:avLst/>
-          </a:prstGeom>
-          <a:noFill/>
-        </p:spPr>
-        <p:txBody>
-          <a:bodyPr wrap="square" rtlCol="0">
-            <a:spAutoFit/>
-          </a:bodyPr>
-          <a:lstStyle/>
-          <a:p>
-            <a:r>
-              <a:rPr lang="de-DE" sz="600" dirty="0">
-                <a:solidFill>
-                  <a:schemeClr val="bg2"/>
-                </a:solidFill>
-              </a:rPr>
-              <a:t>Dissertation Tobias S.</a:t>
-            </a:r>
-          </a:p>
-        </p:txBody>
-      </p:sp>
-      <p:pic>
-        <p:nvPicPr>
-          <p:cNvPr id="5" name="Grafik 4" descr="Ein Bild, das Kreis, Diagramm, Reihe enthält.&#10;&#10;KI-generierte Inhalte können fehlerhaft sein.">
-            <a:extLst>
-              <a:ext uri="{FF2B5EF4-FFF2-40B4-BE49-F238E27FC236}">
-                <a16:creationId xmlns:a16="http://schemas.microsoft.com/office/drawing/2014/main" id="{195D6952-0B9C-F14D-95F8-AA07425C6399}"/>
-              </a:ext>
-            </a:extLst>
-          </p:cNvPr>
-          <p:cNvPicPr>
-            <a:picLocks noChangeAspect="1"/>
-          </p:cNvPicPr>
-          <p:nvPr/>
-        </p:nvPicPr>
-        <p:blipFill>
-          <a:blip r:embed="rId4"/>
-          <a:stretch>
-            <a:fillRect/>
-          </a:stretch>
-        </p:blipFill>
-        <p:spPr>
-          <a:xfrm>
-            <a:off x="658308" y="1672003"/>
-            <a:ext cx="2880321" cy="3092109"/>
-          </a:xfrm>
-          <a:prstGeom prst="rect">
-            <a:avLst/>
-          </a:prstGeom>
-        </p:spPr>
-      </p:pic>
-      <p:sp>
-        <p:nvSpPr>
-          <p:cNvPr id="6" name="Textfeld 5">
-            <a:extLst>
-              <a:ext uri="{FF2B5EF4-FFF2-40B4-BE49-F238E27FC236}">
-                <a16:creationId xmlns:a16="http://schemas.microsoft.com/office/drawing/2014/main" id="{B618D201-44C1-4E91-8EF9-52A048B091C3}"/>
-              </a:ext>
-            </a:extLst>
-          </p:cNvPr>
-          <p:cNvSpPr txBox="1"/>
-          <p:nvPr/>
-        </p:nvSpPr>
-        <p:spPr>
-          <a:xfrm>
-            <a:off x="2530636" y="4443958"/>
-            <a:ext cx="1411857" cy="184666"/>
-          </a:xfrm>
-          <a:prstGeom prst="rect">
-            <a:avLst/>
-          </a:prstGeom>
-          <a:noFill/>
-        </p:spPr>
-        <p:txBody>
-          <a:bodyPr wrap="square" rtlCol="0">
-            <a:spAutoFit/>
-          </a:bodyPr>
-          <a:lstStyle/>
-          <a:p>
-            <a:r>
-              <a:rPr lang="de-DE" sz="600" dirty="0">
-                <a:solidFill>
-                  <a:schemeClr val="bg2"/>
-                </a:solidFill>
-              </a:rPr>
-              <a:t>Master-Thesis Moritz D.</a:t>
-            </a:r>
-          </a:p>
-        </p:txBody>
-      </p:sp>
-      <p:pic>
-        <p:nvPicPr>
-          <p:cNvPr id="7" name="Grafik 6">
-            <a:extLst>
-              <a:ext uri="{FF2B5EF4-FFF2-40B4-BE49-F238E27FC236}">
-                <a16:creationId xmlns:a16="http://schemas.microsoft.com/office/drawing/2014/main" id="{F0B8F66A-E4FE-E297-1C79-6CA383287A77}"/>
-              </a:ext>
-            </a:extLst>
-          </p:cNvPr>
-          <p:cNvPicPr>
-            <a:picLocks noChangeAspect="1"/>
-          </p:cNvPicPr>
-          <p:nvPr/>
-        </p:nvPicPr>
-        <p:blipFill>
-          <a:blip r:embed="rId5"/>
-          <a:stretch>
-            <a:fillRect/>
-          </a:stretch>
-        </p:blipFill>
-        <p:spPr>
-          <a:xfrm>
-            <a:off x="251520" y="1193656"/>
-            <a:ext cx="3923928" cy="434137"/>
+            <a:off x="4139952" y="1419622"/>
+            <a:ext cx="4427984" cy="1597563"/>
           </a:xfrm>
           <a:prstGeom prst="rect">
             <a:avLst/>
@@ -8808,7 +10383,7 @@
     </p:spTree>
     <p:extLst>
       <p:ext uri="{BB962C8B-B14F-4D97-AF65-F5344CB8AC3E}">
-        <p14:creationId xmlns:p14="http://schemas.microsoft.com/office/powerpoint/2010/main" val="4235925907"/>
+        <p14:creationId xmlns:p14="http://schemas.microsoft.com/office/powerpoint/2010/main" val="1762894982"/>
       </p:ext>
     </p:extLst>
   </p:cSld>
@@ -8823,13 +10398,7 @@
   <p:cSld>
     <p:spTree>
       <p:nvGrpSpPr>
-        <p:cNvPr id="1" name="">
-          <a:extLst>
-            <a:ext uri="{FF2B5EF4-FFF2-40B4-BE49-F238E27FC236}">
-              <a16:creationId xmlns:a16="http://schemas.microsoft.com/office/drawing/2014/main" id="{AB5A2CF6-5EE4-0939-C24C-3DF9F4263163}"/>
-            </a:ext>
-          </a:extLst>
-        </p:cNvPr>
+        <p:cNvPr id="1" name=""/>
         <p:cNvGrpSpPr/>
         <p:nvPr/>
       </p:nvGrpSpPr>
@@ -8846,7 +10415,7 @@
           <p:cNvPr id="2" name="Titel 1">
             <a:extLst>
               <a:ext uri="{FF2B5EF4-FFF2-40B4-BE49-F238E27FC236}">
-                <a16:creationId xmlns:a16="http://schemas.microsoft.com/office/drawing/2014/main" id="{1CF6B73A-A5D9-F8D3-7A91-AE6C7D81E4ED}"/>
+                <a16:creationId xmlns:a16="http://schemas.microsoft.com/office/drawing/2014/main" id="{3ABA7BA6-3E52-D8E7-114E-EF356C716EE4}"/>
               </a:ext>
             </a:extLst>
           </p:cNvPr>
@@ -8864,17 +10433,42 @@
           <a:p>
             <a:r>
               <a:rPr lang="de-DE" dirty="0"/>
-              <a:t>Outlook</a:t>
-            </a:r>
+              <a:t>Beam Shaper</a:t>
+            </a:r>
+          </a:p>
+        </p:txBody>
+      </p:sp>
+      <p:sp>
+        <p:nvSpPr>
+          <p:cNvPr id="3" name="Inhaltsplatzhalter 2">
+            <a:extLst>
+              <a:ext uri="{FF2B5EF4-FFF2-40B4-BE49-F238E27FC236}">
+                <a16:creationId xmlns:a16="http://schemas.microsoft.com/office/drawing/2014/main" id="{FD68E7C9-8082-1886-B171-78F58E5D0093}"/>
+              </a:ext>
+            </a:extLst>
+          </p:cNvPr>
+          <p:cNvSpPr>
+            <a:spLocks noGrp="1"/>
+          </p:cNvSpPr>
+          <p:nvPr>
+            <p:ph idx="11"/>
+          </p:nvPr>
+        </p:nvSpPr>
+        <p:spPr/>
+        <p:txBody>
+          <a:bodyPr/>
+          <a:lstStyle/>
+          <a:p>
+            <a:endParaRPr lang="de-DE"/>
           </a:p>
         </p:txBody>
       </p:sp>
       <p:pic>
         <p:nvPicPr>
-          <p:cNvPr id="3" name="Grafik 2" descr="Ein Bild, das Maschine, Bautechnik, Elektrische Leitungen, Elektronik enthält.&#10;&#10;KI-generierte Inhalte können fehlerhaft sein.">
+          <p:cNvPr id="5" name="Grafik 4">
             <a:extLst>
               <a:ext uri="{FF2B5EF4-FFF2-40B4-BE49-F238E27FC236}">
-                <a16:creationId xmlns:a16="http://schemas.microsoft.com/office/drawing/2014/main" id="{57E1498C-23BB-DBD6-7449-CADA99545C95}"/>
+                <a16:creationId xmlns:a16="http://schemas.microsoft.com/office/drawing/2014/main" id="{1B05DF8F-8ABE-5319-0311-7C4E6A2661E3}"/>
               </a:ext>
             </a:extLst>
           </p:cNvPr>
@@ -8884,64 +10478,25 @@
           <p:nvPr/>
         </p:nvPicPr>
         <p:blipFill>
-          <a:blip r:embed="rId3"/>
+          <a:blip r:embed="rId2"/>
           <a:stretch>
             <a:fillRect/>
           </a:stretch>
         </p:blipFill>
         <p:spPr>
           <a:xfrm>
-            <a:off x="1403648" y="1102661"/>
-            <a:ext cx="5904656" cy="3674127"/>
+            <a:off x="3491880" y="1451029"/>
+            <a:ext cx="5364088" cy="2828846"/>
           </a:xfrm>
           <a:prstGeom prst="rect">
             <a:avLst/>
           </a:prstGeom>
         </p:spPr>
       </p:pic>
-      <p:sp>
-        <p:nvSpPr>
-          <p:cNvPr id="4" name="Textfeld 3">
-            <a:extLst>
-              <a:ext uri="{FF2B5EF4-FFF2-40B4-BE49-F238E27FC236}">
-                <a16:creationId xmlns:a16="http://schemas.microsoft.com/office/drawing/2014/main" id="{81CDCE8F-E09F-371D-7C50-6DD6A497EC03}"/>
-              </a:ext>
-            </a:extLst>
-          </p:cNvPr>
-          <p:cNvSpPr txBox="1"/>
-          <p:nvPr/>
-        </p:nvSpPr>
-        <p:spPr>
-          <a:xfrm>
-            <a:off x="7291488" y="4592122"/>
-            <a:ext cx="1008111" cy="184666"/>
-          </a:xfrm>
-          <a:prstGeom prst="rect">
-            <a:avLst/>
-          </a:prstGeom>
-          <a:noFill/>
-        </p:spPr>
-        <p:txBody>
-          <a:bodyPr wrap="square" rtlCol="0">
-            <a:spAutoFit/>
-          </a:bodyPr>
-          <a:lstStyle/>
-          <a:p>
-            <a:r>
-              <a:rPr lang="de-DE" sz="600" dirty="0">
-                <a:solidFill>
-                  <a:schemeClr val="bg2"/>
-                </a:solidFill>
-              </a:rPr>
-              <a:t>Master-Thesis, Jan L.</a:t>
-            </a:r>
-          </a:p>
-        </p:txBody>
-      </p:sp>
     </p:spTree>
     <p:extLst>
       <p:ext uri="{BB962C8B-B14F-4D97-AF65-F5344CB8AC3E}">
-        <p14:creationId xmlns:p14="http://schemas.microsoft.com/office/powerpoint/2010/main" val="907500687"/>
+        <p14:creationId xmlns:p14="http://schemas.microsoft.com/office/powerpoint/2010/main" val="2238768245"/>
       </p:ext>
     </p:extLst>
   </p:cSld>
@@ -8956,13 +10511,7 @@
   <p:cSld>
     <p:spTree>
       <p:nvGrpSpPr>
-        <p:cNvPr id="1" name="">
-          <a:extLst>
-            <a:ext uri="{FF2B5EF4-FFF2-40B4-BE49-F238E27FC236}">
-              <a16:creationId xmlns:a16="http://schemas.microsoft.com/office/drawing/2014/main" id="{882FA524-57A0-493C-907A-E5CF3C675FB5}"/>
-            </a:ext>
-          </a:extLst>
-        </p:cNvPr>
+        <p:cNvPr id="1" name=""/>
         <p:cNvGrpSpPr/>
         <p:nvPr/>
       </p:nvGrpSpPr>
@@ -8979,7 +10528,7 @@
           <p:cNvPr id="2" name="Titel 1">
             <a:extLst>
               <a:ext uri="{FF2B5EF4-FFF2-40B4-BE49-F238E27FC236}">
-                <a16:creationId xmlns:a16="http://schemas.microsoft.com/office/drawing/2014/main" id="{106E4DFD-CBD2-0890-A3B8-9511EA683D55}"/>
+                <a16:creationId xmlns:a16="http://schemas.microsoft.com/office/drawing/2014/main" id="{171267E7-11EA-9207-277F-3345318F1EE5}"/>
               </a:ext>
             </a:extLst>
           </p:cNvPr>
@@ -8997,56 +10546,47 @@
           <a:p>
             <a:r>
               <a:rPr lang="de-DE" dirty="0"/>
-              <a:t>Outlook</a:t>
-            </a:r>
+              <a:t>Multi-tone </a:t>
+            </a:r>
+            <a:r>
+              <a:rPr lang="de-DE" dirty="0" err="1"/>
+              <a:t>simulation</a:t>
+            </a:r>
+            <a:endParaRPr lang="de-DE" dirty="0"/>
           </a:p>
         </p:txBody>
       </p:sp>
       <p:sp>
         <p:nvSpPr>
-          <p:cNvPr id="18" name="Textfeld 17">
+          <p:cNvPr id="3" name="Inhaltsplatzhalter 2">
             <a:extLst>
               <a:ext uri="{FF2B5EF4-FFF2-40B4-BE49-F238E27FC236}">
-                <a16:creationId xmlns:a16="http://schemas.microsoft.com/office/drawing/2014/main" id="{3809F755-CAFA-816F-F4A1-D6689AD29AF8}"/>
+                <a16:creationId xmlns:a16="http://schemas.microsoft.com/office/drawing/2014/main" id="{23C3161E-BBD7-6F87-1030-C4FF0B80C64E}"/>
               </a:ext>
             </a:extLst>
           </p:cNvPr>
-          <p:cNvSpPr txBox="1"/>
-          <p:nvPr/>
+          <p:cNvSpPr>
+            <a:spLocks noGrp="1"/>
+          </p:cNvSpPr>
+          <p:nvPr>
+            <p:ph idx="11"/>
+          </p:nvPr>
         </p:nvSpPr>
-        <p:spPr>
-          <a:xfrm>
-            <a:off x="971600" y="4633049"/>
-            <a:ext cx="1411857" cy="184666"/>
-          </a:xfrm>
-          <a:prstGeom prst="rect">
-            <a:avLst/>
-          </a:prstGeom>
-          <a:noFill/>
-        </p:spPr>
+        <p:spPr/>
         <p:txBody>
-          <a:bodyPr wrap="square" rtlCol="0">
-            <a:spAutoFit/>
-          </a:bodyPr>
+          <a:bodyPr/>
           <a:lstStyle/>
           <a:p>
-            <a:r>
-              <a:rPr lang="de-DE" sz="600" dirty="0">
-                <a:solidFill>
-                  <a:schemeClr val="bg2"/>
-                </a:solidFill>
-              </a:rPr>
-              <a:t>Bachelor-Thesis Carlo B.</a:t>
-            </a:r>
+            <a:endParaRPr lang="de-DE"/>
           </a:p>
         </p:txBody>
       </p:sp>
       <p:pic>
         <p:nvPicPr>
-          <p:cNvPr id="6" name="Grafik 5" descr="Ein Bild, das Text, Schrift, Diagramm, parallel enthält.&#10;&#10;KI-generierte Inhalte können fehlerhaft sein.">
+          <p:cNvPr id="5" name="Grafik 4">
             <a:extLst>
               <a:ext uri="{FF2B5EF4-FFF2-40B4-BE49-F238E27FC236}">
-                <a16:creationId xmlns:a16="http://schemas.microsoft.com/office/drawing/2014/main" id="{F8C225FD-C44A-0114-53DC-8E44BAE7F307}"/>
+                <a16:creationId xmlns:a16="http://schemas.microsoft.com/office/drawing/2014/main" id="{4C46F616-1848-0820-AA16-34DAA81FCE23}"/>
               </a:ext>
             </a:extLst>
           </p:cNvPr>
@@ -9063,134 +10603,18 @@
         </p:blipFill>
         <p:spPr>
           <a:xfrm>
-            <a:off x="3059832" y="1529459"/>
-            <a:ext cx="2779302" cy="2660645"/>
+            <a:off x="2555428" y="2817902"/>
+            <a:ext cx="6444208" cy="1874778"/>
           </a:xfrm>
           <a:prstGeom prst="rect">
             <a:avLst/>
           </a:prstGeom>
         </p:spPr>
       </p:pic>
-      <p:sp>
-        <p:nvSpPr>
-          <p:cNvPr id="7" name="Textfeld 6">
-            <a:extLst>
-              <a:ext uri="{FF2B5EF4-FFF2-40B4-BE49-F238E27FC236}">
-                <a16:creationId xmlns:a16="http://schemas.microsoft.com/office/drawing/2014/main" id="{69B94676-7ADD-8AAF-C2FA-0A781C850048}"/>
-              </a:ext>
-            </a:extLst>
-          </p:cNvPr>
-          <p:cNvSpPr txBox="1"/>
-          <p:nvPr/>
-        </p:nvSpPr>
-        <p:spPr>
-          <a:xfrm>
-            <a:off x="4043199" y="4218510"/>
-            <a:ext cx="1411857" cy="184666"/>
-          </a:xfrm>
-          <a:prstGeom prst="rect">
-            <a:avLst/>
-          </a:prstGeom>
-          <a:noFill/>
-        </p:spPr>
-        <p:txBody>
-          <a:bodyPr wrap="square" rtlCol="0">
-            <a:spAutoFit/>
-          </a:bodyPr>
-          <a:lstStyle/>
-          <a:p>
-            <a:r>
-              <a:rPr lang="de-DE" sz="600" dirty="0">
-                <a:solidFill>
-                  <a:schemeClr val="bg2"/>
-                </a:solidFill>
-              </a:rPr>
-              <a:t>Dissertation Tobias S.</a:t>
-            </a:r>
-          </a:p>
-        </p:txBody>
-      </p:sp>
-      <p:pic>
-        <p:nvPicPr>
-          <p:cNvPr id="5" name="Grafik 4" descr="Ein Bild, das Maschine, Bautechnik, Elektrische Leitungen, Elektronik enthält.&#10;&#10;KI-generierte Inhalte können fehlerhaft sein.">
-            <a:extLst>
-              <a:ext uri="{FF2B5EF4-FFF2-40B4-BE49-F238E27FC236}">
-                <a16:creationId xmlns:a16="http://schemas.microsoft.com/office/drawing/2014/main" id="{F4AA8398-06DE-09FE-1E64-F2334B4E5D25}"/>
-              </a:ext>
-            </a:extLst>
-          </p:cNvPr>
-          <p:cNvPicPr>
-            <a:picLocks noChangeAspect="1"/>
-          </p:cNvPicPr>
-          <p:nvPr/>
-        </p:nvPicPr>
-        <p:blipFill>
-          <a:blip r:embed="rId3"/>
-          <a:stretch>
-            <a:fillRect/>
-          </a:stretch>
-        </p:blipFill>
-        <p:spPr>
-          <a:xfrm>
-            <a:off x="6063225" y="2866205"/>
-            <a:ext cx="2905773" cy="1808095"/>
-          </a:xfrm>
-          <a:prstGeom prst="rect">
-            <a:avLst/>
-          </a:prstGeom>
-        </p:spPr>
-      </p:pic>
-      <p:sp>
-        <p:nvSpPr>
-          <p:cNvPr id="8" name="Textfeld 7">
-            <a:extLst>
-              <a:ext uri="{FF2B5EF4-FFF2-40B4-BE49-F238E27FC236}">
-                <a16:creationId xmlns:a16="http://schemas.microsoft.com/office/drawing/2014/main" id="{7130519F-0B6D-6F84-ACB2-429417E79C4C}"/>
-              </a:ext>
-            </a:extLst>
-          </p:cNvPr>
-          <p:cNvSpPr txBox="1"/>
-          <p:nvPr/>
-        </p:nvSpPr>
-        <p:spPr>
-          <a:xfrm>
-            <a:off x="7291488" y="4633049"/>
-            <a:ext cx="1008111" cy="184666"/>
-          </a:xfrm>
-          <a:prstGeom prst="rect">
-            <a:avLst/>
-          </a:prstGeom>
-          <a:noFill/>
-        </p:spPr>
-        <p:txBody>
-          <a:bodyPr wrap="square" rtlCol="0">
-            <a:spAutoFit/>
-          </a:bodyPr>
-          <a:lstStyle/>
-          <a:p>
-            <a:r>
-              <a:rPr lang="de-DE" sz="600">
-                <a:solidFill>
-                  <a:schemeClr val="bg2"/>
-                </a:solidFill>
-              </a:rPr>
-              <a:t>Master thesis</a:t>
-            </a:r>
-            <a:r>
-              <a:rPr lang="de-DE" sz="600" dirty="0">
-                <a:solidFill>
-                  <a:schemeClr val="bg2"/>
-                </a:solidFill>
-              </a:rPr>
-              <a:t>, Jan L.</a:t>
-            </a:r>
-          </a:p>
-        </p:txBody>
-      </p:sp>
     </p:spTree>
     <p:extLst>
       <p:ext uri="{BB962C8B-B14F-4D97-AF65-F5344CB8AC3E}">
-        <p14:creationId xmlns:p14="http://schemas.microsoft.com/office/powerpoint/2010/main" val="2131358240"/>
+        <p14:creationId xmlns:p14="http://schemas.microsoft.com/office/powerpoint/2010/main" val="1067637087"/>
       </p:ext>
     </p:extLst>
   </p:cSld>
@@ -9222,7 +10646,7 @@
           <p:cNvPr id="2" name="Titel 1">
             <a:extLst>
               <a:ext uri="{FF2B5EF4-FFF2-40B4-BE49-F238E27FC236}">
-                <a16:creationId xmlns:a16="http://schemas.microsoft.com/office/drawing/2014/main" id="{684F1B5D-894B-32E9-8089-C6582EA204F1}"/>
+                <a16:creationId xmlns:a16="http://schemas.microsoft.com/office/drawing/2014/main" id="{077BC84D-A2B7-CB21-35DE-267A8CFA0EC1}"/>
               </a:ext>
             </a:extLst>
           </p:cNvPr>
@@ -9239,79 +10663,253 @@
           <a:lstStyle/>
           <a:p>
             <a:r>
+              <a:rPr lang="de-DE" dirty="0"/>
+              <a:t>Single Airy </a:t>
+            </a:r>
+            <a:r>
               <a:rPr lang="de-DE" dirty="0" err="1"/>
-              <a:t>Thank</a:t>
-            </a:r>
-            <a:r>
-              <a:rPr lang="de-DE" dirty="0"/>
-              <a:t> </a:t>
-            </a:r>
-            <a:r>
-              <a:rPr lang="de-DE" dirty="0" err="1"/>
-              <a:t>you</a:t>
-            </a:r>
-            <a:r>
-              <a:rPr lang="de-DE" dirty="0"/>
-              <a:t> </a:t>
-            </a:r>
-            <a:r>
-              <a:rPr lang="de-DE" dirty="0" err="1"/>
-              <a:t>for</a:t>
-            </a:r>
-            <a:r>
-              <a:rPr lang="de-DE" dirty="0"/>
-              <a:t> </a:t>
-            </a:r>
-            <a:r>
-              <a:rPr lang="de-DE" dirty="0" err="1"/>
-              <a:t>your</a:t>
-            </a:r>
-            <a:r>
-              <a:rPr lang="de-DE" dirty="0"/>
-              <a:t> </a:t>
-            </a:r>
-            <a:r>
-              <a:rPr lang="de-DE" dirty="0" err="1"/>
-              <a:t>attention</a:t>
+              <a:t>spot</a:t>
             </a:r>
             <a:endParaRPr lang="de-DE" dirty="0"/>
           </a:p>
         </p:txBody>
       </p:sp>
-      <p:pic>
-        <p:nvPicPr>
-          <p:cNvPr id="6" name="Grafik 5" descr="Ein Bild, das Kleidung, Person, draußen, Mann enthält.&#10;&#10;KI-generierte Inhalte können fehlerhaft sein.">
+      <p:sp>
+        <p:nvSpPr>
+          <p:cNvPr id="3" name="Inhaltsplatzhalter 2">
             <a:extLst>
               <a:ext uri="{FF2B5EF4-FFF2-40B4-BE49-F238E27FC236}">
-                <a16:creationId xmlns:a16="http://schemas.microsoft.com/office/drawing/2014/main" id="{8280EF74-6EEF-FEC5-2AFC-9D4C71506BC9}"/>
+                <a16:creationId xmlns:a16="http://schemas.microsoft.com/office/drawing/2014/main" id="{65BD8CA9-6FD4-9FEF-8479-DF393D70483F}"/>
               </a:ext>
             </a:extLst>
           </p:cNvPr>
-          <p:cNvPicPr>
-            <a:picLocks noChangeAspect="1"/>
-          </p:cNvPicPr>
+          <p:cNvSpPr>
+            <a:spLocks noGrp="1"/>
+          </p:cNvSpPr>
+          <p:nvPr>
+            <p:ph idx="11"/>
+          </p:nvPr>
+        </p:nvSpPr>
+        <p:spPr/>
+        <p:txBody>
+          <a:bodyPr/>
+          <a:lstStyle/>
+          <a:p>
+            <a:endParaRPr lang="de-DE" dirty="0"/>
+          </a:p>
+        </p:txBody>
+      </p:sp>
+      <p:grpSp>
+        <p:nvGrpSpPr>
+          <p:cNvPr id="14" name="Gruppieren 13">
+            <a:extLst>
+              <a:ext uri="{FF2B5EF4-FFF2-40B4-BE49-F238E27FC236}">
+                <a16:creationId xmlns:a16="http://schemas.microsoft.com/office/drawing/2014/main" id="{4CCC950C-3D3B-D683-1EAF-F833AD14B5B4}"/>
+              </a:ext>
+            </a:extLst>
+          </p:cNvPr>
+          <p:cNvGrpSpPr/>
           <p:nvPr/>
-        </p:nvPicPr>
-        <p:blipFill>
-          <a:blip r:embed="rId2"/>
-          <a:stretch>
-            <a:fillRect/>
-          </a:stretch>
-        </p:blipFill>
-        <p:spPr>
+        </p:nvGrpSpPr>
+        <p:grpSpPr>
           <a:xfrm>
-            <a:off x="179514" y="1106289"/>
-            <a:ext cx="8764793" cy="3670499"/>
+            <a:off x="3203848" y="2657005"/>
+            <a:ext cx="4968552" cy="1766927"/>
+            <a:chOff x="2560266" y="922572"/>
+            <a:chExt cx="4968552" cy="1766927"/>
           </a:xfrm>
-          <a:prstGeom prst="rect">
-            <a:avLst/>
-          </a:prstGeom>
-        </p:spPr>
-      </p:pic>
+        </p:grpSpPr>
+        <p:pic>
+          <p:nvPicPr>
+            <p:cNvPr id="8" name="Grafik 7">
+              <a:extLst>
+                <a:ext uri="{FF2B5EF4-FFF2-40B4-BE49-F238E27FC236}">
+                  <a16:creationId xmlns:a16="http://schemas.microsoft.com/office/drawing/2014/main" id="{0CC59B09-899F-D702-F6FE-928E7B282815}"/>
+                </a:ext>
+              </a:extLst>
+            </p:cNvPr>
+            <p:cNvPicPr>
+              <a:picLocks noChangeAspect="1"/>
+            </p:cNvPicPr>
+            <p:nvPr/>
+          </p:nvPicPr>
+          <p:blipFill>
+            <a:blip r:embed="rId2"/>
+            <a:stretch>
+              <a:fillRect/>
+            </a:stretch>
+          </p:blipFill>
+          <p:spPr>
+            <a:xfrm>
+              <a:off x="2560266" y="957387"/>
+              <a:ext cx="4968552" cy="1732112"/>
+            </a:xfrm>
+            <a:prstGeom prst="rect">
+              <a:avLst/>
+            </a:prstGeom>
+          </p:spPr>
+        </p:pic>
+        <p:sp>
+          <p:nvSpPr>
+            <p:cNvPr id="6" name="Rechteck 5">
+              <a:extLst>
+                <a:ext uri="{FF2B5EF4-FFF2-40B4-BE49-F238E27FC236}">
+                  <a16:creationId xmlns:a16="http://schemas.microsoft.com/office/drawing/2014/main" id="{BE2698D9-0C96-B648-9382-1BBDF8196DC5}"/>
+                </a:ext>
+              </a:extLst>
+            </p:cNvPr>
+            <p:cNvSpPr/>
+            <p:nvPr/>
+          </p:nvSpPr>
+          <p:spPr>
+            <a:xfrm>
+              <a:off x="4932040" y="926257"/>
+              <a:ext cx="288032" cy="53884"/>
+            </a:xfrm>
+            <a:prstGeom prst="rect">
+              <a:avLst/>
+            </a:prstGeom>
+            <a:solidFill>
+              <a:srgbClr val="FFFFFF"/>
+            </a:solidFill>
+            <a:ln>
+              <a:noFill/>
+            </a:ln>
+          </p:spPr>
+          <p:style>
+            <a:lnRef idx="2">
+              <a:schemeClr val="accent1">
+                <a:shade val="15000"/>
+              </a:schemeClr>
+            </a:lnRef>
+            <a:fillRef idx="1">
+              <a:schemeClr val="accent1"/>
+            </a:fillRef>
+            <a:effectRef idx="0">
+              <a:schemeClr val="accent1"/>
+            </a:effectRef>
+            <a:fontRef idx="minor">
+              <a:schemeClr val="lt1"/>
+            </a:fontRef>
+          </p:style>
+          <p:txBody>
+            <a:bodyPr rtlCol="0" anchor="ctr"/>
+            <a:lstStyle/>
+            <a:p>
+              <a:pPr algn="ctr"/>
+              <a:endParaRPr lang="de-DE"/>
+            </a:p>
+          </p:txBody>
+        </p:sp>
+        <p:sp>
+          <p:nvSpPr>
+            <p:cNvPr id="10" name="Rechteck 9">
+              <a:extLst>
+                <a:ext uri="{FF2B5EF4-FFF2-40B4-BE49-F238E27FC236}">
+                  <a16:creationId xmlns:a16="http://schemas.microsoft.com/office/drawing/2014/main" id="{08D2E803-D556-A454-DC9C-F8B5B5439A38}"/>
+                </a:ext>
+              </a:extLst>
+            </p:cNvPr>
+            <p:cNvSpPr/>
+            <p:nvPr/>
+          </p:nvSpPr>
+          <p:spPr>
+            <a:xfrm>
+              <a:off x="6243451" y="922572"/>
+              <a:ext cx="288032" cy="53884"/>
+            </a:xfrm>
+            <a:prstGeom prst="rect">
+              <a:avLst/>
+            </a:prstGeom>
+            <a:solidFill>
+              <a:srgbClr val="FFFFFF"/>
+            </a:solidFill>
+            <a:ln>
+              <a:noFill/>
+            </a:ln>
+          </p:spPr>
+          <p:style>
+            <a:lnRef idx="2">
+              <a:schemeClr val="accent1">
+                <a:shade val="15000"/>
+              </a:schemeClr>
+            </a:lnRef>
+            <a:fillRef idx="1">
+              <a:schemeClr val="accent1"/>
+            </a:fillRef>
+            <a:effectRef idx="0">
+              <a:schemeClr val="accent1"/>
+            </a:effectRef>
+            <a:fontRef idx="minor">
+              <a:schemeClr val="lt1"/>
+            </a:fontRef>
+          </p:style>
+          <p:txBody>
+            <a:bodyPr rtlCol="0" anchor="ctr"/>
+            <a:lstStyle/>
+            <a:p>
+              <a:pPr algn="ctr"/>
+              <a:endParaRPr lang="de-DE"/>
+            </a:p>
+          </p:txBody>
+        </p:sp>
+        <p:sp>
+          <p:nvSpPr>
+            <p:cNvPr id="12" name="Rechteck 11">
+              <a:extLst>
+                <a:ext uri="{FF2B5EF4-FFF2-40B4-BE49-F238E27FC236}">
+                  <a16:creationId xmlns:a16="http://schemas.microsoft.com/office/drawing/2014/main" id="{9D9ABC60-B8D2-02D6-EE7C-4096A13B58CE}"/>
+                </a:ext>
+              </a:extLst>
+            </p:cNvPr>
+            <p:cNvSpPr/>
+            <p:nvPr/>
+          </p:nvSpPr>
+          <p:spPr>
+            <a:xfrm>
+              <a:off x="3458121" y="930445"/>
+              <a:ext cx="288032" cy="53884"/>
+            </a:xfrm>
+            <a:prstGeom prst="rect">
+              <a:avLst/>
+            </a:prstGeom>
+            <a:solidFill>
+              <a:srgbClr val="FFFFFF"/>
+            </a:solidFill>
+            <a:ln>
+              <a:noFill/>
+            </a:ln>
+          </p:spPr>
+          <p:style>
+            <a:lnRef idx="2">
+              <a:schemeClr val="accent1">
+                <a:shade val="15000"/>
+              </a:schemeClr>
+            </a:lnRef>
+            <a:fillRef idx="1">
+              <a:schemeClr val="accent1"/>
+            </a:fillRef>
+            <a:effectRef idx="0">
+              <a:schemeClr val="accent1"/>
+            </a:effectRef>
+            <a:fontRef idx="minor">
+              <a:schemeClr val="lt1"/>
+            </a:fontRef>
+          </p:style>
+          <p:txBody>
+            <a:bodyPr rtlCol="0" anchor="ctr"/>
+            <a:lstStyle/>
+            <a:p>
+              <a:pPr algn="ctr"/>
+              <a:endParaRPr lang="de-DE"/>
+            </a:p>
+          </p:txBody>
+        </p:sp>
+      </p:grpSp>
     </p:spTree>
     <p:extLst>
       <p:ext uri="{BB962C8B-B14F-4D97-AF65-F5344CB8AC3E}">
-        <p14:creationId xmlns:p14="http://schemas.microsoft.com/office/powerpoint/2010/main" val="1083693964"/>
+        <p14:creationId xmlns:p14="http://schemas.microsoft.com/office/powerpoint/2010/main" val="1859706866"/>
       </p:ext>
     </p:extLst>
   </p:cSld>
@@ -9329,7 +10927,7 @@
         <p:cNvPr id="1" name="">
           <a:extLst>
             <a:ext uri="{FF2B5EF4-FFF2-40B4-BE49-F238E27FC236}">
-              <a16:creationId xmlns:a16="http://schemas.microsoft.com/office/drawing/2014/main" id="{1083097F-06D1-AC32-AFCC-E1D29F9D5E0C}"/>
+              <a16:creationId xmlns:a16="http://schemas.microsoft.com/office/drawing/2014/main" id="{1FF41D17-759B-E217-2141-B6C42AD49F51}"/>
             </a:ext>
           </a:extLst>
         </p:cNvPr>
@@ -9349,7 +10947,7 @@
           <p:cNvPr id="2" name="Titel 1">
             <a:extLst>
               <a:ext uri="{FF2B5EF4-FFF2-40B4-BE49-F238E27FC236}">
-                <a16:creationId xmlns:a16="http://schemas.microsoft.com/office/drawing/2014/main" id="{136AEB95-6BD7-857F-38CE-E88C4314FA29}"/>
+                <a16:creationId xmlns:a16="http://schemas.microsoft.com/office/drawing/2014/main" id="{DC295CB3-BAA3-CF4A-7788-B1E322EFAC42}"/>
               </a:ext>
             </a:extLst>
           </p:cNvPr>
@@ -9367,50 +10965,43 @@
           <a:p>
             <a:r>
               <a:rPr lang="de-DE" dirty="0" err="1"/>
-              <a:t>Thank</a:t>
-            </a:r>
-            <a:r>
-              <a:rPr lang="de-DE" dirty="0"/>
-              <a:t> </a:t>
-            </a:r>
-            <a:r>
-              <a:rPr lang="de-DE" dirty="0" err="1"/>
-              <a:t>you</a:t>
-            </a:r>
-            <a:r>
-              <a:rPr lang="de-DE" dirty="0"/>
-              <a:t> </a:t>
-            </a:r>
-            <a:r>
-              <a:rPr lang="de-DE" dirty="0" err="1"/>
-              <a:t>for</a:t>
-            </a:r>
-            <a:r>
-              <a:rPr lang="de-DE" dirty="0"/>
-              <a:t> </a:t>
-            </a:r>
-            <a:r>
-              <a:rPr lang="de-DE" dirty="0" err="1"/>
-              <a:t>your</a:t>
-            </a:r>
-            <a:r>
-              <a:rPr lang="de-DE" dirty="0"/>
-              <a:t> </a:t>
-            </a:r>
-            <a:r>
-              <a:rPr lang="de-DE" dirty="0" err="1"/>
-              <a:t>attention</a:t>
+              <a:t>Beating</a:t>
             </a:r>
             <a:endParaRPr lang="de-DE" dirty="0"/>
+          </a:p>
+        </p:txBody>
+      </p:sp>
+      <p:sp>
+        <p:nvSpPr>
+          <p:cNvPr id="3" name="Inhaltsplatzhalter 2">
+            <a:extLst>
+              <a:ext uri="{FF2B5EF4-FFF2-40B4-BE49-F238E27FC236}">
+                <a16:creationId xmlns:a16="http://schemas.microsoft.com/office/drawing/2014/main" id="{816D9699-0819-4564-56C3-4B768ABA8A09}"/>
+              </a:ext>
+            </a:extLst>
+          </p:cNvPr>
+          <p:cNvSpPr>
+            <a:spLocks noGrp="1"/>
+          </p:cNvSpPr>
+          <p:nvPr>
+            <p:ph idx="11"/>
+          </p:nvPr>
+        </p:nvSpPr>
+        <p:spPr/>
+        <p:txBody>
+          <a:bodyPr/>
+          <a:lstStyle/>
+          <a:p>
+            <a:endParaRPr lang="de-DE"/>
           </a:p>
         </p:txBody>
       </p:sp>
       <p:pic>
         <p:nvPicPr>
-          <p:cNvPr id="6" name="Grafik 5" descr="Ein Bild, das Kleidung, Person, draußen, Mann enthält.&#10;&#10;KI-generierte Inhalte können fehlerhaft sein.">
+          <p:cNvPr id="5" name="Grafik 4">
             <a:extLst>
               <a:ext uri="{FF2B5EF4-FFF2-40B4-BE49-F238E27FC236}">
-                <a16:creationId xmlns:a16="http://schemas.microsoft.com/office/drawing/2014/main" id="{35482C1F-16C0-81B6-A8A3-A0C72D4A14F7}"/>
+                <a16:creationId xmlns:a16="http://schemas.microsoft.com/office/drawing/2014/main" id="{C6146D53-3167-37FE-5204-7328769E95F1}"/>
               </a:ext>
             </a:extLst>
           </p:cNvPr>
@@ -9420,72 +11011,25 @@
           <p:nvPr/>
         </p:nvPicPr>
         <p:blipFill>
-          <a:blip r:embed="rId3"/>
+          <a:blip r:embed="rId2"/>
           <a:stretch>
             <a:fillRect/>
           </a:stretch>
         </p:blipFill>
         <p:spPr>
           <a:xfrm>
-            <a:off x="179514" y="1106289"/>
-            <a:ext cx="8764793" cy="3670499"/>
+            <a:off x="5436096" y="1491630"/>
+            <a:ext cx="3320487" cy="2507406"/>
           </a:xfrm>
           <a:prstGeom prst="rect">
             <a:avLst/>
           </a:prstGeom>
         </p:spPr>
       </p:pic>
-      <p:pic>
-        <p:nvPicPr>
-          <p:cNvPr id="1026" name="Picture 2" descr="img.chefkoch-cdn.de/rezepte/1001811205419556/bilde...">
-            <a:extLst>
-              <a:ext uri="{FF2B5EF4-FFF2-40B4-BE49-F238E27FC236}">
-                <a16:creationId xmlns:a16="http://schemas.microsoft.com/office/drawing/2014/main" id="{FC1AAEDF-4157-E103-9679-101F6C36825D}"/>
-              </a:ext>
-            </a:extLst>
-          </p:cNvPr>
-          <p:cNvPicPr>
-            <a:picLocks noChangeAspect="1" noChangeArrowheads="1"/>
-          </p:cNvPicPr>
-          <p:nvPr/>
-        </p:nvPicPr>
-        <p:blipFill>
-          <a:blip r:embed="rId4">
-            <a:extLst>
-              <a:ext uri="{28A0092B-C50C-407E-A947-70E740481C1C}">
-                <a14:useLocalDpi xmlns:a14="http://schemas.microsoft.com/office/drawing/2010/main" val="0"/>
-              </a:ext>
-            </a:extLst>
-          </a:blip>
-          <a:srcRect/>
-          <a:stretch>
-            <a:fillRect/>
-          </a:stretch>
-        </p:blipFill>
-        <p:spPr bwMode="auto">
-          <a:xfrm rot="172076">
-            <a:off x="1574819" y="1254139"/>
-            <a:ext cx="5994361" cy="3371827"/>
-          </a:xfrm>
-          <a:prstGeom prst="rect">
-            <a:avLst/>
-          </a:prstGeom>
-          <a:noFill/>
-          <a:extLst>
-            <a:ext uri="{909E8E84-426E-40DD-AFC4-6F175D3DCCD1}">
-              <a14:hiddenFill xmlns:a14="http://schemas.microsoft.com/office/drawing/2010/main">
-                <a:solidFill>
-                  <a:srgbClr val="FFFFFF"/>
-                </a:solidFill>
-              </a14:hiddenFill>
-            </a:ext>
-          </a:extLst>
-        </p:spPr>
-      </p:pic>
     </p:spTree>
     <p:extLst>
       <p:ext uri="{BB962C8B-B14F-4D97-AF65-F5344CB8AC3E}">
-        <p14:creationId xmlns:p14="http://schemas.microsoft.com/office/powerpoint/2010/main" val="1663129495"/>
+        <p14:creationId xmlns:p14="http://schemas.microsoft.com/office/powerpoint/2010/main" val="3559728493"/>
       </p:ext>
     </p:extLst>
   </p:cSld>
@@ -9500,7 +11044,13 @@
   <p:cSld>
     <p:spTree>
       <p:nvGrpSpPr>
-        <p:cNvPr id="1" name=""/>
+        <p:cNvPr id="1" name="">
+          <a:extLst>
+            <a:ext uri="{FF2B5EF4-FFF2-40B4-BE49-F238E27FC236}">
+              <a16:creationId xmlns:a16="http://schemas.microsoft.com/office/drawing/2014/main" id="{8BC4828C-DAEB-5F7C-943D-B957D9C93AAA}"/>
+            </a:ext>
+          </a:extLst>
+        </p:cNvPr>
         <p:cNvGrpSpPr/>
         <p:nvPr/>
       </p:nvGrpSpPr>
@@ -9512,94 +11062,12 @@
           <a:chExt cx="0" cy="0"/>
         </a:xfrm>
       </p:grpSpPr>
-      <p:pic>
-        <p:nvPicPr>
-          <p:cNvPr id="8" name="Grafik 7" descr="Ein Bild, das Schrift, Typografie, Text, weiß enthält.&#10;&#10;KI-generierte Inhalte können fehlerhaft sein.">
-            <a:extLst>
-              <a:ext uri="{FF2B5EF4-FFF2-40B4-BE49-F238E27FC236}">
-                <a16:creationId xmlns:a16="http://schemas.microsoft.com/office/drawing/2014/main" id="{50DE3A93-BA00-9A5E-D2AF-481B4D881646}"/>
-              </a:ext>
-            </a:extLst>
-          </p:cNvPr>
-          <p:cNvPicPr>
-            <a:picLocks noChangeAspect="1"/>
-          </p:cNvPicPr>
-          <p:nvPr/>
-        </p:nvPicPr>
-        <p:blipFill>
-          <a:blip r:embed="rId2"/>
-          <a:stretch>
-            <a:fillRect/>
-          </a:stretch>
-        </p:blipFill>
-        <p:spPr>
-          <a:xfrm>
-            <a:off x="3943029" y="1303950"/>
-            <a:ext cx="1584176" cy="298538"/>
-          </a:xfrm>
-          <a:prstGeom prst="rect">
-            <a:avLst/>
-          </a:prstGeom>
-        </p:spPr>
-      </p:pic>
-      <p:sp>
-        <p:nvSpPr>
-          <p:cNvPr id="21" name="Ellipse 20">
-            <a:extLst>
-              <a:ext uri="{FF2B5EF4-FFF2-40B4-BE49-F238E27FC236}">
-                <a16:creationId xmlns:a16="http://schemas.microsoft.com/office/drawing/2014/main" id="{926F23C7-19DD-F5B8-0A92-24D67519E3E7}"/>
-              </a:ext>
-            </a:extLst>
-          </p:cNvPr>
-          <p:cNvSpPr/>
-          <p:nvPr/>
-        </p:nvSpPr>
-        <p:spPr>
-          <a:xfrm>
-            <a:off x="3873463" y="1239436"/>
-            <a:ext cx="1758955" cy="414439"/>
-          </a:xfrm>
-          <a:prstGeom prst="ellipse">
-            <a:avLst/>
-          </a:prstGeom>
-          <a:noFill/>
-          <a:ln>
-            <a:solidFill>
-              <a:srgbClr val="FF0000"/>
-            </a:solidFill>
-          </a:ln>
-        </p:spPr>
-        <p:style>
-          <a:lnRef idx="2">
-            <a:schemeClr val="accent1">
-              <a:shade val="15000"/>
-            </a:schemeClr>
-          </a:lnRef>
-          <a:fillRef idx="1">
-            <a:schemeClr val="accent1"/>
-          </a:fillRef>
-          <a:effectRef idx="0">
-            <a:schemeClr val="accent1"/>
-          </a:effectRef>
-          <a:fontRef idx="minor">
-            <a:schemeClr val="lt1"/>
-          </a:fontRef>
-        </p:style>
-        <p:txBody>
-          <a:bodyPr rtlCol="0" anchor="ctr"/>
-          <a:lstStyle/>
-          <a:p>
-            <a:pPr algn="ctr"/>
-            <a:endParaRPr lang="de-DE"/>
-          </a:p>
-        </p:txBody>
-      </p:sp>
       <p:sp>
         <p:nvSpPr>
           <p:cNvPr id="2" name="Titel 1">
             <a:extLst>
               <a:ext uri="{FF2B5EF4-FFF2-40B4-BE49-F238E27FC236}">
-                <a16:creationId xmlns:a16="http://schemas.microsoft.com/office/drawing/2014/main" id="{D502FA88-CBFA-8450-7DF2-BB036807CD7C}"/>
+                <a16:creationId xmlns:a16="http://schemas.microsoft.com/office/drawing/2014/main" id="{E15578B4-32F8-3384-8141-12E2B04A82EA}"/>
               </a:ext>
             </a:extLst>
           </p:cNvPr>
@@ -9616,26 +11084,9 @@
           <a:lstStyle/>
           <a:p>
             <a:r>
-              <a:rPr lang="de-DE" dirty="0" err="1"/>
-              <a:t>Initialization</a:t>
-            </a:r>
-            <a:r>
-              <a:rPr lang="de-DE" dirty="0"/>
-              <a:t> in a </a:t>
-            </a:r>
-            <a:r>
-              <a:rPr lang="de-DE" dirty="0" err="1"/>
-              <a:t>known</a:t>
-            </a:r>
-            <a:r>
-              <a:rPr lang="de-DE" dirty="0"/>
-              <a:t> </a:t>
-            </a:r>
-            <a:r>
-              <a:rPr lang="de-DE" dirty="0" err="1"/>
-              <a:t>state</a:t>
-            </a:r>
-            <a:endParaRPr lang="de-DE" dirty="0"/>
+              <a:rPr lang="de-DE" dirty="0"/>
+              <a:t>New Setup</a:t>
+            </a:r>
           </a:p>
         </p:txBody>
       </p:sp>
@@ -9644,7 +11095,7 @@
           <p:cNvPr id="3" name="Inhaltsplatzhalter 2">
             <a:extLst>
               <a:ext uri="{FF2B5EF4-FFF2-40B4-BE49-F238E27FC236}">
-                <a16:creationId xmlns:a16="http://schemas.microsoft.com/office/drawing/2014/main" id="{6A35E7DA-7712-854C-8B9A-833721D607B3}"/>
+                <a16:creationId xmlns:a16="http://schemas.microsoft.com/office/drawing/2014/main" id="{584F3AC2-508F-02BA-F3F0-30CB743D7298}"/>
               </a:ext>
             </a:extLst>
           </p:cNvPr>
@@ -9660,483 +11111,117 @@
           <a:bodyPr/>
           <a:lstStyle/>
           <a:p>
-            <a:pPr marL="342900" indent="-342900">
-              <a:buFont typeface="Arial" panose="020B0604020202020204" pitchFamily="34" charset="0"/>
-              <a:buChar char="•"/>
-            </a:pPr>
-            <a:r>
-              <a:rPr lang="de-DE" dirty="0" err="1"/>
-              <a:t>Preparation</a:t>
-            </a:r>
-            <a:r>
-              <a:rPr lang="de-DE" dirty="0"/>
-              <a:t> in </a:t>
-            </a:r>
-            <a:r>
-              <a:rPr lang="de-DE" dirty="0" err="1"/>
-              <a:t>the</a:t>
-            </a:r>
-            <a:r>
-              <a:rPr lang="de-DE" dirty="0"/>
-              <a:t> </a:t>
-            </a:r>
-            <a:r>
-              <a:rPr lang="de-DE" dirty="0" err="1"/>
-              <a:t>dark</a:t>
-            </a:r>
-            <a:r>
-              <a:rPr lang="de-DE" dirty="0"/>
-              <a:t> </a:t>
-            </a:r>
-            <a:r>
-              <a:rPr lang="de-DE" dirty="0" err="1"/>
-              <a:t>state</a:t>
-            </a:r>
-            <a:endParaRPr lang="de-DE" dirty="0"/>
-          </a:p>
-          <a:p>
-            <a:pPr marL="342900" indent="-342900">
-              <a:buFont typeface="Arial" panose="020B0604020202020204" pitchFamily="34" charset="0"/>
-              <a:buChar char="•"/>
-            </a:pPr>
-            <a:r>
-              <a:rPr lang="de-DE" dirty="0" err="1"/>
-              <a:t>Pumping</a:t>
-            </a:r>
-            <a:r>
-              <a:rPr lang="de-DE" dirty="0"/>
-              <a:t> </a:t>
-            </a:r>
-            <a:r>
-              <a:rPr lang="de-DE" dirty="0" err="1"/>
-              <a:t>with</a:t>
-            </a:r>
-            <a:r>
-              <a:rPr lang="de-DE" dirty="0"/>
-              <a:t> a </a:t>
-            </a:r>
-            <a:r>
-              <a:rPr lang="de-DE" dirty="0" err="1"/>
-              <a:t>coarse</a:t>
-            </a:r>
-            <a:r>
-              <a:rPr lang="de-DE" dirty="0"/>
-              <a:t> pump </a:t>
-            </a:r>
-          </a:p>
-          <a:p>
-            <a:pPr marL="342900" indent="-342900">
-              <a:buFont typeface="Arial" panose="020B0604020202020204" pitchFamily="34" charset="0"/>
-              <a:buChar char="•"/>
-            </a:pPr>
-            <a:r>
-              <a:rPr lang="de-DE" dirty="0"/>
-              <a:t>Dissipative </a:t>
-            </a:r>
-            <a:r>
-              <a:rPr lang="de-DE" dirty="0" err="1"/>
-              <a:t>decay</a:t>
-            </a:r>
-            <a:endParaRPr lang="de-DE" dirty="0"/>
-          </a:p>
-          <a:p>
-            <a:pPr marL="342900" indent="-342900">
-              <a:buFont typeface="Arial" panose="020B0604020202020204" pitchFamily="34" charset="0"/>
-              <a:buChar char="•"/>
-            </a:pPr>
-            <a:r>
-              <a:rPr lang="de-DE" dirty="0"/>
-              <a:t>Decay in </a:t>
-            </a:r>
-          </a:p>
-          <a:p>
-            <a:pPr marL="701675" lvl="2" indent="-342900">
-              <a:buFont typeface="Arial" panose="020B0604020202020204" pitchFamily="34" charset="0"/>
-              <a:buChar char="•"/>
-            </a:pPr>
-            <a:r>
-              <a:rPr lang="de-DE" dirty="0" err="1"/>
-              <a:t>Repump</a:t>
-            </a:r>
-            <a:r>
-              <a:rPr lang="de-DE" dirty="0"/>
-              <a:t> </a:t>
-            </a:r>
-            <a:r>
-              <a:rPr lang="de-DE" dirty="0" err="1"/>
-              <a:t>laser</a:t>
-            </a:r>
-            <a:endParaRPr lang="de-DE" dirty="0"/>
+            <a:endParaRPr lang="de-DE"/>
           </a:p>
         </p:txBody>
       </p:sp>
-      <p:pic>
-        <p:nvPicPr>
-          <p:cNvPr id="5" name="Grafik 4" descr="Ein Bild, das Diagramm, Reihe enthält.&#10;&#10;KI-generierte Inhalte können fehlerhaft sein.">
+      <p:grpSp>
+        <p:nvGrpSpPr>
+          <p:cNvPr id="9" name="Gruppieren 8">
             <a:extLst>
               <a:ext uri="{FF2B5EF4-FFF2-40B4-BE49-F238E27FC236}">
-                <a16:creationId xmlns:a16="http://schemas.microsoft.com/office/drawing/2014/main" id="{AFD665DF-C6DA-EC23-3333-556212254777}"/>
+                <a16:creationId xmlns:a16="http://schemas.microsoft.com/office/drawing/2014/main" id="{3CEAD4DA-2287-0884-F980-72978873D3D1}"/>
               </a:ext>
             </a:extLst>
           </p:cNvPr>
-          <p:cNvPicPr>
-            <a:picLocks noChangeAspect="1"/>
-          </p:cNvPicPr>
+          <p:cNvGrpSpPr/>
           <p:nvPr/>
-        </p:nvPicPr>
-        <p:blipFill>
-          <a:blip r:embed="rId3"/>
-          <a:stretch>
-            <a:fillRect/>
-          </a:stretch>
-        </p:blipFill>
-        <p:spPr>
+        </p:nvGrpSpPr>
+        <p:grpSpPr>
           <a:xfrm>
-            <a:off x="2454171" y="2755383"/>
-            <a:ext cx="6694756" cy="2014520"/>
+            <a:off x="5148064" y="1126424"/>
+            <a:ext cx="3896654" cy="3603037"/>
+            <a:chOff x="5148064" y="1126424"/>
+            <a:chExt cx="3896654" cy="3603037"/>
           </a:xfrm>
-          <a:prstGeom prst="rect">
-            <a:avLst/>
-          </a:prstGeom>
-        </p:spPr>
-      </p:pic>
-      <p:sp>
-        <p:nvSpPr>
-          <p:cNvPr id="6" name="Textfeld 5">
-            <a:extLst>
-              <a:ext uri="{FF2B5EF4-FFF2-40B4-BE49-F238E27FC236}">
-                <a16:creationId xmlns:a16="http://schemas.microsoft.com/office/drawing/2014/main" id="{3AC85801-1DDA-4B8E-0897-3F0FC2703161}"/>
-              </a:ext>
-            </a:extLst>
-          </p:cNvPr>
-          <p:cNvSpPr txBox="1"/>
-          <p:nvPr/>
-        </p:nvSpPr>
-        <p:spPr>
-          <a:xfrm>
-            <a:off x="7736005" y="4545431"/>
-            <a:ext cx="1411857" cy="184666"/>
-          </a:xfrm>
-          <a:prstGeom prst="rect">
-            <a:avLst/>
-          </a:prstGeom>
-          <a:noFill/>
-        </p:spPr>
-        <p:txBody>
-          <a:bodyPr wrap="square" rtlCol="0">
-            <a:spAutoFit/>
-          </a:bodyPr>
-          <a:lstStyle/>
-          <a:p>
-            <a:r>
-              <a:rPr lang="de-DE" sz="600" dirty="0">
-                <a:solidFill>
-                  <a:schemeClr val="bg2"/>
-                </a:solidFill>
-              </a:rPr>
-              <a:t>Bachelor-Thesis Carlo B.</a:t>
-            </a:r>
-          </a:p>
-        </p:txBody>
-      </p:sp>
-      <p:pic>
-        <p:nvPicPr>
-          <p:cNvPr id="13" name="Grafik 12" descr="Ein Bild, das Schrift, weiß, Grafiken, Logo enthält.&#10;&#10;KI-generierte Inhalte können fehlerhaft sein.">
-            <a:extLst>
-              <a:ext uri="{FF2B5EF4-FFF2-40B4-BE49-F238E27FC236}">
-                <a16:creationId xmlns:a16="http://schemas.microsoft.com/office/drawing/2014/main" id="{72D0ECA0-4B51-8EA4-E306-704DAAD649E9}"/>
-              </a:ext>
-            </a:extLst>
-          </p:cNvPr>
-          <p:cNvPicPr>
-            <a:picLocks noChangeAspect="1"/>
-          </p:cNvPicPr>
-          <p:nvPr/>
-        </p:nvPicPr>
-        <p:blipFill>
-          <a:blip r:embed="rId4"/>
-          <a:stretch>
-            <a:fillRect/>
-          </a:stretch>
-        </p:blipFill>
-        <p:spPr>
-          <a:xfrm>
-            <a:off x="3985457" y="1714113"/>
-            <a:ext cx="1334345" cy="350548"/>
-          </a:xfrm>
-          <a:prstGeom prst="rect">
-            <a:avLst/>
-          </a:prstGeom>
-        </p:spPr>
-      </p:pic>
-      <p:cxnSp>
-        <p:nvCxnSpPr>
-          <p:cNvPr id="14" name="Gerade Verbindung mit Pfeil 13">
-            <a:extLst>
-              <a:ext uri="{FF2B5EF4-FFF2-40B4-BE49-F238E27FC236}">
-                <a16:creationId xmlns:a16="http://schemas.microsoft.com/office/drawing/2014/main" id="{2EDADFBF-47A6-0F41-0E28-A51A6402AAA4}"/>
-              </a:ext>
-            </a:extLst>
-          </p:cNvPr>
-          <p:cNvCxnSpPr/>
-          <p:nvPr/>
-        </p:nvCxnSpPr>
-        <p:spPr>
-          <a:xfrm flipV="1">
-            <a:off x="3873463" y="1697959"/>
-            <a:ext cx="0" cy="398911"/>
-          </a:xfrm>
-          <a:prstGeom prst="straightConnector1">
-            <a:avLst/>
-          </a:prstGeom>
-          <a:ln w="19050" cap="flat" cmpd="sng" algn="ctr">
+        </p:grpSpPr>
+        <p:pic>
+          <p:nvPicPr>
+            <p:cNvPr id="7" name="Grafik 6">
+              <a:extLst>
+                <a:ext uri="{FF2B5EF4-FFF2-40B4-BE49-F238E27FC236}">
+                  <a16:creationId xmlns:a16="http://schemas.microsoft.com/office/drawing/2014/main" id="{63E439DE-CE97-C2DA-8FFD-D9658E61A04D}"/>
+                </a:ext>
+              </a:extLst>
+            </p:cNvPr>
+            <p:cNvPicPr>
+              <a:picLocks noChangeAspect="1"/>
+            </p:cNvPicPr>
+            <p:nvPr/>
+          </p:nvPicPr>
+          <p:blipFill>
+            <a:blip r:embed="rId2"/>
+            <a:stretch>
+              <a:fillRect/>
+            </a:stretch>
+          </p:blipFill>
+          <p:spPr>
+            <a:xfrm>
+              <a:off x="5148064" y="1126424"/>
+              <a:ext cx="3896654" cy="3603037"/>
+            </a:xfrm>
+            <a:prstGeom prst="rect">
+              <a:avLst/>
+            </a:prstGeom>
+          </p:spPr>
+        </p:pic>
+        <p:sp>
+          <p:nvSpPr>
+            <p:cNvPr id="8" name="Rechteck 7">
+              <a:extLst>
+                <a:ext uri="{FF2B5EF4-FFF2-40B4-BE49-F238E27FC236}">
+                  <a16:creationId xmlns:a16="http://schemas.microsoft.com/office/drawing/2014/main" id="{717CB9E4-4F6A-A723-1A17-D8D4397FABD6}"/>
+                </a:ext>
+              </a:extLst>
+            </p:cNvPr>
+            <p:cNvSpPr/>
+            <p:nvPr/>
+          </p:nvSpPr>
+          <p:spPr>
+            <a:xfrm>
+              <a:off x="5148064" y="1193982"/>
+              <a:ext cx="1448931" cy="1048756"/>
+            </a:xfrm>
+            <a:prstGeom prst="rect">
+              <a:avLst/>
+            </a:prstGeom>
             <a:solidFill>
-              <a:srgbClr val="D40000"/>
+              <a:srgbClr val="FFFFFF"/>
             </a:solidFill>
-            <a:prstDash val="solid"/>
-            <a:round/>
-            <a:headEnd type="none" w="med" len="med"/>
-            <a:tailEnd type="stealth" w="lg" len="lg"/>
-          </a:ln>
-        </p:spPr>
-        <p:style>
-          <a:lnRef idx="0">
-            <a:scrgbClr r="0" g="0" b="0"/>
-          </a:lnRef>
-          <a:fillRef idx="0">
-            <a:scrgbClr r="0" g="0" b="0"/>
-          </a:fillRef>
-          <a:effectRef idx="0">
-            <a:scrgbClr r="0" g="0" b="0"/>
-          </a:effectRef>
-          <a:fontRef idx="minor">
-            <a:schemeClr val="tx1"/>
-          </a:fontRef>
-        </p:style>
-      </p:cxnSp>
-      <p:cxnSp>
-        <p:nvCxnSpPr>
-          <p:cNvPr id="15" name="Gerade Verbindung mit Pfeil 14">
-            <a:extLst>
-              <a:ext uri="{FF2B5EF4-FFF2-40B4-BE49-F238E27FC236}">
-                <a16:creationId xmlns:a16="http://schemas.microsoft.com/office/drawing/2014/main" id="{ADD2401B-6010-BAED-D612-715FAEAE7797}"/>
-              </a:ext>
-            </a:extLst>
-          </p:cNvPr>
-          <p:cNvCxnSpPr/>
-          <p:nvPr/>
-        </p:nvCxnSpPr>
-        <p:spPr>
-          <a:xfrm flipV="1">
-            <a:off x="395536" y="1674103"/>
-            <a:ext cx="0" cy="398911"/>
-          </a:xfrm>
-          <a:prstGeom prst="straightConnector1">
-            <a:avLst/>
-          </a:prstGeom>
-          <a:ln w="19050" cap="flat" cmpd="sng" algn="ctr">
-            <a:solidFill>
-              <a:srgbClr val="D40000"/>
-            </a:solidFill>
-            <a:prstDash val="solid"/>
-            <a:round/>
-            <a:headEnd type="none" w="med" len="med"/>
-            <a:tailEnd type="stealth" w="lg" len="lg"/>
-          </a:ln>
-        </p:spPr>
-        <p:style>
-          <a:lnRef idx="0">
-            <a:scrgbClr r="0" g="0" b="0"/>
-          </a:lnRef>
-          <a:fillRef idx="0">
-            <a:scrgbClr r="0" g="0" b="0"/>
-          </a:fillRef>
-          <a:effectRef idx="0">
-            <a:scrgbClr r="0" g="0" b="0"/>
-          </a:effectRef>
-          <a:fontRef idx="minor">
-            <a:schemeClr val="tx1"/>
-          </a:fontRef>
-        </p:style>
-      </p:cxnSp>
-      <p:cxnSp>
-        <p:nvCxnSpPr>
-          <p:cNvPr id="16" name="Verbinder: gekrümmt 15">
-            <a:extLst>
-              <a:ext uri="{FF2B5EF4-FFF2-40B4-BE49-F238E27FC236}">
-                <a16:creationId xmlns:a16="http://schemas.microsoft.com/office/drawing/2014/main" id="{3A858295-00FB-6350-EBF6-DC8A1ECF8811}"/>
-              </a:ext>
-            </a:extLst>
-          </p:cNvPr>
-          <p:cNvCxnSpPr>
-            <a:cxnSpLocks/>
-          </p:cNvCxnSpPr>
-          <p:nvPr/>
-        </p:nvCxnSpPr>
-        <p:spPr>
-          <a:xfrm rot="5400000">
-            <a:off x="2589023" y="2230513"/>
-            <a:ext cx="288032" cy="209142"/>
-          </a:xfrm>
-          <a:prstGeom prst="curvedConnector3">
-            <a:avLst>
-              <a:gd name="adj1" fmla="val 50000"/>
-            </a:avLst>
-          </a:prstGeom>
-          <a:ln>
-            <a:solidFill>
-              <a:srgbClr val="2E2EFB"/>
-            </a:solidFill>
-            <a:tailEnd type="stealth" w="lg" len="lg"/>
-          </a:ln>
-        </p:spPr>
-        <p:style>
-          <a:lnRef idx="1">
-            <a:schemeClr val="accent1"/>
-          </a:lnRef>
-          <a:fillRef idx="0">
-            <a:schemeClr val="accent1"/>
-          </a:fillRef>
-          <a:effectRef idx="0">
-            <a:schemeClr val="accent1"/>
-          </a:effectRef>
-          <a:fontRef idx="minor">
-            <a:schemeClr val="tx1"/>
-          </a:fontRef>
-        </p:style>
-      </p:cxnSp>
-      <p:cxnSp>
-        <p:nvCxnSpPr>
-          <p:cNvPr id="17" name="Verbinder: gekrümmt 16">
-            <a:extLst>
-              <a:ext uri="{FF2B5EF4-FFF2-40B4-BE49-F238E27FC236}">
-                <a16:creationId xmlns:a16="http://schemas.microsoft.com/office/drawing/2014/main" id="{053D1860-1E1A-1CC6-F8A1-C953B9DC41B6}"/>
-              </a:ext>
-            </a:extLst>
-          </p:cNvPr>
-          <p:cNvCxnSpPr>
-            <a:cxnSpLocks/>
-          </p:cNvCxnSpPr>
-          <p:nvPr/>
-        </p:nvCxnSpPr>
-        <p:spPr>
-          <a:xfrm rot="16200000" flipH="1">
-            <a:off x="251519" y="2228899"/>
-            <a:ext cx="288032" cy="240203"/>
-          </a:xfrm>
-          <a:prstGeom prst="curvedConnector3">
-            <a:avLst>
-              <a:gd name="adj1" fmla="val 50000"/>
-            </a:avLst>
-          </a:prstGeom>
-          <a:ln>
-            <a:solidFill>
-              <a:srgbClr val="2E2EFB"/>
-            </a:solidFill>
-            <a:tailEnd type="stealth" w="lg" len="lg"/>
-          </a:ln>
-        </p:spPr>
-        <p:style>
-          <a:lnRef idx="1">
-            <a:schemeClr val="accent1"/>
-          </a:lnRef>
-          <a:fillRef idx="0">
-            <a:schemeClr val="accent1"/>
-          </a:fillRef>
-          <a:effectRef idx="0">
-            <a:schemeClr val="accent1"/>
-          </a:effectRef>
-          <a:fontRef idx="minor">
-            <a:schemeClr val="tx1"/>
-          </a:fontRef>
-        </p:style>
-      </p:cxnSp>
-      <p:pic>
-        <p:nvPicPr>
-          <p:cNvPr id="20" name="Grafik 19" descr="Ein Bild, das Schrift, weiß, Grafiken, Symbol enthält.&#10;&#10;KI-generierte Inhalte können fehlerhaft sein.">
-            <a:extLst>
-              <a:ext uri="{FF2B5EF4-FFF2-40B4-BE49-F238E27FC236}">
-                <a16:creationId xmlns:a16="http://schemas.microsoft.com/office/drawing/2014/main" id="{17594A4B-16E5-75C9-C18A-DB1B3D7F1632}"/>
-              </a:ext>
-            </a:extLst>
-          </p:cNvPr>
-          <p:cNvPicPr>
-            <a:picLocks noChangeAspect="1"/>
-          </p:cNvPicPr>
-          <p:nvPr/>
-        </p:nvPicPr>
-        <p:blipFill>
-          <a:blip r:embed="rId5"/>
-          <a:stretch>
-            <a:fillRect/>
-          </a:stretch>
-        </p:blipFill>
-        <p:spPr>
-          <a:xfrm>
-            <a:off x="1619672" y="2643758"/>
-            <a:ext cx="834499" cy="328044"/>
-          </a:xfrm>
-          <a:prstGeom prst="rect">
-            <a:avLst/>
-          </a:prstGeom>
-        </p:spPr>
-      </p:pic>
-      <p:sp>
-        <p:nvSpPr>
-          <p:cNvPr id="22" name="Ellipse 21">
-            <a:extLst>
-              <a:ext uri="{FF2B5EF4-FFF2-40B4-BE49-F238E27FC236}">
-                <a16:creationId xmlns:a16="http://schemas.microsoft.com/office/drawing/2014/main" id="{1E82427F-2FFD-E5BC-79B1-4114AB58EC6A}"/>
-              </a:ext>
-            </a:extLst>
-          </p:cNvPr>
-          <p:cNvSpPr/>
-          <p:nvPr/>
-        </p:nvSpPr>
-        <p:spPr>
-          <a:xfrm>
-            <a:off x="3639153" y="4109040"/>
-            <a:ext cx="234310" cy="216024"/>
-          </a:xfrm>
-          <a:prstGeom prst="ellipse">
-            <a:avLst/>
-          </a:prstGeom>
-          <a:noFill/>
-          <a:ln>
-            <a:solidFill>
-              <a:srgbClr val="FF0000"/>
-            </a:solidFill>
-          </a:ln>
-        </p:spPr>
-        <p:style>
-          <a:lnRef idx="2">
-            <a:schemeClr val="accent1">
-              <a:shade val="15000"/>
-            </a:schemeClr>
-          </a:lnRef>
-          <a:fillRef idx="1">
-            <a:schemeClr val="accent1"/>
-          </a:fillRef>
-          <a:effectRef idx="0">
-            <a:schemeClr val="accent1"/>
-          </a:effectRef>
-          <a:fontRef idx="minor">
-            <a:schemeClr val="lt1"/>
-          </a:fontRef>
-        </p:style>
-        <p:txBody>
-          <a:bodyPr rtlCol="0" anchor="ctr"/>
-          <a:lstStyle/>
-          <a:p>
-            <a:pPr algn="ctr"/>
-            <a:endParaRPr lang="de-DE"/>
-          </a:p>
-        </p:txBody>
-      </p:sp>
+            <a:ln>
+              <a:noFill/>
+            </a:ln>
+          </p:spPr>
+          <p:style>
+            <a:lnRef idx="2">
+              <a:schemeClr val="accent1">
+                <a:shade val="15000"/>
+              </a:schemeClr>
+            </a:lnRef>
+            <a:fillRef idx="1">
+              <a:schemeClr val="accent1"/>
+            </a:fillRef>
+            <a:effectRef idx="0">
+              <a:schemeClr val="accent1"/>
+            </a:effectRef>
+            <a:fontRef idx="minor">
+              <a:schemeClr val="lt1"/>
+            </a:fontRef>
+          </p:style>
+          <p:txBody>
+            <a:bodyPr rtlCol="0" anchor="ctr"/>
+            <a:lstStyle/>
+            <a:p>
+              <a:pPr algn="ctr"/>
+              <a:endParaRPr lang="de-DE" dirty="0"/>
+            </a:p>
+          </p:txBody>
+        </p:sp>
+      </p:grpSp>
     </p:spTree>
     <p:extLst>
       <p:ext uri="{BB962C8B-B14F-4D97-AF65-F5344CB8AC3E}">
-        <p14:creationId xmlns:p14="http://schemas.microsoft.com/office/powerpoint/2010/main" val="3511859392"/>
+        <p14:creationId xmlns:p14="http://schemas.microsoft.com/office/powerpoint/2010/main" val="95214738"/>
       </p:ext>
     </p:extLst>
   </p:cSld>

--- a/Hagn_Daniel_Mastervortrag.pptx
+++ b/Hagn_Daniel_Mastervortrag.pptx
@@ -5,10 +5,10 @@
     <p:sldMasterId id="2147483648" r:id="rId1"/>
   </p:sldMasterIdLst>
   <p:notesMasterIdLst>
-    <p:notesMasterId r:id="rId19"/>
+    <p:notesMasterId r:id="rId21"/>
   </p:notesMasterIdLst>
   <p:handoutMasterIdLst>
-    <p:handoutMasterId r:id="rId20"/>
+    <p:handoutMasterId r:id="rId22"/>
   </p:handoutMasterIdLst>
   <p:sldIdLst>
     <p:sldId id="256" r:id="rId2"/>
@@ -16,18 +16,20 @@
     <p:sldId id="307" r:id="rId4"/>
     <p:sldId id="313" r:id="rId5"/>
     <p:sldId id="312" r:id="rId6"/>
-    <p:sldId id="308" r:id="rId7"/>
-    <p:sldId id="311" r:id="rId8"/>
-    <p:sldId id="309" r:id="rId9"/>
-    <p:sldId id="310" r:id="rId10"/>
-    <p:sldId id="288" r:id="rId11"/>
-    <p:sldId id="290" r:id="rId12"/>
-    <p:sldId id="306" r:id="rId13"/>
-    <p:sldId id="268" r:id="rId14"/>
-    <p:sldId id="280" r:id="rId15"/>
-    <p:sldId id="269" r:id="rId16"/>
-    <p:sldId id="295" r:id="rId17"/>
-    <p:sldId id="278" r:id="rId18"/>
+    <p:sldId id="314" r:id="rId7"/>
+    <p:sldId id="308" r:id="rId8"/>
+    <p:sldId id="311" r:id="rId9"/>
+    <p:sldId id="309" r:id="rId10"/>
+    <p:sldId id="315" r:id="rId11"/>
+    <p:sldId id="316" r:id="rId12"/>
+    <p:sldId id="288" r:id="rId13"/>
+    <p:sldId id="290" r:id="rId14"/>
+    <p:sldId id="306" r:id="rId15"/>
+    <p:sldId id="268" r:id="rId16"/>
+    <p:sldId id="280" r:id="rId17"/>
+    <p:sldId id="269" r:id="rId18"/>
+    <p:sldId id="295" r:id="rId19"/>
+    <p:sldId id="278" r:id="rId20"/>
   </p:sldIdLst>
   <p:sldSz cx="9144000" cy="5143500" type="screen16x9"/>
   <p:notesSz cx="6858000" cy="9144000"/>
@@ -317,7 +319,7 @@
               <a:pPr>
                 <a:defRPr/>
               </a:pPr>
-              <a:t>18. Oktober 2026</a:t>
+              <a:t>26. Oktober 2026</a:t>
             </a:fld>
             <a:endParaRPr lang="de-DE"/>
           </a:p>
@@ -946,7 +948,7 @@
               <a:pPr>
                 <a:defRPr/>
               </a:pPr>
-              <a:t>18. Oktober 2026</a:t>
+              <a:t>26. Oktober 2026</a:t>
             </a:fld>
             <a:endParaRPr lang="de-DE"/>
           </a:p>
@@ -1966,7 +1968,7 @@
               <a:pPr>
                 <a:defRPr/>
               </a:pPr>
-              <a:t>18. Oktober 2026</a:t>
+              <a:t>26. Oktober 2026</a:t>
             </a:fld>
             <a:endParaRPr lang="de-DE"/>
           </a:p>
@@ -2359,7 +2361,7 @@
               <a:pPr>
                 <a:defRPr/>
               </a:pPr>
-              <a:t>18. Oktober 2026</a:t>
+              <a:t>26. Oktober 2026</a:t>
             </a:fld>
             <a:endParaRPr lang="de-DE"/>
           </a:p>
@@ -2623,7 +2625,7 @@
               <a:pPr>
                 <a:defRPr/>
               </a:pPr>
-              <a:t>18. Oktober 2026</a:t>
+              <a:t>26. Oktober 2026</a:t>
             </a:fld>
             <a:endParaRPr lang="de-DE"/>
           </a:p>
@@ -2676,7 +2678,7 @@
             <a:fld id="{E526A819-9FA5-480B-AA80-B0EE2CE4290D}" type="slidenum">
               <a:rPr lang="de-DE" altLang="de-DE" smtClean="0"/>
               <a:pPr/>
-              <a:t>10</a:t>
+              <a:t>12</a:t>
             </a:fld>
             <a:endParaRPr lang="de-DE" altLang="de-DE"/>
           </a:p>
@@ -2858,7 +2860,7 @@
               <a:pPr>
                 <a:defRPr/>
               </a:pPr>
-              <a:t>18. Oktober 2026</a:t>
+              <a:t>26. Oktober 2026</a:t>
             </a:fld>
             <a:endParaRPr lang="de-DE"/>
           </a:p>
@@ -2911,7 +2913,7 @@
             <a:fld id="{E526A819-9FA5-480B-AA80-B0EE2CE4290D}" type="slidenum">
               <a:rPr lang="de-DE" altLang="de-DE" smtClean="0"/>
               <a:pPr/>
-              <a:t>11</a:t>
+              <a:t>13</a:t>
             </a:fld>
             <a:endParaRPr lang="de-DE" altLang="de-DE"/>
           </a:p>
@@ -3001,7 +3003,7 @@
               <a:pPr>
                 <a:defRPr/>
               </a:pPr>
-              <a:t>18. Oktober 2026</a:t>
+              <a:t>26. Oktober 2026</a:t>
             </a:fld>
             <a:endParaRPr lang="de-DE"/>
           </a:p>
@@ -3054,7 +3056,7 @@
             <a:fld id="{E526A819-9FA5-480B-AA80-B0EE2CE4290D}" type="slidenum">
               <a:rPr lang="de-DE" altLang="de-DE" smtClean="0"/>
               <a:pPr/>
-              <a:t>14</a:t>
+              <a:t>16</a:t>
             </a:fld>
             <a:endParaRPr lang="de-DE" altLang="de-DE"/>
           </a:p>
@@ -3272,7 +3274,7 @@
               <a:pPr>
                 <a:defRPr/>
               </a:pPr>
-              <a:t>18. Oktober 2026</a:t>
+              <a:t>26. Oktober 2026</a:t>
             </a:fld>
             <a:endParaRPr lang="de-DE"/>
           </a:p>
@@ -3325,7 +3327,7 @@
             <a:fld id="{E526A819-9FA5-480B-AA80-B0EE2CE4290D}" type="slidenum">
               <a:rPr lang="de-DE" altLang="de-DE" smtClean="0"/>
               <a:pPr/>
-              <a:t>15</a:t>
+              <a:t>17</a:t>
             </a:fld>
             <a:endParaRPr lang="de-DE" altLang="de-DE"/>
           </a:p>
@@ -6776,8 +6778,8 @@
           </a:p>
         </p:txBody>
       </p:sp>
-      <mc:AlternateContent xmlns:mc="http://schemas.openxmlformats.org/markup-compatibility/2006">
-        <mc:Choice xmlns:a14="http://schemas.microsoft.com/office/drawing/2010/main" Requires="a14">
+      <mc:AlternateContent xmlns:mc="http://schemas.openxmlformats.org/markup-compatibility/2006" xmlns:a14="http://schemas.microsoft.com/office/drawing/2010/main">
+        <mc:Choice Requires="a14">
           <p:sp>
             <p:nvSpPr>
               <p:cNvPr id="5" name="Titel 4">
@@ -6849,7 +6851,7 @@
             </p:txBody>
           </p:sp>
         </mc:Choice>
-        <mc:Fallback>
+        <mc:Fallback xmlns="">
           <p:sp>
             <p:nvSpPr>
               <p:cNvPr id="5" name="Titel 4">
@@ -7184,6 +7186,291 @@
         <p:cNvPr id="1" name="">
           <a:extLst>
             <a:ext uri="{FF2B5EF4-FFF2-40B4-BE49-F238E27FC236}">
+              <a16:creationId xmlns:a16="http://schemas.microsoft.com/office/drawing/2014/main" id="{481177EE-D61C-60B2-07F3-28823386C128}"/>
+            </a:ext>
+          </a:extLst>
+        </p:cNvPr>
+        <p:cNvGrpSpPr/>
+        <p:nvPr/>
+      </p:nvGrpSpPr>
+      <p:grpSpPr>
+        <a:xfrm>
+          <a:off x="0" y="0"/>
+          <a:ext cx="0" cy="0"/>
+          <a:chOff x="0" y="0"/>
+          <a:chExt cx="0" cy="0"/>
+        </a:xfrm>
+      </p:grpSpPr>
+      <p:sp>
+        <p:nvSpPr>
+          <p:cNvPr id="2" name="Titel 1">
+            <a:extLst>
+              <a:ext uri="{FF2B5EF4-FFF2-40B4-BE49-F238E27FC236}">
+                <a16:creationId xmlns:a16="http://schemas.microsoft.com/office/drawing/2014/main" id="{64CC5C4F-A7E8-A211-0040-29831CCA252C}"/>
+              </a:ext>
+            </a:extLst>
+          </p:cNvPr>
+          <p:cNvSpPr>
+            <a:spLocks noGrp="1"/>
+          </p:cNvSpPr>
+          <p:nvPr>
+            <p:ph type="title"/>
+          </p:nvPr>
+        </p:nvSpPr>
+        <p:spPr/>
+        <p:txBody>
+          <a:bodyPr/>
+          <a:lstStyle/>
+          <a:p>
+            <a:r>
+              <a:rPr lang="de-DE" dirty="0" err="1"/>
+              <a:t>Beating</a:t>
+            </a:r>
+            <a:endParaRPr lang="de-DE" dirty="0"/>
+          </a:p>
+        </p:txBody>
+      </p:sp>
+      <p:sp>
+        <p:nvSpPr>
+          <p:cNvPr id="3" name="Inhaltsplatzhalter 2">
+            <a:extLst>
+              <a:ext uri="{FF2B5EF4-FFF2-40B4-BE49-F238E27FC236}">
+                <a16:creationId xmlns:a16="http://schemas.microsoft.com/office/drawing/2014/main" id="{CD6CDA77-C91D-7D2C-7C8B-3C9A6E22E14C}"/>
+              </a:ext>
+            </a:extLst>
+          </p:cNvPr>
+          <p:cNvSpPr>
+            <a:spLocks noGrp="1"/>
+          </p:cNvSpPr>
+          <p:nvPr>
+            <p:ph idx="11"/>
+          </p:nvPr>
+        </p:nvSpPr>
+        <p:spPr/>
+        <p:txBody>
+          <a:bodyPr/>
+          <a:lstStyle/>
+          <a:p>
+            <a:r>
+              <a:rPr lang="de-DE" dirty="0"/>
+              <a:t>Pulse Area</a:t>
+            </a:r>
+          </a:p>
+          <a:p>
+            <a:r>
+              <a:rPr lang="de-DE" dirty="0" err="1"/>
+              <a:t>Spatial</a:t>
+            </a:r>
+            <a:r>
+              <a:rPr lang="de-DE" dirty="0"/>
+              <a:t> </a:t>
+            </a:r>
+            <a:r>
+              <a:rPr lang="de-DE" dirty="0" err="1"/>
+              <a:t>uniformity</a:t>
+            </a:r>
+            <a:endParaRPr lang="de-DE" dirty="0"/>
+          </a:p>
+          <a:p>
+            <a:endParaRPr lang="de-DE" dirty="0"/>
+          </a:p>
+          <a:p>
+            <a:r>
+              <a:rPr lang="de-DE" dirty="0"/>
+              <a:t>Beam </a:t>
+            </a:r>
+            <a:r>
+              <a:rPr lang="de-DE" dirty="0" err="1"/>
+              <a:t>Pointing</a:t>
+            </a:r>
+            <a:r>
+              <a:rPr lang="de-DE" dirty="0"/>
+              <a:t> relevant</a:t>
+            </a:r>
+          </a:p>
+        </p:txBody>
+      </p:sp>
+      <p:pic>
+        <p:nvPicPr>
+          <p:cNvPr id="5" name="Grafik 4">
+            <a:extLst>
+              <a:ext uri="{FF2B5EF4-FFF2-40B4-BE49-F238E27FC236}">
+                <a16:creationId xmlns:a16="http://schemas.microsoft.com/office/drawing/2014/main" id="{5B9CE04D-C059-04E3-791F-7DC89BC88C77}"/>
+              </a:ext>
+            </a:extLst>
+          </p:cNvPr>
+          <p:cNvPicPr>
+            <a:picLocks noChangeAspect="1"/>
+          </p:cNvPicPr>
+          <p:nvPr/>
+        </p:nvPicPr>
+        <p:blipFill>
+          <a:blip r:embed="rId2"/>
+          <a:stretch>
+            <a:fillRect/>
+          </a:stretch>
+        </p:blipFill>
+        <p:spPr>
+          <a:xfrm>
+            <a:off x="5436096" y="1491630"/>
+            <a:ext cx="3320487" cy="2507406"/>
+          </a:xfrm>
+          <a:prstGeom prst="rect">
+            <a:avLst/>
+          </a:prstGeom>
+        </p:spPr>
+      </p:pic>
+    </p:spTree>
+    <p:extLst>
+      <p:ext uri="{BB962C8B-B14F-4D97-AF65-F5344CB8AC3E}">
+        <p14:creationId xmlns:p14="http://schemas.microsoft.com/office/powerpoint/2010/main" val="2499901475"/>
+      </p:ext>
+    </p:extLst>
+  </p:cSld>
+  <p:clrMapOvr>
+    <a:masterClrMapping/>
+  </p:clrMapOvr>
+</p:sld>
+</file>
+
+<file path=ppt/slides/slide11.xml><?xml version="1.0" encoding="utf-8"?>
+<p:sld xmlns:a="http://schemas.openxmlformats.org/drawingml/2006/main" xmlns:r="http://schemas.openxmlformats.org/officeDocument/2006/relationships" xmlns:p="http://schemas.openxmlformats.org/presentationml/2006/main">
+  <p:cSld>
+    <p:spTree>
+      <p:nvGrpSpPr>
+        <p:cNvPr id="1" name=""/>
+        <p:cNvGrpSpPr/>
+        <p:nvPr/>
+      </p:nvGrpSpPr>
+      <p:grpSpPr>
+        <a:xfrm>
+          <a:off x="0" y="0"/>
+          <a:ext cx="0" cy="0"/>
+          <a:chOff x="0" y="0"/>
+          <a:chExt cx="0" cy="0"/>
+        </a:xfrm>
+      </p:grpSpPr>
+      <p:sp>
+        <p:nvSpPr>
+          <p:cNvPr id="2" name="Titel 1">
+            <a:extLst>
+              <a:ext uri="{FF2B5EF4-FFF2-40B4-BE49-F238E27FC236}">
+                <a16:creationId xmlns:a16="http://schemas.microsoft.com/office/drawing/2014/main" id="{E52DAC5A-548E-5DD1-F119-13C0A4625573}"/>
+              </a:ext>
+            </a:extLst>
+          </p:cNvPr>
+          <p:cNvSpPr>
+            <a:spLocks noGrp="1"/>
+          </p:cNvSpPr>
+          <p:nvPr>
+            <p:ph type="title"/>
+          </p:nvPr>
+        </p:nvSpPr>
+        <p:spPr/>
+        <p:txBody>
+          <a:bodyPr/>
+          <a:lstStyle/>
+          <a:p>
+            <a:r>
+              <a:rPr lang="de-DE" dirty="0" err="1"/>
+              <a:t>Planning</a:t>
+            </a:r>
+            <a:r>
+              <a:rPr lang="de-DE" dirty="0"/>
+              <a:t> of an </a:t>
+            </a:r>
+            <a:r>
+              <a:rPr lang="de-DE" dirty="0" err="1"/>
+              <a:t>optical</a:t>
+            </a:r>
+            <a:r>
+              <a:rPr lang="de-DE" dirty="0"/>
+              <a:t> </a:t>
+            </a:r>
+            <a:r>
+              <a:rPr lang="de-DE" dirty="0" err="1"/>
+              <a:t>setup</a:t>
+            </a:r>
+            <a:endParaRPr lang="de-DE" dirty="0"/>
+          </a:p>
+        </p:txBody>
+      </p:sp>
+      <p:pic>
+        <p:nvPicPr>
+          <p:cNvPr id="6" name="Inhaltsplatzhalter 5">
+            <a:extLst>
+              <a:ext uri="{FF2B5EF4-FFF2-40B4-BE49-F238E27FC236}">
+                <a16:creationId xmlns:a16="http://schemas.microsoft.com/office/drawing/2014/main" id="{FBBD5F57-0D7C-F951-D11F-16082FE3FEDF}"/>
+              </a:ext>
+            </a:extLst>
+          </p:cNvPr>
+          <p:cNvPicPr>
+            <a:picLocks noGrp="1" noChangeAspect="1"/>
+          </p:cNvPicPr>
+          <p:nvPr>
+            <p:ph idx="11"/>
+          </p:nvPr>
+        </p:nvPicPr>
+        <p:blipFill>
+          <a:blip r:embed="rId2"/>
+          <a:stretch>
+            <a:fillRect/>
+          </a:stretch>
+        </p:blipFill>
+        <p:spPr bwMode="auto">
+          <a:xfrm>
+            <a:off x="4751812" y="1131590"/>
+            <a:ext cx="4356691" cy="3645198"/>
+          </a:xfrm>
+          <a:prstGeom prst="rect">
+            <a:avLst/>
+          </a:prstGeom>
+          <a:noFill/>
+          <a:ln>
+            <a:noFill/>
+          </a:ln>
+          <a:extLst>
+            <a:ext uri="{909E8E84-426E-40DD-AFC4-6F175D3DCCD1}">
+              <a14:hiddenFill xmlns:a14="http://schemas.microsoft.com/office/drawing/2010/main">
+                <a:solidFill>
+                  <a:srgbClr val="FFFFFF"/>
+                </a:solidFill>
+              </a14:hiddenFill>
+            </a:ext>
+            <a:ext uri="{91240B29-F687-4F45-9708-019B960494DF}">
+              <a14:hiddenLine xmlns:a14="http://schemas.microsoft.com/office/drawing/2010/main" w="9525">
+                <a:solidFill>
+                  <a:srgbClr val="000000"/>
+                </a:solidFill>
+                <a:miter lim="800000"/>
+                <a:headEnd/>
+                <a:tailEnd/>
+              </a14:hiddenLine>
+            </a:ext>
+          </a:extLst>
+        </p:spPr>
+      </p:pic>
+    </p:spTree>
+    <p:extLst>
+      <p:ext uri="{BB962C8B-B14F-4D97-AF65-F5344CB8AC3E}">
+        <p14:creationId xmlns:p14="http://schemas.microsoft.com/office/powerpoint/2010/main" val="220907456"/>
+      </p:ext>
+    </p:extLst>
+  </p:cSld>
+  <p:clrMapOvr>
+    <a:masterClrMapping/>
+  </p:clrMapOvr>
+</p:sld>
+</file>
+
+<file path=ppt/slides/slide12.xml><?xml version="1.0" encoding="utf-8"?>
+<p:sld xmlns:a="http://schemas.openxmlformats.org/drawingml/2006/main" xmlns:r="http://schemas.openxmlformats.org/officeDocument/2006/relationships" xmlns:p="http://schemas.openxmlformats.org/presentationml/2006/main">
+  <p:cSld>
+    <p:spTree>
+      <p:nvGrpSpPr>
+        <p:cNvPr id="1" name="">
+          <a:extLst>
+            <a:ext uri="{FF2B5EF4-FFF2-40B4-BE49-F238E27FC236}">
               <a16:creationId xmlns:a16="http://schemas.microsoft.com/office/drawing/2014/main" id="{9765CFBB-BD42-7221-DBFE-1EB6F3AA719A}"/>
             </a:ext>
           </a:extLst>
@@ -7408,7 +7695,7 @@
 </p:sld>
 </file>
 
-<file path=ppt/slides/slide11.xml><?xml version="1.0" encoding="utf-8"?>
+<file path=ppt/slides/slide13.xml><?xml version="1.0" encoding="utf-8"?>
 <p:sld xmlns:a="http://schemas.openxmlformats.org/drawingml/2006/main" xmlns:r="http://schemas.openxmlformats.org/officeDocument/2006/relationships" xmlns:p="http://schemas.openxmlformats.org/presentationml/2006/main">
   <p:cSld>
     <p:spTree>
@@ -7541,7 +7828,7 @@
 </p:sld>
 </file>
 
-<file path=ppt/slides/slide12.xml><?xml version="1.0" encoding="utf-8"?>
+<file path=ppt/slides/slide14.xml><?xml version="1.0" encoding="utf-8"?>
 <p:sld xmlns:a="http://schemas.openxmlformats.org/drawingml/2006/main" xmlns:r="http://schemas.openxmlformats.org/officeDocument/2006/relationships" xmlns:p="http://schemas.openxmlformats.org/presentationml/2006/main">
   <p:cSld>
     <p:spTree>
@@ -7798,7 +8085,7 @@
 </p:sld>
 </file>
 
-<file path=ppt/slides/slide13.xml><?xml version="1.0" encoding="utf-8"?>
+<file path=ppt/slides/slide15.xml><?xml version="1.0" encoding="utf-8"?>
 <p:sld xmlns:a="http://schemas.openxmlformats.org/drawingml/2006/main" xmlns:r="http://schemas.openxmlformats.org/officeDocument/2006/relationships" xmlns:p="http://schemas.openxmlformats.org/presentationml/2006/main">
   <p:cSld>
     <p:spTree>
@@ -7919,7 +8206,7 @@
 </p:sld>
 </file>
 
-<file path=ppt/slides/slide14.xml><?xml version="1.0" encoding="utf-8"?>
+<file path=ppt/slides/slide16.xml><?xml version="1.0" encoding="utf-8"?>
 <p:sld xmlns:a="http://schemas.openxmlformats.org/drawingml/2006/main" xmlns:r="http://schemas.openxmlformats.org/officeDocument/2006/relationships" xmlns:p="http://schemas.openxmlformats.org/presentationml/2006/main">
   <p:cSld>
     <p:spTree>
@@ -8093,7 +8380,7 @@
 </p:sld>
 </file>
 
-<file path=ppt/slides/slide15.xml><?xml version="1.0" encoding="utf-8"?>
+<file path=ppt/slides/slide17.xml><?xml version="1.0" encoding="utf-8"?>
 <p:sld xmlns:a="http://schemas.openxmlformats.org/drawingml/2006/main" xmlns:r="http://schemas.openxmlformats.org/officeDocument/2006/relationships" xmlns:p="http://schemas.openxmlformats.org/presentationml/2006/main">
   <p:cSld>
     <p:spTree>
@@ -8710,7 +8997,7 @@
 </p:sld>
 </file>
 
-<file path=ppt/slides/slide16.xml><?xml version="1.0" encoding="utf-8"?>
+<file path=ppt/slides/slide18.xml><?xml version="1.0" encoding="utf-8"?>
 <p:sld xmlns:a="http://schemas.openxmlformats.org/drawingml/2006/main" xmlns:r="http://schemas.openxmlformats.org/officeDocument/2006/relationships" xmlns:p="http://schemas.openxmlformats.org/presentationml/2006/main">
   <p:cSld>
     <p:spTree>
@@ -9361,7 +9648,7 @@
 </p:sld>
 </file>
 
-<file path=ppt/slides/slide17.xml><?xml version="1.0" encoding="utf-8"?>
+<file path=ppt/slides/slide19.xml><?xml version="1.0" encoding="utf-8"?>
 <p:sld xmlns:a="http://schemas.openxmlformats.org/drawingml/2006/main" xmlns:r="http://schemas.openxmlformats.org/officeDocument/2006/relationships" xmlns:p="http://schemas.openxmlformats.org/presentationml/2006/main">
   <p:cSld>
     <p:spTree>
@@ -10227,7 +10514,29 @@
           <a:bodyPr/>
           <a:lstStyle/>
           <a:p>
-            <a:endParaRPr lang="de-DE"/>
+            <a:r>
+              <a:rPr lang="de-DE" dirty="0"/>
+              <a:t>Fourier </a:t>
+            </a:r>
+            <a:r>
+              <a:rPr lang="de-DE" dirty="0" err="1"/>
+              <a:t>transform</a:t>
+            </a:r>
+            <a:r>
+              <a:rPr lang="de-DE" dirty="0"/>
+              <a:t> in the </a:t>
+            </a:r>
+            <a:r>
+              <a:rPr lang="de-DE" dirty="0" err="1"/>
+              <a:t>focal</a:t>
+            </a:r>
+            <a:r>
+              <a:rPr lang="de-DE" dirty="0"/>
+              <a:t> plane</a:t>
+            </a:r>
+          </a:p>
+          <a:p>
+            <a:endParaRPr lang="de-DE" dirty="0"/>
           </a:p>
         </p:txBody>
       </p:sp>
@@ -10253,7 +10562,7 @@
         </p:blipFill>
         <p:spPr>
           <a:xfrm>
-            <a:off x="3317059" y="1275606"/>
+            <a:off x="3318037" y="2639060"/>
             <a:ext cx="5646451" cy="1892083"/>
           </a:xfrm>
           <a:prstGeom prst="rect">
@@ -10346,7 +10655,26 @@
           <a:bodyPr/>
           <a:lstStyle/>
           <a:p>
-            <a:endParaRPr lang="de-DE"/>
+            <a:r>
+              <a:rPr lang="de-DE" dirty="0"/>
+              <a:t>Two AODs</a:t>
+            </a:r>
+          </a:p>
+          <a:p>
+            <a:r>
+              <a:rPr lang="de-DE" dirty="0"/>
+              <a:t>Scanning Range</a:t>
+            </a:r>
+          </a:p>
+          <a:p>
+            <a:r>
+              <a:rPr lang="de-DE" dirty="0" err="1"/>
+              <a:t>Waist</a:t>
+            </a:r>
+            <a:endParaRPr lang="de-DE" dirty="0"/>
+          </a:p>
+          <a:p>
+            <a:endParaRPr lang="de-DE" dirty="0"/>
           </a:p>
         </p:txBody>
       </p:sp>
@@ -10372,8 +10700,8 @@
         </p:blipFill>
         <p:spPr>
           <a:xfrm>
-            <a:off x="4139952" y="1419622"/>
-            <a:ext cx="4427984" cy="1597563"/>
+            <a:off x="4056764" y="1419622"/>
+            <a:ext cx="5087236" cy="1835413"/>
           </a:xfrm>
           <a:prstGeom prst="rect">
             <a:avLst/>
@@ -10459,7 +10787,11 @@
           <a:bodyPr/>
           <a:lstStyle/>
           <a:p>
-            <a:endParaRPr lang="de-DE"/>
+            <a:r>
+              <a:rPr lang="de-DE" dirty="0" err="1"/>
+              <a:t>Distortions</a:t>
+            </a:r>
+            <a:endParaRPr lang="de-DE" dirty="0"/>
           </a:p>
         </p:txBody>
       </p:sp>
@@ -10485,8 +10817,8 @@
         </p:blipFill>
         <p:spPr>
           <a:xfrm>
-            <a:off x="3491880" y="1451029"/>
-            <a:ext cx="5364088" cy="2828846"/>
+            <a:off x="2742753" y="1169323"/>
+            <a:ext cx="6401247" cy="3375810"/>
           </a:xfrm>
           <a:prstGeom prst="rect">
             <a:avLst/>
@@ -10528,7 +10860,7 @@
           <p:cNvPr id="2" name="Titel 1">
             <a:extLst>
               <a:ext uri="{FF2B5EF4-FFF2-40B4-BE49-F238E27FC236}">
-                <a16:creationId xmlns:a16="http://schemas.microsoft.com/office/drawing/2014/main" id="{171267E7-11EA-9207-277F-3345318F1EE5}"/>
+                <a16:creationId xmlns:a16="http://schemas.microsoft.com/office/drawing/2014/main" id="{4DB59768-01DF-663D-FF18-E2AD235586EF}"/>
               </a:ext>
             </a:extLst>
           </p:cNvPr>
@@ -10546,54 +10878,26 @@
           <a:p>
             <a:r>
               <a:rPr lang="de-DE" dirty="0"/>
-              <a:t>Multi-tone </a:t>
-            </a:r>
-            <a:r>
-              <a:rPr lang="de-DE" dirty="0" err="1"/>
-              <a:t>simulation</a:t>
-            </a:r>
-            <a:endParaRPr lang="de-DE" dirty="0"/>
+              <a:t>Beam Shaper</a:t>
+            </a:r>
           </a:p>
         </p:txBody>
       </p:sp>
-      <p:sp>
-        <p:nvSpPr>
-          <p:cNvPr id="3" name="Inhaltsplatzhalter 2">
+      <p:pic>
+        <p:nvPicPr>
+          <p:cNvPr id="5" name="Inhaltsplatzhalter 4">
             <a:extLst>
               <a:ext uri="{FF2B5EF4-FFF2-40B4-BE49-F238E27FC236}">
-                <a16:creationId xmlns:a16="http://schemas.microsoft.com/office/drawing/2014/main" id="{23C3161E-BBD7-6F87-1030-C4FF0B80C64E}"/>
+                <a16:creationId xmlns:a16="http://schemas.microsoft.com/office/drawing/2014/main" id="{960021E4-B92C-77AD-AE2A-0539ED969EB9}"/>
               </a:ext>
             </a:extLst>
           </p:cNvPr>
-          <p:cNvSpPr>
-            <a:spLocks noGrp="1"/>
-          </p:cNvSpPr>
+          <p:cNvPicPr>
+            <a:picLocks noGrp="1" noChangeAspect="1"/>
+          </p:cNvPicPr>
           <p:nvPr>
             <p:ph idx="11"/>
           </p:nvPr>
-        </p:nvSpPr>
-        <p:spPr/>
-        <p:txBody>
-          <a:bodyPr/>
-          <a:lstStyle/>
-          <a:p>
-            <a:endParaRPr lang="de-DE"/>
-          </a:p>
-        </p:txBody>
-      </p:sp>
-      <p:pic>
-        <p:nvPicPr>
-          <p:cNvPr id="5" name="Grafik 4">
-            <a:extLst>
-              <a:ext uri="{FF2B5EF4-FFF2-40B4-BE49-F238E27FC236}">
-                <a16:creationId xmlns:a16="http://schemas.microsoft.com/office/drawing/2014/main" id="{4C46F616-1848-0820-AA16-34DAA81FCE23}"/>
-              </a:ext>
-            </a:extLst>
-          </p:cNvPr>
-          <p:cNvPicPr>
-            <a:picLocks noChangeAspect="1"/>
-          </p:cNvPicPr>
-          <p:nvPr/>
         </p:nvPicPr>
         <p:blipFill>
           <a:blip r:embed="rId2"/>
@@ -10603,8 +10907,8 @@
         </p:blipFill>
         <p:spPr>
           <a:xfrm>
-            <a:off x="2555428" y="2817902"/>
-            <a:ext cx="6444208" cy="1874778"/>
+            <a:off x="1025904" y="1275606"/>
+            <a:ext cx="7068031" cy="3359150"/>
           </a:xfrm>
           <a:prstGeom prst="rect">
             <a:avLst/>
@@ -10614,7 +10918,7 @@
     </p:spTree>
     <p:extLst>
       <p:ext uri="{BB962C8B-B14F-4D97-AF65-F5344CB8AC3E}">
-        <p14:creationId xmlns:p14="http://schemas.microsoft.com/office/powerpoint/2010/main" val="1067637087"/>
+        <p14:creationId xmlns:p14="http://schemas.microsoft.com/office/powerpoint/2010/main" val="918296494"/>
       </p:ext>
     </p:extLst>
   </p:cSld>
@@ -10646,7 +10950,7 @@
           <p:cNvPr id="2" name="Titel 1">
             <a:extLst>
               <a:ext uri="{FF2B5EF4-FFF2-40B4-BE49-F238E27FC236}">
-                <a16:creationId xmlns:a16="http://schemas.microsoft.com/office/drawing/2014/main" id="{077BC84D-A2B7-CB21-35DE-267A8CFA0EC1}"/>
+                <a16:creationId xmlns:a16="http://schemas.microsoft.com/office/drawing/2014/main" id="{171267E7-11EA-9207-277F-3345318F1EE5}"/>
               </a:ext>
             </a:extLst>
           </p:cNvPr>
@@ -10664,11 +10968,11 @@
           <a:p>
             <a:r>
               <a:rPr lang="de-DE" dirty="0"/>
-              <a:t>Single Airy </a:t>
+              <a:t>Multi-tone </a:t>
             </a:r>
             <a:r>
               <a:rPr lang="de-DE" dirty="0" err="1"/>
-              <a:t>spot</a:t>
+              <a:t>simulation</a:t>
             </a:r>
             <a:endParaRPr lang="de-DE" dirty="0"/>
           </a:p>
@@ -10679,7 +10983,7 @@
           <p:cNvPr id="3" name="Inhaltsplatzhalter 2">
             <a:extLst>
               <a:ext uri="{FF2B5EF4-FFF2-40B4-BE49-F238E27FC236}">
-                <a16:creationId xmlns:a16="http://schemas.microsoft.com/office/drawing/2014/main" id="{65BD8CA9-6FD4-9FEF-8479-DF393D70483F}"/>
+                <a16:creationId xmlns:a16="http://schemas.microsoft.com/office/drawing/2014/main" id="{23C3161E-BBD7-6F87-1030-C4FF0B80C64E}"/>
               </a:ext>
             </a:extLst>
           </p:cNvPr>
@@ -10695,217 +10999,156 @@
           <a:bodyPr/>
           <a:lstStyle/>
           <a:p>
+            <a:r>
+              <a:rPr lang="de-DE" dirty="0"/>
+              <a:t>Lenses</a:t>
+            </a:r>
+          </a:p>
+          <a:p>
+            <a:r>
+              <a:rPr lang="de-DE" dirty="0"/>
+              <a:t>Tones</a:t>
+            </a:r>
+          </a:p>
+          <a:p>
+            <a:r>
+              <a:rPr lang="de-DE" dirty="0" err="1"/>
+              <a:t>Waist</a:t>
+            </a:r>
             <a:endParaRPr lang="de-DE" dirty="0"/>
           </a:p>
+          <a:p>
+            <a:r>
+              <a:rPr lang="de-DE" dirty="0"/>
+              <a:t>Width</a:t>
+            </a:r>
+          </a:p>
         </p:txBody>
       </p:sp>
-      <p:grpSp>
-        <p:nvGrpSpPr>
-          <p:cNvPr id="14" name="Gruppieren 13">
+      <p:pic>
+        <p:nvPicPr>
+          <p:cNvPr id="5" name="Grafik 4">
             <a:extLst>
               <a:ext uri="{FF2B5EF4-FFF2-40B4-BE49-F238E27FC236}">
-                <a16:creationId xmlns:a16="http://schemas.microsoft.com/office/drawing/2014/main" id="{4CCC950C-3D3B-D683-1EAF-F833AD14B5B4}"/>
+                <a16:creationId xmlns:a16="http://schemas.microsoft.com/office/drawing/2014/main" id="{DA0969A2-5C22-462D-7C18-2E1B83367E76}"/>
               </a:ext>
             </a:extLst>
           </p:cNvPr>
-          <p:cNvGrpSpPr/>
+          <p:cNvPicPr>
+            <a:picLocks noChangeAspect="1"/>
+          </p:cNvPicPr>
           <p:nvPr/>
-        </p:nvGrpSpPr>
-        <p:grpSpPr>
+        </p:nvPicPr>
+        <p:blipFill>
+          <a:blip r:embed="rId2"/>
+          <a:stretch>
+            <a:fillRect/>
+          </a:stretch>
+        </p:blipFill>
+        <p:spPr>
           <a:xfrm>
-            <a:off x="3203848" y="2657005"/>
-            <a:ext cx="4968552" cy="1766927"/>
-            <a:chOff x="2560266" y="922572"/>
-            <a:chExt cx="4968552" cy="1766927"/>
+            <a:off x="3779912" y="1185474"/>
+            <a:ext cx="5087236" cy="1835413"/>
           </a:xfrm>
-        </p:grpSpPr>
-        <p:pic>
-          <p:nvPicPr>
-            <p:cNvPr id="8" name="Grafik 7">
-              <a:extLst>
-                <a:ext uri="{FF2B5EF4-FFF2-40B4-BE49-F238E27FC236}">
-                  <a16:creationId xmlns:a16="http://schemas.microsoft.com/office/drawing/2014/main" id="{0CC59B09-899F-D702-F6FE-928E7B282815}"/>
-                </a:ext>
-              </a:extLst>
-            </p:cNvPr>
-            <p:cNvPicPr>
-              <a:picLocks noChangeAspect="1"/>
-            </p:cNvPicPr>
-            <p:nvPr/>
-          </p:nvPicPr>
-          <p:blipFill>
-            <a:blip r:embed="rId2"/>
-            <a:stretch>
-              <a:fillRect/>
-            </a:stretch>
-          </p:blipFill>
-          <p:spPr>
-            <a:xfrm>
-              <a:off x="2560266" y="957387"/>
-              <a:ext cx="4968552" cy="1732112"/>
-            </a:xfrm>
-            <a:prstGeom prst="rect">
-              <a:avLst/>
-            </a:prstGeom>
-          </p:spPr>
-        </p:pic>
-        <p:sp>
-          <p:nvSpPr>
-            <p:cNvPr id="6" name="Rechteck 5">
-              <a:extLst>
-                <a:ext uri="{FF2B5EF4-FFF2-40B4-BE49-F238E27FC236}">
-                  <a16:creationId xmlns:a16="http://schemas.microsoft.com/office/drawing/2014/main" id="{BE2698D9-0C96-B648-9382-1BBDF8196DC5}"/>
-                </a:ext>
-              </a:extLst>
-            </p:cNvPr>
-            <p:cNvSpPr/>
-            <p:nvPr/>
-          </p:nvSpPr>
-          <p:spPr>
-            <a:xfrm>
-              <a:off x="4932040" y="926257"/>
-              <a:ext cx="288032" cy="53884"/>
-            </a:xfrm>
-            <a:prstGeom prst="rect">
-              <a:avLst/>
-            </a:prstGeom>
-            <a:solidFill>
-              <a:srgbClr val="FFFFFF"/>
-            </a:solidFill>
-            <a:ln>
-              <a:noFill/>
-            </a:ln>
-          </p:spPr>
-          <p:style>
-            <a:lnRef idx="2">
-              <a:schemeClr val="accent1">
-                <a:shade val="15000"/>
-              </a:schemeClr>
-            </a:lnRef>
-            <a:fillRef idx="1">
-              <a:schemeClr val="accent1"/>
-            </a:fillRef>
-            <a:effectRef idx="0">
-              <a:schemeClr val="accent1"/>
-            </a:effectRef>
-            <a:fontRef idx="minor">
-              <a:schemeClr val="lt1"/>
-            </a:fontRef>
-          </p:style>
-          <p:txBody>
-            <a:bodyPr rtlCol="0" anchor="ctr"/>
-            <a:lstStyle/>
-            <a:p>
-              <a:pPr algn="ctr"/>
-              <a:endParaRPr lang="de-DE"/>
-            </a:p>
-          </p:txBody>
-        </p:sp>
-        <p:sp>
-          <p:nvSpPr>
-            <p:cNvPr id="10" name="Rechteck 9">
-              <a:extLst>
-                <a:ext uri="{FF2B5EF4-FFF2-40B4-BE49-F238E27FC236}">
-                  <a16:creationId xmlns:a16="http://schemas.microsoft.com/office/drawing/2014/main" id="{08D2E803-D556-A454-DC9C-F8B5B5439A38}"/>
-                </a:ext>
-              </a:extLst>
-            </p:cNvPr>
-            <p:cNvSpPr/>
-            <p:nvPr/>
-          </p:nvSpPr>
-          <p:spPr>
-            <a:xfrm>
-              <a:off x="6243451" y="922572"/>
-              <a:ext cx="288032" cy="53884"/>
-            </a:xfrm>
-            <a:prstGeom prst="rect">
-              <a:avLst/>
-            </a:prstGeom>
-            <a:solidFill>
-              <a:srgbClr val="FFFFFF"/>
-            </a:solidFill>
-            <a:ln>
-              <a:noFill/>
-            </a:ln>
-          </p:spPr>
-          <p:style>
-            <a:lnRef idx="2">
-              <a:schemeClr val="accent1">
-                <a:shade val="15000"/>
-              </a:schemeClr>
-            </a:lnRef>
-            <a:fillRef idx="1">
-              <a:schemeClr val="accent1"/>
-            </a:fillRef>
-            <a:effectRef idx="0">
-              <a:schemeClr val="accent1"/>
-            </a:effectRef>
-            <a:fontRef idx="minor">
-              <a:schemeClr val="lt1"/>
-            </a:fontRef>
-          </p:style>
-          <p:txBody>
-            <a:bodyPr rtlCol="0" anchor="ctr"/>
-            <a:lstStyle/>
-            <a:p>
-              <a:pPr algn="ctr"/>
-              <a:endParaRPr lang="de-DE"/>
-            </a:p>
-          </p:txBody>
-        </p:sp>
-        <p:sp>
-          <p:nvSpPr>
-            <p:cNvPr id="12" name="Rechteck 11">
-              <a:extLst>
-                <a:ext uri="{FF2B5EF4-FFF2-40B4-BE49-F238E27FC236}">
-                  <a16:creationId xmlns:a16="http://schemas.microsoft.com/office/drawing/2014/main" id="{9D9ABC60-B8D2-02D6-EE7C-4096A13B58CE}"/>
-                </a:ext>
-              </a:extLst>
-            </p:cNvPr>
-            <p:cNvSpPr/>
-            <p:nvPr/>
-          </p:nvSpPr>
-          <p:spPr>
-            <a:xfrm>
-              <a:off x="3458121" y="930445"/>
-              <a:ext cx="288032" cy="53884"/>
-            </a:xfrm>
-            <a:prstGeom prst="rect">
-              <a:avLst/>
-            </a:prstGeom>
-            <a:solidFill>
-              <a:srgbClr val="FFFFFF"/>
-            </a:solidFill>
-            <a:ln>
-              <a:noFill/>
-            </a:ln>
-          </p:spPr>
-          <p:style>
-            <a:lnRef idx="2">
-              <a:schemeClr val="accent1">
-                <a:shade val="15000"/>
-              </a:schemeClr>
-            </a:lnRef>
-            <a:fillRef idx="1">
-              <a:schemeClr val="accent1"/>
-            </a:fillRef>
-            <a:effectRef idx="0">
-              <a:schemeClr val="accent1"/>
-            </a:effectRef>
-            <a:fontRef idx="minor">
-              <a:schemeClr val="lt1"/>
-            </a:fontRef>
-          </p:style>
-          <p:txBody>
-            <a:bodyPr rtlCol="0" anchor="ctr"/>
-            <a:lstStyle/>
-            <a:p>
-              <a:pPr algn="ctr"/>
-              <a:endParaRPr lang="de-DE"/>
-            </a:p>
-          </p:txBody>
-        </p:sp>
-      </p:grpSp>
+          <a:prstGeom prst="rect">
+            <a:avLst/>
+          </a:prstGeom>
+        </p:spPr>
+      </p:pic>
+    </p:spTree>
+    <p:extLst>
+      <p:ext uri="{BB962C8B-B14F-4D97-AF65-F5344CB8AC3E}">
+        <p14:creationId xmlns:p14="http://schemas.microsoft.com/office/powerpoint/2010/main" val="1067637087"/>
+      </p:ext>
+    </p:extLst>
+  </p:cSld>
+  <p:clrMapOvr>
+    <a:masterClrMapping/>
+  </p:clrMapOvr>
+</p:sld>
+</file>
+
+<file path=ppt/slides/slide8.xml><?xml version="1.0" encoding="utf-8"?>
+<p:sld xmlns:a="http://schemas.openxmlformats.org/drawingml/2006/main" xmlns:r="http://schemas.openxmlformats.org/officeDocument/2006/relationships" xmlns:p="http://schemas.openxmlformats.org/presentationml/2006/main">
+  <p:cSld>
+    <p:spTree>
+      <p:nvGrpSpPr>
+        <p:cNvPr id="1" name=""/>
+        <p:cNvGrpSpPr/>
+        <p:nvPr/>
+      </p:nvGrpSpPr>
+      <p:grpSpPr>
+        <a:xfrm>
+          <a:off x="0" y="0"/>
+          <a:ext cx="0" cy="0"/>
+          <a:chOff x="0" y="0"/>
+          <a:chExt cx="0" cy="0"/>
+        </a:xfrm>
+      </p:grpSpPr>
+      <p:sp>
+        <p:nvSpPr>
+          <p:cNvPr id="2" name="Titel 1">
+            <a:extLst>
+              <a:ext uri="{FF2B5EF4-FFF2-40B4-BE49-F238E27FC236}">
+                <a16:creationId xmlns:a16="http://schemas.microsoft.com/office/drawing/2014/main" id="{077BC84D-A2B7-CB21-35DE-267A8CFA0EC1}"/>
+              </a:ext>
+            </a:extLst>
+          </p:cNvPr>
+          <p:cNvSpPr>
+            <a:spLocks noGrp="1"/>
+          </p:cNvSpPr>
+          <p:nvPr>
+            <p:ph type="title"/>
+          </p:nvPr>
+        </p:nvSpPr>
+        <p:spPr/>
+        <p:txBody>
+          <a:bodyPr/>
+          <a:lstStyle/>
+          <a:p>
+            <a:r>
+              <a:rPr lang="de-DE" dirty="0"/>
+              <a:t>Single Airy </a:t>
+            </a:r>
+            <a:r>
+              <a:rPr lang="de-DE" dirty="0" err="1"/>
+              <a:t>spot</a:t>
+            </a:r>
+            <a:endParaRPr lang="de-DE" dirty="0"/>
+          </a:p>
+        </p:txBody>
+      </p:sp>
+      <p:sp>
+        <p:nvSpPr>
+          <p:cNvPr id="3" name="Inhaltsplatzhalter 2">
+            <a:extLst>
+              <a:ext uri="{FF2B5EF4-FFF2-40B4-BE49-F238E27FC236}">
+                <a16:creationId xmlns:a16="http://schemas.microsoft.com/office/drawing/2014/main" id="{65BD8CA9-6FD4-9FEF-8479-DF393D70483F}"/>
+              </a:ext>
+            </a:extLst>
+          </p:cNvPr>
+          <p:cNvSpPr>
+            <a:spLocks noGrp="1"/>
+          </p:cNvSpPr>
+          <p:nvPr>
+            <p:ph idx="11"/>
+          </p:nvPr>
+        </p:nvSpPr>
+        <p:spPr/>
+        <p:txBody>
+          <a:bodyPr/>
+          <a:lstStyle/>
+          <a:p>
+            <a:r>
+              <a:rPr lang="de-DE" dirty="0"/>
+              <a:t>1.9mm</a:t>
+            </a:r>
+          </a:p>
+          <a:p>
+            <a:endParaRPr lang="de-DE" dirty="0"/>
+          </a:p>
+        </p:txBody>
+      </p:sp>
     </p:spTree>
     <p:extLst>
       <p:ext uri="{BB962C8B-B14F-4D97-AF65-F5344CB8AC3E}">
@@ -10919,7 +11162,7 @@
 </p:sld>
 </file>
 
-<file path=ppt/slides/slide8.xml><?xml version="1.0" encoding="utf-8"?>
+<file path=ppt/slides/slide9.xml><?xml version="1.0" encoding="utf-8"?>
 <p:sld xmlns:a="http://schemas.openxmlformats.org/drawingml/2006/main" xmlns:r="http://schemas.openxmlformats.org/officeDocument/2006/relationships" xmlns:p="http://schemas.openxmlformats.org/presentationml/2006/main">
   <p:cSld>
     <p:spTree>
@@ -10992,236 +11235,54 @@
           <a:bodyPr/>
           <a:lstStyle/>
           <a:p>
-            <a:endParaRPr lang="de-DE"/>
+            <a:r>
+              <a:rPr lang="de-DE" dirty="0"/>
+              <a:t>T_0=16.22 </a:t>
+            </a:r>
+            <a:r>
+              <a:rPr lang="de-DE" dirty="0" err="1"/>
+              <a:t>us</a:t>
+            </a:r>
+            <a:endParaRPr lang="de-DE" dirty="0"/>
+          </a:p>
+          <a:p>
+            <a:r>
+              <a:rPr lang="de-DE" dirty="0" err="1"/>
+              <a:t>Centering</a:t>
+            </a:r>
+            <a:r>
+              <a:rPr lang="de-DE" dirty="0"/>
+              <a:t> </a:t>
+            </a:r>
+            <a:r>
+              <a:rPr lang="de-DE" dirty="0" err="1"/>
+              <a:t>Phases</a:t>
+            </a:r>
+            <a:endParaRPr lang="de-DE" dirty="0"/>
+          </a:p>
+          <a:p>
+            <a:endParaRPr lang="de-DE" dirty="0"/>
+          </a:p>
+          <a:p>
+            <a:r>
+              <a:rPr lang="de-DE" dirty="0"/>
+              <a:t>Crest </a:t>
+            </a:r>
+            <a:r>
+              <a:rPr lang="de-DE" dirty="0" err="1"/>
+              <a:t>Factor</a:t>
+            </a:r>
+            <a:endParaRPr lang="de-DE" dirty="0"/>
+          </a:p>
+          <a:p>
+            <a:endParaRPr lang="de-DE" dirty="0"/>
           </a:p>
         </p:txBody>
       </p:sp>
-      <p:pic>
-        <p:nvPicPr>
-          <p:cNvPr id="5" name="Grafik 4">
-            <a:extLst>
-              <a:ext uri="{FF2B5EF4-FFF2-40B4-BE49-F238E27FC236}">
-                <a16:creationId xmlns:a16="http://schemas.microsoft.com/office/drawing/2014/main" id="{C6146D53-3167-37FE-5204-7328769E95F1}"/>
-              </a:ext>
-            </a:extLst>
-          </p:cNvPr>
-          <p:cNvPicPr>
-            <a:picLocks noChangeAspect="1"/>
-          </p:cNvPicPr>
-          <p:nvPr/>
-        </p:nvPicPr>
-        <p:blipFill>
-          <a:blip r:embed="rId2"/>
-          <a:stretch>
-            <a:fillRect/>
-          </a:stretch>
-        </p:blipFill>
-        <p:spPr>
-          <a:xfrm>
-            <a:off x="5436096" y="1491630"/>
-            <a:ext cx="3320487" cy="2507406"/>
-          </a:xfrm>
-          <a:prstGeom prst="rect">
-            <a:avLst/>
-          </a:prstGeom>
-        </p:spPr>
-      </p:pic>
     </p:spTree>
     <p:extLst>
       <p:ext uri="{BB962C8B-B14F-4D97-AF65-F5344CB8AC3E}">
         <p14:creationId xmlns:p14="http://schemas.microsoft.com/office/powerpoint/2010/main" val="3559728493"/>
-      </p:ext>
-    </p:extLst>
-  </p:cSld>
-  <p:clrMapOvr>
-    <a:masterClrMapping/>
-  </p:clrMapOvr>
-</p:sld>
-</file>
-
-<file path=ppt/slides/slide9.xml><?xml version="1.0" encoding="utf-8"?>
-<p:sld xmlns:a="http://schemas.openxmlformats.org/drawingml/2006/main" xmlns:r="http://schemas.openxmlformats.org/officeDocument/2006/relationships" xmlns:p="http://schemas.openxmlformats.org/presentationml/2006/main">
-  <p:cSld>
-    <p:spTree>
-      <p:nvGrpSpPr>
-        <p:cNvPr id="1" name="">
-          <a:extLst>
-            <a:ext uri="{FF2B5EF4-FFF2-40B4-BE49-F238E27FC236}">
-              <a16:creationId xmlns:a16="http://schemas.microsoft.com/office/drawing/2014/main" id="{8BC4828C-DAEB-5F7C-943D-B957D9C93AAA}"/>
-            </a:ext>
-          </a:extLst>
-        </p:cNvPr>
-        <p:cNvGrpSpPr/>
-        <p:nvPr/>
-      </p:nvGrpSpPr>
-      <p:grpSpPr>
-        <a:xfrm>
-          <a:off x="0" y="0"/>
-          <a:ext cx="0" cy="0"/>
-          <a:chOff x="0" y="0"/>
-          <a:chExt cx="0" cy="0"/>
-        </a:xfrm>
-      </p:grpSpPr>
-      <p:sp>
-        <p:nvSpPr>
-          <p:cNvPr id="2" name="Titel 1">
-            <a:extLst>
-              <a:ext uri="{FF2B5EF4-FFF2-40B4-BE49-F238E27FC236}">
-                <a16:creationId xmlns:a16="http://schemas.microsoft.com/office/drawing/2014/main" id="{E15578B4-32F8-3384-8141-12E2B04A82EA}"/>
-              </a:ext>
-            </a:extLst>
-          </p:cNvPr>
-          <p:cNvSpPr>
-            <a:spLocks noGrp="1"/>
-          </p:cNvSpPr>
-          <p:nvPr>
-            <p:ph type="title"/>
-          </p:nvPr>
-        </p:nvSpPr>
-        <p:spPr/>
-        <p:txBody>
-          <a:bodyPr/>
-          <a:lstStyle/>
-          <a:p>
-            <a:r>
-              <a:rPr lang="de-DE" dirty="0"/>
-              <a:t>New Setup</a:t>
-            </a:r>
-          </a:p>
-        </p:txBody>
-      </p:sp>
-      <p:sp>
-        <p:nvSpPr>
-          <p:cNvPr id="3" name="Inhaltsplatzhalter 2">
-            <a:extLst>
-              <a:ext uri="{FF2B5EF4-FFF2-40B4-BE49-F238E27FC236}">
-                <a16:creationId xmlns:a16="http://schemas.microsoft.com/office/drawing/2014/main" id="{584F3AC2-508F-02BA-F3F0-30CB743D7298}"/>
-              </a:ext>
-            </a:extLst>
-          </p:cNvPr>
-          <p:cNvSpPr>
-            <a:spLocks noGrp="1"/>
-          </p:cNvSpPr>
-          <p:nvPr>
-            <p:ph idx="11"/>
-          </p:nvPr>
-        </p:nvSpPr>
-        <p:spPr/>
-        <p:txBody>
-          <a:bodyPr/>
-          <a:lstStyle/>
-          <a:p>
-            <a:endParaRPr lang="de-DE"/>
-          </a:p>
-        </p:txBody>
-      </p:sp>
-      <p:grpSp>
-        <p:nvGrpSpPr>
-          <p:cNvPr id="9" name="Gruppieren 8">
-            <a:extLst>
-              <a:ext uri="{FF2B5EF4-FFF2-40B4-BE49-F238E27FC236}">
-                <a16:creationId xmlns:a16="http://schemas.microsoft.com/office/drawing/2014/main" id="{3CEAD4DA-2287-0884-F980-72978873D3D1}"/>
-              </a:ext>
-            </a:extLst>
-          </p:cNvPr>
-          <p:cNvGrpSpPr/>
-          <p:nvPr/>
-        </p:nvGrpSpPr>
-        <p:grpSpPr>
-          <a:xfrm>
-            <a:off x="5148064" y="1126424"/>
-            <a:ext cx="3896654" cy="3603037"/>
-            <a:chOff x="5148064" y="1126424"/>
-            <a:chExt cx="3896654" cy="3603037"/>
-          </a:xfrm>
-        </p:grpSpPr>
-        <p:pic>
-          <p:nvPicPr>
-            <p:cNvPr id="7" name="Grafik 6">
-              <a:extLst>
-                <a:ext uri="{FF2B5EF4-FFF2-40B4-BE49-F238E27FC236}">
-                  <a16:creationId xmlns:a16="http://schemas.microsoft.com/office/drawing/2014/main" id="{63E439DE-CE97-C2DA-8FFD-D9658E61A04D}"/>
-                </a:ext>
-              </a:extLst>
-            </p:cNvPr>
-            <p:cNvPicPr>
-              <a:picLocks noChangeAspect="1"/>
-            </p:cNvPicPr>
-            <p:nvPr/>
-          </p:nvPicPr>
-          <p:blipFill>
-            <a:blip r:embed="rId2"/>
-            <a:stretch>
-              <a:fillRect/>
-            </a:stretch>
-          </p:blipFill>
-          <p:spPr>
-            <a:xfrm>
-              <a:off x="5148064" y="1126424"/>
-              <a:ext cx="3896654" cy="3603037"/>
-            </a:xfrm>
-            <a:prstGeom prst="rect">
-              <a:avLst/>
-            </a:prstGeom>
-          </p:spPr>
-        </p:pic>
-        <p:sp>
-          <p:nvSpPr>
-            <p:cNvPr id="8" name="Rechteck 7">
-              <a:extLst>
-                <a:ext uri="{FF2B5EF4-FFF2-40B4-BE49-F238E27FC236}">
-                  <a16:creationId xmlns:a16="http://schemas.microsoft.com/office/drawing/2014/main" id="{717CB9E4-4F6A-A723-1A17-D8D4397FABD6}"/>
-                </a:ext>
-              </a:extLst>
-            </p:cNvPr>
-            <p:cNvSpPr/>
-            <p:nvPr/>
-          </p:nvSpPr>
-          <p:spPr>
-            <a:xfrm>
-              <a:off x="5148064" y="1193982"/>
-              <a:ext cx="1448931" cy="1048756"/>
-            </a:xfrm>
-            <a:prstGeom prst="rect">
-              <a:avLst/>
-            </a:prstGeom>
-            <a:solidFill>
-              <a:srgbClr val="FFFFFF"/>
-            </a:solidFill>
-            <a:ln>
-              <a:noFill/>
-            </a:ln>
-          </p:spPr>
-          <p:style>
-            <a:lnRef idx="2">
-              <a:schemeClr val="accent1">
-                <a:shade val="15000"/>
-              </a:schemeClr>
-            </a:lnRef>
-            <a:fillRef idx="1">
-              <a:schemeClr val="accent1"/>
-            </a:fillRef>
-            <a:effectRef idx="0">
-              <a:schemeClr val="accent1"/>
-            </a:effectRef>
-            <a:fontRef idx="minor">
-              <a:schemeClr val="lt1"/>
-            </a:fontRef>
-          </p:style>
-          <p:txBody>
-            <a:bodyPr rtlCol="0" anchor="ctr"/>
-            <a:lstStyle/>
-            <a:p>
-              <a:pPr algn="ctr"/>
-              <a:endParaRPr lang="de-DE" dirty="0"/>
-            </a:p>
-          </p:txBody>
-        </p:sp>
-      </p:grpSp>
-    </p:spTree>
-    <p:extLst>
-      <p:ext uri="{BB962C8B-B14F-4D97-AF65-F5344CB8AC3E}">
-        <p14:creationId xmlns:p14="http://schemas.microsoft.com/office/powerpoint/2010/main" val="95214738"/>
       </p:ext>
     </p:extLst>
   </p:cSld>
